--- a/attach/UWM/UWM_PH702_2026Fall_Part04.pptx
+++ b/attach/UWM/UWM_PH702_2026Fall_Part04.pptx
@@ -25,20 +25,20 @@
     <p:sldId id="325" r:id="rId13"/>
     <p:sldId id="326" r:id="rId14"/>
     <p:sldId id="358" r:id="rId15"/>
-    <p:sldId id="328" r:id="rId16"/>
-    <p:sldId id="329" r:id="rId17"/>
-    <p:sldId id="363" r:id="rId18"/>
-    <p:sldId id="331" r:id="rId19"/>
-    <p:sldId id="330" r:id="rId20"/>
-    <p:sldId id="364" r:id="rId21"/>
-    <p:sldId id="316" r:id="rId22"/>
-    <p:sldId id="360" r:id="rId23"/>
-    <p:sldId id="334" r:id="rId24"/>
-    <p:sldId id="335" r:id="rId25"/>
-    <p:sldId id="336" r:id="rId26"/>
-    <p:sldId id="365" r:id="rId27"/>
-    <p:sldId id="339" r:id="rId28"/>
-    <p:sldId id="355" r:id="rId29"/>
+    <p:sldId id="330" r:id="rId16"/>
+    <p:sldId id="364" r:id="rId17"/>
+    <p:sldId id="328" r:id="rId18"/>
+    <p:sldId id="329" r:id="rId19"/>
+    <p:sldId id="363" r:id="rId20"/>
+    <p:sldId id="316" r:id="rId21"/>
+    <p:sldId id="360" r:id="rId22"/>
+    <p:sldId id="334" r:id="rId23"/>
+    <p:sldId id="335" r:id="rId24"/>
+    <p:sldId id="336" r:id="rId25"/>
+    <p:sldId id="365" r:id="rId26"/>
+    <p:sldId id="339" r:id="rId27"/>
+    <p:sldId id="355" r:id="rId28"/>
+    <p:sldId id="367" r:id="rId29"/>
     <p:sldId id="340" r:id="rId30"/>
     <p:sldId id="366" r:id="rId31"/>
   </p:sldIdLst>
@@ -205,7 +205,7 @@
 <file path=ppt/revisionInfo.xml><?xml version="1.0" encoding="utf-8"?>
 <p1510:revInfo xmlns:a="http://schemas.openxmlformats.org/drawingml/2006/main" xmlns:r="http://schemas.openxmlformats.org/officeDocument/2006/relationships" xmlns:p1510="http://schemas.microsoft.com/office/powerpoint/2015/10/main">
   <p1510:revLst>
-    <p1510:client id="{BA6B6E64-9509-437F-9A54-4EF6ED5A3E4B}" v="1302" dt="2026-10-03T06:24:31.609"/>
+    <p1510:client id="{BA6B6E64-9509-437F-9A54-4EF6ED5A3E4B}" v="1946" dt="2026-10-06T03:10:51.159"/>
   </p1510:revLst>
 </p1510:revInfo>
 </file>
@@ -214,352 +214,80 @@
 <pc:chgInfo xmlns:a="http://schemas.openxmlformats.org/drawingml/2006/main" xmlns:r="http://schemas.openxmlformats.org/officeDocument/2006/relationships" xmlns:ac="http://schemas.microsoft.com/office/drawing/2013/main/command" xmlns:pc="http://schemas.microsoft.com/office/powerpoint/2013/main/command">
   <pc:docChgLst>
     <pc:chgData name="Zhiyang Zhou" userId="715b216a-9552-4d73-a9aa-1ef002111b6f" providerId="ADAL" clId="{2B661EA1-28DD-4C7A-9BAA-1E2E41397E83}"/>
-    <pc:docChg chg="undo custSel addSld delSld modSld">
-      <pc:chgData name="Zhiyang Zhou" userId="715b216a-9552-4d73-a9aa-1ef002111b6f" providerId="ADAL" clId="{2B661EA1-28DD-4C7A-9BAA-1E2E41397E83}" dt="2026-10-03T06:24:50.141" v="2468" actId="2696"/>
+    <pc:docChg chg="custSel addSld modSld">
+      <pc:chgData name="Zhiyang Zhou" userId="715b216a-9552-4d73-a9aa-1ef002111b6f" providerId="ADAL" clId="{2B661EA1-28DD-4C7A-9BAA-1E2E41397E83}" dt="2026-10-06T03:11:00.838" v="495" actId="20577"/>
       <pc:docMkLst>
         <pc:docMk/>
       </pc:docMkLst>
-      <pc:sldChg chg="modSp">
-        <pc:chgData name="Zhiyang Zhou" userId="715b216a-9552-4d73-a9aa-1ef002111b6f" providerId="ADAL" clId="{2B661EA1-28DD-4C7A-9BAA-1E2E41397E83}" dt="2026-10-02T21:07:36.012" v="24" actId="20577"/>
+      <pc:sldChg chg="modSp mod modAnim">
+        <pc:chgData name="Zhiyang Zhou" userId="715b216a-9552-4d73-a9aa-1ef002111b6f" providerId="ADAL" clId="{2B661EA1-28DD-4C7A-9BAA-1E2E41397E83}" dt="2026-10-06T02:59:47.788" v="253" actId="20577"/>
         <pc:sldMkLst>
           <pc:docMk/>
-          <pc:sldMk cId="0" sldId="319"/>
+          <pc:sldMk cId="0" sldId="324"/>
         </pc:sldMkLst>
         <pc:spChg chg="mod">
-          <ac:chgData name="Zhiyang Zhou" userId="715b216a-9552-4d73-a9aa-1ef002111b6f" providerId="ADAL" clId="{2B661EA1-28DD-4C7A-9BAA-1E2E41397E83}" dt="2026-10-02T21:07:36.012" v="24" actId="20577"/>
+          <ac:chgData name="Zhiyang Zhou" userId="715b216a-9552-4d73-a9aa-1ef002111b6f" providerId="ADAL" clId="{2B661EA1-28DD-4C7A-9BAA-1E2E41397E83}" dt="2026-10-06T02:59:47.788" v="253" actId="20577"/>
           <ac:spMkLst>
             <pc:docMk/>
-            <pc:sldMk cId="0" sldId="319"/>
-            <ac:spMk id="1265667" creationId="{00000000-0000-0000-0000-000000000000}"/>
-          </ac:spMkLst>
-        </pc:spChg>
-      </pc:sldChg>
-      <pc:sldChg chg="modSp mod">
-        <pc:chgData name="Zhiyang Zhou" userId="715b216a-9552-4d73-a9aa-1ef002111b6f" providerId="ADAL" clId="{2B661EA1-28DD-4C7A-9BAA-1E2E41397E83}" dt="2026-10-02T22:02:09.569" v="120" actId="20577"/>
-        <pc:sldMkLst>
-          <pc:docMk/>
-          <pc:sldMk cId="0" sldId="323"/>
-        </pc:sldMkLst>
-        <pc:spChg chg="mod">
-          <ac:chgData name="Zhiyang Zhou" userId="715b216a-9552-4d73-a9aa-1ef002111b6f" providerId="ADAL" clId="{2B661EA1-28DD-4C7A-9BAA-1E2E41397E83}" dt="2026-10-02T22:02:09.569" v="120" actId="20577"/>
-          <ac:spMkLst>
-            <pc:docMk/>
-            <pc:sldMk cId="0" sldId="323"/>
-            <ac:spMk id="7" creationId="{00000000-0000-0000-0000-000000000000}"/>
-          </ac:spMkLst>
-        </pc:spChg>
-      </pc:sldChg>
-      <pc:sldChg chg="delSp modSp mod modAnim">
-        <pc:chgData name="Zhiyang Zhou" userId="715b216a-9552-4d73-a9aa-1ef002111b6f" providerId="ADAL" clId="{2B661EA1-28DD-4C7A-9BAA-1E2E41397E83}" dt="2026-10-02T22:19:25.519" v="199" actId="207"/>
-        <pc:sldMkLst>
-          <pc:docMk/>
-          <pc:sldMk cId="0" sldId="325"/>
-        </pc:sldMkLst>
-        <pc:spChg chg="del mod">
-          <ac:chgData name="Zhiyang Zhou" userId="715b216a-9552-4d73-a9aa-1ef002111b6f" providerId="ADAL" clId="{2B661EA1-28DD-4C7A-9BAA-1E2E41397E83}" dt="2026-10-02T22:18:19.562" v="193" actId="478"/>
-          <ac:spMkLst>
-            <pc:docMk/>
-            <pc:sldMk cId="0" sldId="325"/>
-            <ac:spMk id="46" creationId="{00000000-0000-0000-0000-000000000000}"/>
+            <pc:sldMk cId="0" sldId="324"/>
+            <ac:spMk id="9" creationId="{00000000-0000-0000-0000-000000000000}"/>
           </ac:spMkLst>
         </pc:spChg>
         <pc:spChg chg="mod">
-          <ac:chgData name="Zhiyang Zhou" userId="715b216a-9552-4d73-a9aa-1ef002111b6f" providerId="ADAL" clId="{2B661EA1-28DD-4C7A-9BAA-1E2E41397E83}" dt="2026-10-02T22:19:25.519" v="199" actId="207"/>
+          <ac:chgData name="Zhiyang Zhou" userId="715b216a-9552-4d73-a9aa-1ef002111b6f" providerId="ADAL" clId="{2B661EA1-28DD-4C7A-9BAA-1E2E41397E83}" dt="2026-10-06T02:58:35.651" v="189" actId="1035"/>
           <ac:spMkLst>
             <pc:docMk/>
-            <pc:sldMk cId="0" sldId="325"/>
-            <ac:spMk id="37892" creationId="{00000000-0000-0000-0000-000000000000}"/>
-          </ac:spMkLst>
-        </pc:spChg>
-      </pc:sldChg>
-      <pc:sldChg chg="modSp mod">
-        <pc:chgData name="Zhiyang Zhou" userId="715b216a-9552-4d73-a9aa-1ef002111b6f" providerId="ADAL" clId="{2B661EA1-28DD-4C7A-9BAA-1E2E41397E83}" dt="2026-10-02T23:19:23.040" v="518" actId="20577"/>
-        <pc:sldMkLst>
-          <pc:docMk/>
-          <pc:sldMk cId="0" sldId="326"/>
-        </pc:sldMkLst>
-        <pc:spChg chg="mod">
-          <ac:chgData name="Zhiyang Zhou" userId="715b216a-9552-4d73-a9aa-1ef002111b6f" providerId="ADAL" clId="{2B661EA1-28DD-4C7A-9BAA-1E2E41397E83}" dt="2026-10-02T23:19:23.040" v="518" actId="20577"/>
-          <ac:spMkLst>
-            <pc:docMk/>
-            <pc:sldMk cId="0" sldId="326"/>
-            <ac:spMk id="6" creationId="{00000000-0000-0000-0000-000000000000}"/>
-          </ac:spMkLst>
-        </pc:spChg>
-        <pc:spChg chg="mod">
-          <ac:chgData name="Zhiyang Zhou" userId="715b216a-9552-4d73-a9aa-1ef002111b6f" providerId="ADAL" clId="{2B661EA1-28DD-4C7A-9BAA-1E2E41397E83}" dt="2026-10-02T22:27:34.257" v="220" actId="20577"/>
-          <ac:spMkLst>
-            <pc:docMk/>
-            <pc:sldMk cId="0" sldId="326"/>
-            <ac:spMk id="38914" creationId="{00000000-0000-0000-0000-000000000000}"/>
-          </ac:spMkLst>
-        </pc:spChg>
-        <pc:spChg chg="mod">
-          <ac:chgData name="Zhiyang Zhou" userId="715b216a-9552-4d73-a9aa-1ef002111b6f" providerId="ADAL" clId="{2B661EA1-28DD-4C7A-9BAA-1E2E41397E83}" dt="2026-10-02T23:17:42.736" v="508" actId="20577"/>
-          <ac:spMkLst>
-            <pc:docMk/>
-            <pc:sldMk cId="0" sldId="326"/>
-            <ac:spMk id="38915" creationId="{00000000-0000-0000-0000-000000000000}"/>
-          </ac:spMkLst>
-        </pc:spChg>
-      </pc:sldChg>
-      <pc:sldChg chg="modSp mod modAnim">
-        <pc:chgData name="Zhiyang Zhou" userId="715b216a-9552-4d73-a9aa-1ef002111b6f" providerId="ADAL" clId="{2B661EA1-28DD-4C7A-9BAA-1E2E41397E83}" dt="2026-10-03T02:05:03.906" v="603" actId="20577"/>
-        <pc:sldMkLst>
-          <pc:docMk/>
-          <pc:sldMk cId="0" sldId="328"/>
-        </pc:sldMkLst>
-        <pc:spChg chg="mod">
-          <ac:chgData name="Zhiyang Zhou" userId="715b216a-9552-4d73-a9aa-1ef002111b6f" providerId="ADAL" clId="{2B661EA1-28DD-4C7A-9BAA-1E2E41397E83}" dt="2026-10-03T01:48:31.183" v="590" actId="20577"/>
-          <ac:spMkLst>
-            <pc:docMk/>
-            <pc:sldMk cId="0" sldId="328"/>
-            <ac:spMk id="6" creationId="{00000000-0000-0000-0000-000000000000}"/>
-          </ac:spMkLst>
-        </pc:spChg>
-        <pc:spChg chg="mod">
-          <ac:chgData name="Zhiyang Zhou" userId="715b216a-9552-4d73-a9aa-1ef002111b6f" providerId="ADAL" clId="{2B661EA1-28DD-4C7A-9BAA-1E2E41397E83}" dt="2026-10-03T02:05:03.906" v="603" actId="20577"/>
-          <ac:spMkLst>
-            <pc:docMk/>
-            <pc:sldMk cId="0" sldId="328"/>
-            <ac:spMk id="8" creationId="{00000000-0000-0000-0000-000000000000}"/>
-          </ac:spMkLst>
-        </pc:spChg>
-        <pc:spChg chg="mod">
-          <ac:chgData name="Zhiyang Zhou" userId="715b216a-9552-4d73-a9aa-1ef002111b6f" providerId="ADAL" clId="{2B661EA1-28DD-4C7A-9BAA-1E2E41397E83}" dt="2026-10-02T23:27:54.007" v="577" actId="20577"/>
-          <ac:spMkLst>
-            <pc:docMk/>
-            <pc:sldMk cId="0" sldId="328"/>
-            <ac:spMk id="43011" creationId="{00000000-0000-0000-0000-000000000000}"/>
-          </ac:spMkLst>
-        </pc:spChg>
-      </pc:sldChg>
-      <pc:sldChg chg="delSp modSp mod delAnim modAnim">
-        <pc:chgData name="Zhiyang Zhou" userId="715b216a-9552-4d73-a9aa-1ef002111b6f" providerId="ADAL" clId="{2B661EA1-28DD-4C7A-9BAA-1E2E41397E83}" dt="2026-10-03T02:39:08.991" v="767" actId="1076"/>
-        <pc:sldMkLst>
-          <pc:docMk/>
-          <pc:sldMk cId="0" sldId="329"/>
-        </pc:sldMkLst>
-        <pc:spChg chg="del mod">
-          <ac:chgData name="Zhiyang Zhou" userId="715b216a-9552-4d73-a9aa-1ef002111b6f" providerId="ADAL" clId="{2B661EA1-28DD-4C7A-9BAA-1E2E41397E83}" dt="2026-10-03T02:38:59.247" v="765" actId="478"/>
-          <ac:spMkLst>
-            <pc:docMk/>
-            <pc:sldMk cId="0" sldId="329"/>
-            <ac:spMk id="8" creationId="{00000000-0000-0000-0000-000000000000}"/>
-          </ac:spMkLst>
-        </pc:spChg>
-        <pc:spChg chg="mod">
-          <ac:chgData name="Zhiyang Zhou" userId="715b216a-9552-4d73-a9aa-1ef002111b6f" providerId="ADAL" clId="{2B661EA1-28DD-4C7A-9BAA-1E2E41397E83}" dt="2026-10-03T02:39:05.586" v="766" actId="1076"/>
-          <ac:spMkLst>
-            <pc:docMk/>
-            <pc:sldMk cId="0" sldId="329"/>
-            <ac:spMk id="9" creationId="{00000000-0000-0000-0000-000000000000}"/>
-          </ac:spMkLst>
-        </pc:spChg>
-        <pc:spChg chg="del mod">
-          <ac:chgData name="Zhiyang Zhou" userId="715b216a-9552-4d73-a9aa-1ef002111b6f" providerId="ADAL" clId="{2B661EA1-28DD-4C7A-9BAA-1E2E41397E83}" dt="2026-10-03T02:38:57.827" v="764" actId="478"/>
-          <ac:spMkLst>
-            <pc:docMk/>
-            <pc:sldMk cId="0" sldId="329"/>
-            <ac:spMk id="38918" creationId="{00000000-0000-0000-0000-000000000000}"/>
-          </ac:spMkLst>
-        </pc:spChg>
-        <pc:spChg chg="mod">
-          <ac:chgData name="Zhiyang Zhou" userId="715b216a-9552-4d73-a9aa-1ef002111b6f" providerId="ADAL" clId="{2B661EA1-28DD-4C7A-9BAA-1E2E41397E83}" dt="2026-10-03T02:06:56.090" v="606" actId="20577"/>
-          <ac:spMkLst>
-            <pc:docMk/>
-            <pc:sldMk cId="0" sldId="329"/>
-            <ac:spMk id="44034" creationId="{00000000-0000-0000-0000-000000000000}"/>
-          </ac:spMkLst>
-        </pc:spChg>
-        <pc:spChg chg="mod">
-          <ac:chgData name="Zhiyang Zhou" userId="715b216a-9552-4d73-a9aa-1ef002111b6f" providerId="ADAL" clId="{2B661EA1-28DD-4C7A-9BAA-1E2E41397E83}" dt="2026-10-03T02:39:08.991" v="767" actId="1076"/>
-          <ac:spMkLst>
-            <pc:docMk/>
-            <pc:sldMk cId="0" sldId="329"/>
-            <ac:spMk id="44035" creationId="{00000000-0000-0000-0000-000000000000}"/>
-          </ac:spMkLst>
-        </pc:spChg>
-      </pc:sldChg>
-      <pc:sldChg chg="addSp delSp modSp mod modAnim">
-        <pc:chgData name="Zhiyang Zhou" userId="715b216a-9552-4d73-a9aa-1ef002111b6f" providerId="ADAL" clId="{2B661EA1-28DD-4C7A-9BAA-1E2E41397E83}" dt="2026-10-03T03:32:23.744" v="1142" actId="20577"/>
-        <pc:sldMkLst>
-          <pc:docMk/>
-          <pc:sldMk cId="0" sldId="330"/>
-        </pc:sldMkLst>
-        <pc:spChg chg="add mod">
-          <ac:chgData name="Zhiyang Zhou" userId="715b216a-9552-4d73-a9aa-1ef002111b6f" providerId="ADAL" clId="{2B661EA1-28DD-4C7A-9BAA-1E2E41397E83}" dt="2026-10-03T03:31:30.463" v="1131" actId="1035"/>
-          <ac:spMkLst>
-            <pc:docMk/>
-            <pc:sldMk cId="0" sldId="330"/>
-            <ac:spMk id="3" creationId="{CD2B8BE2-B24B-8CCA-2A92-723074F17292}"/>
-          </ac:spMkLst>
-        </pc:spChg>
-        <pc:spChg chg="add mod">
-          <ac:chgData name="Zhiyang Zhou" userId="715b216a-9552-4d73-a9aa-1ef002111b6f" providerId="ADAL" clId="{2B661EA1-28DD-4C7A-9BAA-1E2E41397E83}" dt="2026-10-03T03:32:23.744" v="1142" actId="20577"/>
-          <ac:spMkLst>
-            <pc:docMk/>
-            <pc:sldMk cId="0" sldId="330"/>
-            <ac:spMk id="4" creationId="{0DF6336C-BAB6-FABE-06D2-E9BD5BC003B0}"/>
-          </ac:spMkLst>
-        </pc:spChg>
-        <pc:spChg chg="mod">
-          <ac:chgData name="Zhiyang Zhou" userId="715b216a-9552-4d73-a9aa-1ef002111b6f" providerId="ADAL" clId="{2B661EA1-28DD-4C7A-9BAA-1E2E41397E83}" dt="2026-10-03T03:30:36.688" v="1122" actId="1035"/>
-          <ac:spMkLst>
-            <pc:docMk/>
-            <pc:sldMk cId="0" sldId="330"/>
-            <ac:spMk id="10" creationId="{00000000-0000-0000-0000-000000000000}"/>
-          </ac:spMkLst>
-        </pc:spChg>
-        <pc:spChg chg="mod">
-          <ac:chgData name="Zhiyang Zhou" userId="715b216a-9552-4d73-a9aa-1ef002111b6f" providerId="ADAL" clId="{2B661EA1-28DD-4C7A-9BAA-1E2E41397E83}" dt="2026-10-03T03:03:04.446" v="978" actId="20577"/>
-          <ac:spMkLst>
-            <pc:docMk/>
-            <pc:sldMk cId="0" sldId="330"/>
-            <ac:spMk id="46082" creationId="{00000000-0000-0000-0000-000000000000}"/>
-          </ac:spMkLst>
-        </pc:spChg>
-        <pc:picChg chg="del mod">
-          <ac:chgData name="Zhiyang Zhou" userId="715b216a-9552-4d73-a9aa-1ef002111b6f" providerId="ADAL" clId="{2B661EA1-28DD-4C7A-9BAA-1E2E41397E83}" dt="2026-10-03T03:30:15.178" v="1077" actId="478"/>
-          <ac:picMkLst>
-            <pc:docMk/>
-            <pc:sldMk cId="0" sldId="330"/>
-            <ac:picMk id="5" creationId="{48D56349-C5A3-24FA-BE50-DBE93031E7D4}"/>
-          </ac:picMkLst>
-        </pc:picChg>
-      </pc:sldChg>
-      <pc:sldChg chg="modSp mod">
-        <pc:chgData name="Zhiyang Zhou" userId="715b216a-9552-4d73-a9aa-1ef002111b6f" providerId="ADAL" clId="{2B661EA1-28DD-4C7A-9BAA-1E2E41397E83}" dt="2026-10-03T03:01:58.854" v="950" actId="20577"/>
-        <pc:sldMkLst>
-          <pc:docMk/>
-          <pc:sldMk cId="0" sldId="331"/>
-        </pc:sldMkLst>
-        <pc:spChg chg="mod">
-          <ac:chgData name="Zhiyang Zhou" userId="715b216a-9552-4d73-a9aa-1ef002111b6f" providerId="ADAL" clId="{2B661EA1-28DD-4C7A-9BAA-1E2E41397E83}" dt="2026-10-03T03:01:58.854" v="950" actId="20577"/>
-          <ac:spMkLst>
-            <pc:docMk/>
-            <pc:sldMk cId="0" sldId="331"/>
-            <ac:spMk id="7" creationId="{00000000-0000-0000-0000-000000000000}"/>
+            <pc:sldMk cId="0" sldId="324"/>
+            <ac:spMk id="35843" creationId="{00000000-0000-0000-0000-000000000000}"/>
           </ac:spMkLst>
         </pc:spChg>
       </pc:sldChg>
       <pc:sldChg chg="modSp">
-        <pc:chgData name="Zhiyang Zhou" userId="715b216a-9552-4d73-a9aa-1ef002111b6f" providerId="ADAL" clId="{2B661EA1-28DD-4C7A-9BAA-1E2E41397E83}" dt="2026-10-03T03:57:35.320" v="1150" actId="20577"/>
-        <pc:sldMkLst>
-          <pc:docMk/>
-          <pc:sldMk cId="0" sldId="334"/>
-        </pc:sldMkLst>
-        <pc:spChg chg="mod">
-          <ac:chgData name="Zhiyang Zhou" userId="715b216a-9552-4d73-a9aa-1ef002111b6f" providerId="ADAL" clId="{2B661EA1-28DD-4C7A-9BAA-1E2E41397E83}" dt="2026-10-03T03:57:35.320" v="1150" actId="20577"/>
-          <ac:spMkLst>
-            <pc:docMk/>
-            <pc:sldMk cId="0" sldId="334"/>
-            <ac:spMk id="7" creationId="{00000000-0000-0000-0000-000000000000}"/>
-          </ac:spMkLst>
-        </pc:spChg>
-      </pc:sldChg>
-      <pc:sldChg chg="modSp">
-        <pc:chgData name="Zhiyang Zhou" userId="715b216a-9552-4d73-a9aa-1ef002111b6f" providerId="ADAL" clId="{2B661EA1-28DD-4C7A-9BAA-1E2E41397E83}" dt="2026-10-03T03:59:13.353" v="1163" actId="20577"/>
+        <pc:chgData name="Zhiyang Zhou" userId="715b216a-9552-4d73-a9aa-1ef002111b6f" providerId="ADAL" clId="{2B661EA1-28DD-4C7A-9BAA-1E2E41397E83}" dt="2026-10-06T02:57:08.023" v="165" actId="20577"/>
         <pc:sldMkLst>
           <pc:docMk/>
           <pc:sldMk cId="0" sldId="335"/>
         </pc:sldMkLst>
         <pc:spChg chg="mod">
-          <ac:chgData name="Zhiyang Zhou" userId="715b216a-9552-4d73-a9aa-1ef002111b6f" providerId="ADAL" clId="{2B661EA1-28DD-4C7A-9BAA-1E2E41397E83}" dt="2026-10-03T03:59:13.353" v="1163" actId="20577"/>
+          <ac:chgData name="Zhiyang Zhou" userId="715b216a-9552-4d73-a9aa-1ef002111b6f" providerId="ADAL" clId="{2B661EA1-28DD-4C7A-9BAA-1E2E41397E83}" dt="2026-10-06T02:57:08.023" v="165" actId="20577"/>
           <ac:spMkLst>
             <pc:docMk/>
             <pc:sldMk cId="0" sldId="335"/>
-            <ac:spMk id="9" creationId="{00000000-0000-0000-0000-000000000000}"/>
+            <ac:spMk id="10" creationId="{00000000-0000-0000-0000-000000000000}"/>
           </ac:spMkLst>
         </pc:spChg>
       </pc:sldChg>
-      <pc:sldChg chg="addSp delSp modSp mod delAnim modAnim">
-        <pc:chgData name="Zhiyang Zhou" userId="715b216a-9552-4d73-a9aa-1ef002111b6f" providerId="ADAL" clId="{2B661EA1-28DD-4C7A-9BAA-1E2E41397E83}" dt="2026-10-03T05:05:15.151" v="1828" actId="1035"/>
+      <pc:sldChg chg="modSp mod">
+        <pc:chgData name="Zhiyang Zhou" userId="715b216a-9552-4d73-a9aa-1ef002111b6f" providerId="ADAL" clId="{2B661EA1-28DD-4C7A-9BAA-1E2E41397E83}" dt="2026-10-06T02:55:14.219" v="97" actId="20577"/>
         <pc:sldMkLst>
           <pc:docMk/>
           <pc:sldMk cId="0" sldId="336"/>
         </pc:sldMkLst>
-        <pc:spChg chg="add mod">
-          <ac:chgData name="Zhiyang Zhou" userId="715b216a-9552-4d73-a9aa-1ef002111b6f" providerId="ADAL" clId="{2B661EA1-28DD-4C7A-9BAA-1E2E41397E83}" dt="2026-10-03T05:05:15.151" v="1828" actId="1035"/>
+        <pc:spChg chg="mod">
+          <ac:chgData name="Zhiyang Zhou" userId="715b216a-9552-4d73-a9aa-1ef002111b6f" providerId="ADAL" clId="{2B661EA1-28DD-4C7A-9BAA-1E2E41397E83}" dt="2026-10-06T02:55:14.219" v="97" actId="20577"/>
           <ac:spMkLst>
             <pc:docMk/>
             <pc:sldMk cId="0" sldId="336"/>
             <ac:spMk id="4" creationId="{5290BE32-4F78-FE80-BACC-D492C61E34DF}"/>
           </ac:spMkLst>
         </pc:spChg>
-        <pc:spChg chg="add mod">
-          <ac:chgData name="Zhiyang Zhou" userId="715b216a-9552-4d73-a9aa-1ef002111b6f" providerId="ADAL" clId="{2B661EA1-28DD-4C7A-9BAA-1E2E41397E83}" dt="2026-10-03T05:02:01.071" v="1793" actId="1037"/>
-          <ac:spMkLst>
-            <pc:docMk/>
-            <pc:sldMk cId="0" sldId="336"/>
-            <ac:spMk id="5" creationId="{756C6B4D-3D36-B979-5211-DF7649A6C8E7}"/>
-          </ac:spMkLst>
-        </pc:spChg>
-        <pc:spChg chg="add mod">
-          <ac:chgData name="Zhiyang Zhou" userId="715b216a-9552-4d73-a9aa-1ef002111b6f" providerId="ADAL" clId="{2B661EA1-28DD-4C7A-9BAA-1E2E41397E83}" dt="2026-10-03T05:02:49.718" v="1803" actId="20577"/>
-          <ac:spMkLst>
-            <pc:docMk/>
-            <pc:sldMk cId="0" sldId="336"/>
-            <ac:spMk id="7" creationId="{3CDAA471-7CD8-6869-5821-23F00EE59816}"/>
-          </ac:spMkLst>
-        </pc:spChg>
-        <pc:spChg chg="mod">
-          <ac:chgData name="Zhiyang Zhou" userId="715b216a-9552-4d73-a9aa-1ef002111b6f" providerId="ADAL" clId="{2B661EA1-28DD-4C7A-9BAA-1E2E41397E83}" dt="2026-10-03T05:01:55.778" v="1770" actId="1035"/>
-          <ac:spMkLst>
-            <pc:docMk/>
-            <pc:sldMk cId="0" sldId="336"/>
-            <ac:spMk id="10" creationId="{00000000-0000-0000-0000-000000000000}"/>
-          </ac:spMkLst>
-        </pc:spChg>
-        <pc:spChg chg="mod">
-          <ac:chgData name="Zhiyang Zhou" userId="715b216a-9552-4d73-a9aa-1ef002111b6f" providerId="ADAL" clId="{2B661EA1-28DD-4C7A-9BAA-1E2E41397E83}" dt="2026-10-03T04:46:13.161" v="1532"/>
-          <ac:spMkLst>
-            <pc:docMk/>
-            <pc:sldMk cId="0" sldId="336"/>
-            <ac:spMk id="12" creationId="{00000000-0000-0000-0000-000000000000}"/>
-          </ac:spMkLst>
-        </pc:spChg>
-        <pc:spChg chg="mod">
-          <ac:chgData name="Zhiyang Zhou" userId="715b216a-9552-4d73-a9aa-1ef002111b6f" providerId="ADAL" clId="{2B661EA1-28DD-4C7A-9BAA-1E2E41397E83}" dt="2026-10-03T04:46:13.161" v="1532"/>
-          <ac:spMkLst>
-            <pc:docMk/>
-            <pc:sldMk cId="0" sldId="336"/>
-            <ac:spMk id="13" creationId="{00000000-0000-0000-0000-000000000000}"/>
-          </ac:spMkLst>
-        </pc:spChg>
-        <pc:spChg chg="mod">
-          <ac:chgData name="Zhiyang Zhou" userId="715b216a-9552-4d73-a9aa-1ef002111b6f" providerId="ADAL" clId="{2B661EA1-28DD-4C7A-9BAA-1E2E41397E83}" dt="2026-10-03T04:45:36.897" v="1529"/>
-          <ac:spMkLst>
-            <pc:docMk/>
-            <pc:sldMk cId="0" sldId="336"/>
-            <ac:spMk id="52226" creationId="{00000000-0000-0000-0000-000000000000}"/>
-          </ac:spMkLst>
-        </pc:spChg>
-        <pc:grpChg chg="del mod">
-          <ac:chgData name="Zhiyang Zhou" userId="715b216a-9552-4d73-a9aa-1ef002111b6f" providerId="ADAL" clId="{2B661EA1-28DD-4C7A-9BAA-1E2E41397E83}" dt="2026-10-03T04:49:51.347" v="1534" actId="478"/>
-          <ac:grpSpMkLst>
-            <pc:docMk/>
-            <pc:sldMk cId="0" sldId="336"/>
-            <ac:grpSpMk id="2" creationId="{00000000-0000-0000-0000-000000000000}"/>
-          </ac:grpSpMkLst>
-        </pc:grpChg>
       </pc:sldChg>
-      <pc:sldChg chg="modSp mod modAnim">
-        <pc:chgData name="Zhiyang Zhou" userId="715b216a-9552-4d73-a9aa-1ef002111b6f" providerId="ADAL" clId="{2B661EA1-28DD-4C7A-9BAA-1E2E41397E83}" dt="2026-10-03T04:20:42.977" v="1255" actId="20577"/>
+      <pc:sldChg chg="delSp modSp mod delAnim">
+        <pc:chgData name="Zhiyang Zhou" userId="715b216a-9552-4d73-a9aa-1ef002111b6f" providerId="ADAL" clId="{2B661EA1-28DD-4C7A-9BAA-1E2E41397E83}" dt="2026-10-06T03:06:33.331" v="347" actId="20577"/>
         <pc:sldMkLst>
           <pc:docMk/>
           <pc:sldMk cId="0" sldId="339"/>
         </pc:sldMkLst>
         <pc:spChg chg="mod">
-          <ac:chgData name="Zhiyang Zhou" userId="715b216a-9552-4d73-a9aa-1ef002111b6f" providerId="ADAL" clId="{2B661EA1-28DD-4C7A-9BAA-1E2E41397E83}" dt="2026-10-03T04:20:42.977" v="1255" actId="20577"/>
+          <ac:chgData name="Zhiyang Zhou" userId="715b216a-9552-4d73-a9aa-1ef002111b6f" providerId="ADAL" clId="{2B661EA1-28DD-4C7A-9BAA-1E2E41397E83}" dt="2026-10-06T03:06:33.331" v="347" actId="20577"/>
           <ac:spMkLst>
             <pc:docMk/>
             <pc:sldMk cId="0" sldId="339"/>
             <ac:spMk id="7" creationId="{00000000-0000-0000-0000-000000000000}"/>
           </ac:spMkLst>
         </pc:spChg>
-        <pc:spChg chg="mod">
-          <ac:chgData name="Zhiyang Zhou" userId="715b216a-9552-4d73-a9aa-1ef002111b6f" providerId="ADAL" clId="{2B661EA1-28DD-4C7A-9BAA-1E2E41397E83}" dt="2026-10-03T04:19:15.701" v="1236" actId="20577"/>
+        <pc:spChg chg="del">
+          <ac:chgData name="Zhiyang Zhou" userId="715b216a-9552-4d73-a9aa-1ef002111b6f" providerId="ADAL" clId="{2B661EA1-28DD-4C7A-9BAA-1E2E41397E83}" dt="2026-10-06T02:47:49.580" v="2" actId="478"/>
           <ac:spMkLst>
             <pc:docMk/>
             <pc:sldMk cId="0" sldId="339"/>
@@ -567,61 +295,30 @@
           </ac:spMkLst>
         </pc:spChg>
         <pc:spChg chg="mod">
-          <ac:chgData name="Zhiyang Zhou" userId="715b216a-9552-4d73-a9aa-1ef002111b6f" providerId="ADAL" clId="{2B661EA1-28DD-4C7A-9BAA-1E2E41397E83}" dt="2026-10-03T04:19:39.260" v="1240" actId="313"/>
+          <ac:chgData name="Zhiyang Zhou" userId="715b216a-9552-4d73-a9aa-1ef002111b6f" providerId="ADAL" clId="{2B661EA1-28DD-4C7A-9BAA-1E2E41397E83}" dt="2026-10-06T02:56:11.665" v="124" actId="20577"/>
           <ac:spMkLst>
             <pc:docMk/>
             <pc:sldMk cId="0" sldId="339"/>
             <ac:spMk id="48134" creationId="{00000000-0000-0000-0000-000000000000}"/>
           </ac:spMkLst>
         </pc:spChg>
-      </pc:sldChg>
-      <pc:sldChg chg="modSp mod modNotes">
-        <pc:chgData name="Zhiyang Zhou" userId="715b216a-9552-4d73-a9aa-1ef002111b6f" providerId="ADAL" clId="{2B661EA1-28DD-4C7A-9BAA-1E2E41397E83}" dt="2026-10-03T04:43:11.694" v="1527" actId="20577"/>
-        <pc:sldMkLst>
-          <pc:docMk/>
-          <pc:sldMk cId="0" sldId="340"/>
-        </pc:sldMkLst>
         <pc:spChg chg="mod">
-          <ac:chgData name="Zhiyang Zhou" userId="715b216a-9552-4d73-a9aa-1ef002111b6f" providerId="ADAL" clId="{2B661EA1-28DD-4C7A-9BAA-1E2E41397E83}" dt="2026-10-03T04:42:29.210" v="1524" actId="1076"/>
+          <ac:chgData name="Zhiyang Zhou" userId="715b216a-9552-4d73-a9aa-1ef002111b6f" providerId="ADAL" clId="{2B661EA1-28DD-4C7A-9BAA-1E2E41397E83}" dt="2026-10-06T02:48:18.288" v="67" actId="14100"/>
           <ac:spMkLst>
             <pc:docMk/>
-            <pc:sldMk cId="0" sldId="340"/>
-            <ac:spMk id="2" creationId="{00000000-0000-0000-0000-000000000000}"/>
-          </ac:spMkLst>
-        </pc:spChg>
-        <pc:spChg chg="mod">
-          <ac:chgData name="Zhiyang Zhou" userId="715b216a-9552-4d73-a9aa-1ef002111b6f" providerId="ADAL" clId="{2B661EA1-28DD-4C7A-9BAA-1E2E41397E83}" dt="2026-10-03T04:43:11.694" v="1527" actId="20577"/>
-          <ac:spMkLst>
-            <pc:docMk/>
-            <pc:sldMk cId="0" sldId="340"/>
-            <ac:spMk id="10" creationId="{00000000-0000-0000-0000-000000000000}"/>
-          </ac:spMkLst>
-        </pc:spChg>
-        <pc:spChg chg="mod">
-          <ac:chgData name="Zhiyang Zhou" userId="715b216a-9552-4d73-a9aa-1ef002111b6f" providerId="ADAL" clId="{2B661EA1-28DD-4C7A-9BAA-1E2E41397E83}" dt="2026-10-03T04:41:58.682" v="1519" actId="1076"/>
-          <ac:spMkLst>
-            <pc:docMk/>
-            <pc:sldMk cId="0" sldId="340"/>
-            <ac:spMk id="56323" creationId="{00000000-0000-0000-0000-000000000000}"/>
+            <pc:sldMk cId="0" sldId="339"/>
+            <ac:spMk id="54274" creationId="{00000000-0000-0000-0000-000000000000}"/>
           </ac:spMkLst>
         </pc:spChg>
       </pc:sldChg>
-      <pc:sldChg chg="addSp delSp modSp mod modAnim">
-        <pc:chgData name="Zhiyang Zhou" userId="715b216a-9552-4d73-a9aa-1ef002111b6f" providerId="ADAL" clId="{2B661EA1-28DD-4C7A-9BAA-1E2E41397E83}" dt="2026-10-03T04:24:37.435" v="1380" actId="20577"/>
+      <pc:sldChg chg="modSp mod">
+        <pc:chgData name="Zhiyang Zhou" userId="715b216a-9552-4d73-a9aa-1ef002111b6f" providerId="ADAL" clId="{2B661EA1-28DD-4C7A-9BAA-1E2E41397E83}" dt="2026-10-06T03:10:16.160" v="482" actId="20577"/>
         <pc:sldMkLst>
           <pc:docMk/>
           <pc:sldMk cId="0" sldId="355"/>
         </pc:sldMkLst>
-        <pc:spChg chg="del mod">
-          <ac:chgData name="Zhiyang Zhou" userId="715b216a-9552-4d73-a9aa-1ef002111b6f" providerId="ADAL" clId="{2B661EA1-28DD-4C7A-9BAA-1E2E41397E83}" dt="2026-10-03T04:23:59.903" v="1361" actId="478"/>
-          <ac:spMkLst>
-            <pc:docMk/>
-            <pc:sldMk cId="0" sldId="355"/>
-            <ac:spMk id="2" creationId="{00000000-0000-0000-0000-000000000000}"/>
-          </ac:spMkLst>
-        </pc:spChg>
         <pc:spChg chg="mod">
-          <ac:chgData name="Zhiyang Zhou" userId="715b216a-9552-4d73-a9aa-1ef002111b6f" providerId="ADAL" clId="{2B661EA1-28DD-4C7A-9BAA-1E2E41397E83}" dt="2026-10-03T04:24:37.435" v="1380" actId="20577"/>
+          <ac:chgData name="Zhiyang Zhou" userId="715b216a-9552-4d73-a9aa-1ef002111b6f" providerId="ADAL" clId="{2B661EA1-28DD-4C7A-9BAA-1E2E41397E83}" dt="2026-10-06T03:07:59.123" v="456" actId="1036"/>
           <ac:spMkLst>
             <pc:docMk/>
             <pc:sldMk cId="0" sldId="355"/>
@@ -629,15 +326,15 @@
           </ac:spMkLst>
         </pc:spChg>
         <pc:spChg chg="mod">
-          <ac:chgData name="Zhiyang Zhou" userId="715b216a-9552-4d73-a9aa-1ef002111b6f" providerId="ADAL" clId="{2B661EA1-28DD-4C7A-9BAA-1E2E41397E83}" dt="2026-10-03T04:23:52.071" v="1337" actId="1035"/>
+          <ac:chgData name="Zhiyang Zhou" userId="715b216a-9552-4d73-a9aa-1ef002111b6f" providerId="ADAL" clId="{2B661EA1-28DD-4C7A-9BAA-1E2E41397E83}" dt="2026-10-06T03:10:16.160" v="482" actId="20577"/>
           <ac:spMkLst>
             <pc:docMk/>
             <pc:sldMk cId="0" sldId="355"/>
             <ac:spMk id="4" creationId="{00000000-0000-0000-0000-000000000000}"/>
           </ac:spMkLst>
         </pc:spChg>
-        <pc:spChg chg="add mod">
-          <ac:chgData name="Zhiyang Zhou" userId="715b216a-9552-4d73-a9aa-1ef002111b6f" providerId="ADAL" clId="{2B661EA1-28DD-4C7A-9BAA-1E2E41397E83}" dt="2026-10-03T04:24:18.674" v="1367" actId="14100"/>
+        <pc:spChg chg="mod">
+          <ac:chgData name="Zhiyang Zhou" userId="715b216a-9552-4d73-a9aa-1ef002111b6f" providerId="ADAL" clId="{2B661EA1-28DD-4C7A-9BAA-1E2E41397E83}" dt="2026-10-06T03:09:58.764" v="480" actId="1035"/>
           <ac:spMkLst>
             <pc:docMk/>
             <pc:sldMk cId="0" sldId="355"/>
@@ -645,7 +342,7 @@
           </ac:spMkLst>
         </pc:spChg>
         <pc:spChg chg="mod">
-          <ac:chgData name="Zhiyang Zhou" userId="715b216a-9552-4d73-a9aa-1ef002111b6f" providerId="ADAL" clId="{2B661EA1-28DD-4C7A-9BAA-1E2E41397E83}" dt="2026-10-03T04:24:22.589" v="1372" actId="1036"/>
+          <ac:chgData name="Zhiyang Zhou" userId="715b216a-9552-4d73-a9aa-1ef002111b6f" providerId="ADAL" clId="{2B661EA1-28DD-4C7A-9BAA-1E2E41397E83}" dt="2026-10-06T03:07:50.100" v="399" actId="1035"/>
           <ac:spMkLst>
             <pc:docMk/>
             <pc:sldMk cId="0" sldId="355"/>
@@ -653,7 +350,7 @@
           </ac:spMkLst>
         </pc:spChg>
         <pc:spChg chg="mod">
-          <ac:chgData name="Zhiyang Zhou" userId="715b216a-9552-4d73-a9aa-1ef002111b6f" providerId="ADAL" clId="{2B661EA1-28DD-4C7A-9BAA-1E2E41397E83}" dt="2026-10-03T04:23:52.071" v="1337" actId="1035"/>
+          <ac:chgData name="Zhiyang Zhou" userId="715b216a-9552-4d73-a9aa-1ef002111b6f" providerId="ADAL" clId="{2B661EA1-28DD-4C7A-9BAA-1E2E41397E83}" dt="2026-10-06T03:10:04.579" v="481" actId="14100"/>
           <ac:spMkLst>
             <pc:docMk/>
             <pc:sldMk cId="0" sldId="355"/>
@@ -661,7 +358,15 @@
           </ac:spMkLst>
         </pc:spChg>
         <pc:spChg chg="mod">
-          <ac:chgData name="Zhiyang Zhou" userId="715b216a-9552-4d73-a9aa-1ef002111b6f" providerId="ADAL" clId="{2B661EA1-28DD-4C7A-9BAA-1E2E41397E83}" dt="2026-10-03T04:23:37.575" v="1310" actId="1035"/>
+          <ac:chgData name="Zhiyang Zhou" userId="715b216a-9552-4d73-a9aa-1ef002111b6f" providerId="ADAL" clId="{2B661EA1-28DD-4C7A-9BAA-1E2E41397E83}" dt="2026-10-06T02:48:32.839" v="69" actId="14100"/>
+          <ac:spMkLst>
+            <pc:docMk/>
+            <pc:sldMk cId="0" sldId="355"/>
+            <ac:spMk id="55298" creationId="{00000000-0000-0000-0000-000000000000}"/>
+          </ac:spMkLst>
+        </pc:spChg>
+        <pc:spChg chg="mod">
+          <ac:chgData name="Zhiyang Zhou" userId="715b216a-9552-4d73-a9aa-1ef002111b6f" providerId="ADAL" clId="{2B661EA1-28DD-4C7A-9BAA-1E2E41397E83}" dt="2026-10-06T03:07:45.651" v="375" actId="1036"/>
           <ac:spMkLst>
             <pc:docMk/>
             <pc:sldMk cId="0" sldId="355"/>
@@ -670,371 +375,104 @@
         </pc:spChg>
       </pc:sldChg>
       <pc:sldChg chg="modSp mod">
-        <pc:chgData name="Zhiyang Zhou" userId="715b216a-9552-4d73-a9aa-1ef002111b6f" providerId="ADAL" clId="{2B661EA1-28DD-4C7A-9BAA-1E2E41397E83}" dt="2026-10-02T21:48:38.035" v="26" actId="6549"/>
+        <pc:chgData name="Zhiyang Zhou" userId="715b216a-9552-4d73-a9aa-1ef002111b6f" providerId="ADAL" clId="{2B661EA1-28DD-4C7A-9BAA-1E2E41397E83}" dt="2026-10-06T02:40:51.261" v="0" actId="6549"/>
         <pc:sldMkLst>
           <pc:docMk/>
-          <pc:sldMk cId="3487091518" sldId="357"/>
+          <pc:sldMk cId="2953703365" sldId="356"/>
         </pc:sldMkLst>
         <pc:spChg chg="mod">
-          <ac:chgData name="Zhiyang Zhou" userId="715b216a-9552-4d73-a9aa-1ef002111b6f" providerId="ADAL" clId="{2B661EA1-28DD-4C7A-9BAA-1E2E41397E83}" dt="2026-10-02T21:48:38.035" v="26" actId="6549"/>
+          <ac:chgData name="Zhiyang Zhou" userId="715b216a-9552-4d73-a9aa-1ef002111b6f" providerId="ADAL" clId="{2B661EA1-28DD-4C7A-9BAA-1E2E41397E83}" dt="2026-10-06T02:40:51.261" v="0" actId="6549"/>
           <ac:spMkLst>
             <pc:docMk/>
-            <pc:sldMk cId="3487091518" sldId="357"/>
+            <pc:sldMk cId="2953703365" sldId="356"/>
             <ac:spMk id="3" creationId="{00000000-0000-0000-0000-000000000000}"/>
           </ac:spMkLst>
         </pc:spChg>
       </pc:sldChg>
-      <pc:sldChg chg="delSp modSp del mod delAnim modAnim">
-        <pc:chgData name="Zhiyang Zhou" userId="715b216a-9552-4d73-a9aa-1ef002111b6f" providerId="ADAL" clId="{2B661EA1-28DD-4C7A-9BAA-1E2E41397E83}" dt="2026-10-03T05:04:38.640" v="1812" actId="47"/>
+      <pc:sldChg chg="addSp delSp modSp add mod delAnim">
+        <pc:chgData name="Zhiyang Zhou" userId="715b216a-9552-4d73-a9aa-1ef002111b6f" providerId="ADAL" clId="{2B661EA1-28DD-4C7A-9BAA-1E2E41397E83}" dt="2026-10-06T03:11:00.838" v="495" actId="20577"/>
         <pc:sldMkLst>
           <pc:docMk/>
-          <pc:sldMk cId="4177060301" sldId="361"/>
+          <pc:sldMk cId="1091396764" sldId="367"/>
         </pc:sldMkLst>
-        <pc:spChg chg="del">
-          <ac:chgData name="Zhiyang Zhou" userId="715b216a-9552-4d73-a9aa-1ef002111b6f" providerId="ADAL" clId="{2B661EA1-28DD-4C7A-9BAA-1E2E41397E83}" dt="2026-10-03T05:04:01.723" v="1807" actId="478"/>
+        <pc:spChg chg="add mod">
+          <ac:chgData name="Zhiyang Zhou" userId="715b216a-9552-4d73-a9aa-1ef002111b6f" providerId="ADAL" clId="{2B661EA1-28DD-4C7A-9BAA-1E2E41397E83}" dt="2026-10-06T03:00:58.601" v="271" actId="14100"/>
           <ac:spMkLst>
             <pc:docMk/>
-            <pc:sldMk cId="4177060301" sldId="361"/>
-            <ac:spMk id="22" creationId="{00000000-0000-0000-0000-000000000000}"/>
+            <pc:sldMk cId="1091396764" sldId="367"/>
+            <ac:spMk id="2" creationId="{4E8AA50B-542C-8966-F872-6E2BBC2E0880}"/>
           </ac:spMkLst>
         </pc:spChg>
         <pc:spChg chg="del">
-          <ac:chgData name="Zhiyang Zhou" userId="715b216a-9552-4d73-a9aa-1ef002111b6f" providerId="ADAL" clId="{2B661EA1-28DD-4C7A-9BAA-1E2E41397E83}" dt="2026-10-03T05:03:59.100" v="1806" actId="478"/>
+          <ac:chgData name="Zhiyang Zhou" userId="715b216a-9552-4d73-a9aa-1ef002111b6f" providerId="ADAL" clId="{2B661EA1-28DD-4C7A-9BAA-1E2E41397E83}" dt="2026-10-06T03:10:22.005" v="483" actId="478"/>
           <ac:spMkLst>
             <pc:docMk/>
-            <pc:sldMk cId="4177060301" sldId="361"/>
-            <ac:spMk id="23" creationId="{00000000-0000-0000-0000-000000000000}"/>
+            <pc:sldMk cId="1091396764" sldId="367"/>
+            <ac:spMk id="3" creationId="{2BB41814-BBF8-AF1F-1546-BDFDB440A6FA}"/>
           </ac:spMkLst>
         </pc:spChg>
         <pc:spChg chg="del">
-          <ac:chgData name="Zhiyang Zhou" userId="715b216a-9552-4d73-a9aa-1ef002111b6f" providerId="ADAL" clId="{2B661EA1-28DD-4C7A-9BAA-1E2E41397E83}" dt="2026-10-03T05:03:59.100" v="1806" actId="478"/>
+          <ac:chgData name="Zhiyang Zhou" userId="715b216a-9552-4d73-a9aa-1ef002111b6f" providerId="ADAL" clId="{2B661EA1-28DD-4C7A-9BAA-1E2E41397E83}" dt="2026-10-06T03:10:23.128" v="484" actId="478"/>
           <ac:spMkLst>
             <pc:docMk/>
-            <pc:sldMk cId="4177060301" sldId="361"/>
-            <ac:spMk id="24" creationId="{00000000-0000-0000-0000-000000000000}"/>
+            <pc:sldMk cId="1091396764" sldId="367"/>
+            <ac:spMk id="4" creationId="{541588E7-0051-192E-A608-858781F3F210}"/>
+          </ac:spMkLst>
+        </pc:spChg>
+        <pc:spChg chg="mod">
+          <ac:chgData name="Zhiyang Zhou" userId="715b216a-9552-4d73-a9aa-1ef002111b6f" providerId="ADAL" clId="{2B661EA1-28DD-4C7A-9BAA-1E2E41397E83}" dt="2026-10-06T03:11:00.838" v="495" actId="20577"/>
+          <ac:spMkLst>
+            <pc:docMk/>
+            <pc:sldMk cId="1091396764" sldId="367"/>
+            <ac:spMk id="6" creationId="{960637E8-8E5C-915A-4274-C1823FFC7D31}"/>
+          </ac:spMkLst>
+        </pc:spChg>
+        <pc:spChg chg="add del mod">
+          <ac:chgData name="Zhiyang Zhou" userId="715b216a-9552-4d73-a9aa-1ef002111b6f" providerId="ADAL" clId="{2B661EA1-28DD-4C7A-9BAA-1E2E41397E83}" dt="2026-10-06T03:00:24.585" v="257" actId="478"/>
+          <ac:spMkLst>
+            <pc:docMk/>
+            <pc:sldMk cId="1091396764" sldId="367"/>
+            <ac:spMk id="7" creationId="{DB30FEF1-D560-F598-9200-5FA5912129EE}"/>
           </ac:spMkLst>
         </pc:spChg>
         <pc:spChg chg="del">
-          <ac:chgData name="Zhiyang Zhou" userId="715b216a-9552-4d73-a9aa-1ef002111b6f" providerId="ADAL" clId="{2B661EA1-28DD-4C7A-9BAA-1E2E41397E83}" dt="2026-10-03T05:03:59.100" v="1806" actId="478"/>
+          <ac:chgData name="Zhiyang Zhou" userId="715b216a-9552-4d73-a9aa-1ef002111b6f" providerId="ADAL" clId="{2B661EA1-28DD-4C7A-9BAA-1E2E41397E83}" dt="2026-10-06T03:01:07.888" v="274" actId="478"/>
           <ac:spMkLst>
             <pc:docMk/>
-            <pc:sldMk cId="4177060301" sldId="361"/>
-            <ac:spMk id="36" creationId="{00000000-0000-0000-0000-000000000000}"/>
+            <pc:sldMk cId="1091396764" sldId="367"/>
+            <ac:spMk id="8" creationId="{1C54FAFD-B847-1678-CF12-623974E1AABE}"/>
+          </ac:spMkLst>
+        </pc:spChg>
+        <pc:spChg chg="add del mod">
+          <ac:chgData name="Zhiyang Zhou" userId="715b216a-9552-4d73-a9aa-1ef002111b6f" providerId="ADAL" clId="{2B661EA1-28DD-4C7A-9BAA-1E2E41397E83}" dt="2026-10-06T03:00:27.909" v="258" actId="478"/>
+          <ac:spMkLst>
+            <pc:docMk/>
+            <pc:sldMk cId="1091396764" sldId="367"/>
+            <ac:spMk id="10" creationId="{20C2260A-4DEB-0C5C-5500-C57408AC6FA1}"/>
+          </ac:spMkLst>
+        </pc:spChg>
+        <pc:spChg chg="del mod">
+          <ac:chgData name="Zhiyang Zhou" userId="715b216a-9552-4d73-a9aa-1ef002111b6f" providerId="ADAL" clId="{2B661EA1-28DD-4C7A-9BAA-1E2E41397E83}" dt="2026-10-06T03:10:25.081" v="486" actId="478"/>
+          <ac:spMkLst>
+            <pc:docMk/>
+            <pc:sldMk cId="1091396764" sldId="367"/>
+            <ac:spMk id="11" creationId="{B1A46901-5235-DF22-EFE4-E727412CAE21}"/>
           </ac:spMkLst>
         </pc:spChg>
         <pc:spChg chg="del">
-          <ac:chgData name="Zhiyang Zhou" userId="715b216a-9552-4d73-a9aa-1ef002111b6f" providerId="ADAL" clId="{2B661EA1-28DD-4C7A-9BAA-1E2E41397E83}" dt="2026-10-03T05:03:56.411" v="1805" actId="478"/>
+          <ac:chgData name="Zhiyang Zhou" userId="715b216a-9552-4d73-a9aa-1ef002111b6f" providerId="ADAL" clId="{2B661EA1-28DD-4C7A-9BAA-1E2E41397E83}" dt="2026-10-06T03:00:15.707" v="255" actId="478"/>
           <ac:spMkLst>
             <pc:docMk/>
-            <pc:sldMk cId="4177060301" sldId="361"/>
-            <ac:spMk id="37" creationId="{00000000-0000-0000-0000-000000000000}"/>
-          </ac:spMkLst>
-        </pc:spChg>
-        <pc:spChg chg="del">
-          <ac:chgData name="Zhiyang Zhou" userId="715b216a-9552-4d73-a9aa-1ef002111b6f" providerId="ADAL" clId="{2B661EA1-28DD-4C7A-9BAA-1E2E41397E83}" dt="2026-10-03T05:03:59.100" v="1806" actId="478"/>
-          <ac:spMkLst>
-            <pc:docMk/>
-            <pc:sldMk cId="4177060301" sldId="361"/>
-            <ac:spMk id="38" creationId="{00000000-0000-0000-0000-000000000000}"/>
-          </ac:spMkLst>
-        </pc:spChg>
-        <pc:spChg chg="del">
-          <ac:chgData name="Zhiyang Zhou" userId="715b216a-9552-4d73-a9aa-1ef002111b6f" providerId="ADAL" clId="{2B661EA1-28DD-4C7A-9BAA-1E2E41397E83}" dt="2026-10-03T05:03:59.100" v="1806" actId="478"/>
-          <ac:spMkLst>
-            <pc:docMk/>
-            <pc:sldMk cId="4177060301" sldId="361"/>
-            <ac:spMk id="39" creationId="{00000000-0000-0000-0000-000000000000}"/>
-          </ac:spMkLst>
-        </pc:spChg>
-        <pc:spChg chg="del">
-          <ac:chgData name="Zhiyang Zhou" userId="715b216a-9552-4d73-a9aa-1ef002111b6f" providerId="ADAL" clId="{2B661EA1-28DD-4C7A-9BAA-1E2E41397E83}" dt="2026-10-03T05:03:59.100" v="1806" actId="478"/>
-          <ac:spMkLst>
-            <pc:docMk/>
-            <pc:sldMk cId="4177060301" sldId="361"/>
-            <ac:spMk id="40" creationId="{00000000-0000-0000-0000-000000000000}"/>
-          </ac:spMkLst>
-        </pc:spChg>
-        <pc:spChg chg="del">
-          <ac:chgData name="Zhiyang Zhou" userId="715b216a-9552-4d73-a9aa-1ef002111b6f" providerId="ADAL" clId="{2B661EA1-28DD-4C7A-9BAA-1E2E41397E83}" dt="2026-10-03T05:03:46.780" v="1804" actId="478"/>
-          <ac:spMkLst>
-            <pc:docMk/>
-            <pc:sldMk cId="4177060301" sldId="361"/>
-            <ac:spMk id="41" creationId="{00000000-0000-0000-0000-000000000000}"/>
-          </ac:spMkLst>
-        </pc:spChg>
-        <pc:spChg chg="mod">
-          <ac:chgData name="Zhiyang Zhou" userId="715b216a-9552-4d73-a9aa-1ef002111b6f" providerId="ADAL" clId="{2B661EA1-28DD-4C7A-9BAA-1E2E41397E83}" dt="2026-10-03T05:04:21.659" v="1811" actId="1076"/>
-          <ac:spMkLst>
-            <pc:docMk/>
-            <pc:sldMk cId="4177060301" sldId="361"/>
-            <ac:spMk id="53250" creationId="{00000000-0000-0000-0000-000000000000}"/>
-          </ac:spMkLst>
-        </pc:spChg>
-        <pc:spChg chg="del">
-          <ac:chgData name="Zhiyang Zhou" userId="715b216a-9552-4d73-a9aa-1ef002111b6f" providerId="ADAL" clId="{2B661EA1-28DD-4C7A-9BAA-1E2E41397E83}" dt="2026-10-03T05:04:01.723" v="1807" actId="478"/>
-          <ac:spMkLst>
-            <pc:docMk/>
-            <pc:sldMk cId="4177060301" sldId="361"/>
-            <ac:spMk id="53259" creationId="{00000000-0000-0000-0000-000000000000}"/>
-          </ac:spMkLst>
-        </pc:spChg>
-        <pc:grpChg chg="del">
-          <ac:chgData name="Zhiyang Zhou" userId="715b216a-9552-4d73-a9aa-1ef002111b6f" providerId="ADAL" clId="{2B661EA1-28DD-4C7A-9BAA-1E2E41397E83}" dt="2026-10-03T05:03:59.100" v="1806" actId="478"/>
-          <ac:grpSpMkLst>
-            <pc:docMk/>
-            <pc:sldMk cId="4177060301" sldId="361"/>
-            <ac:grpSpMk id="2" creationId="{00000000-0000-0000-0000-000000000000}"/>
-          </ac:grpSpMkLst>
-        </pc:grpChg>
-        <pc:grpChg chg="del">
-          <ac:chgData name="Zhiyang Zhou" userId="715b216a-9552-4d73-a9aa-1ef002111b6f" providerId="ADAL" clId="{2B661EA1-28DD-4C7A-9BAA-1E2E41397E83}" dt="2026-10-03T05:03:59.100" v="1806" actId="478"/>
-          <ac:grpSpMkLst>
-            <pc:docMk/>
-            <pc:sldMk cId="4177060301" sldId="361"/>
-            <ac:grpSpMk id="3" creationId="{00000000-0000-0000-0000-000000000000}"/>
-          </ac:grpSpMkLst>
-        </pc:grpChg>
-        <pc:grpChg chg="del">
-          <ac:chgData name="Zhiyang Zhou" userId="715b216a-9552-4d73-a9aa-1ef002111b6f" providerId="ADAL" clId="{2B661EA1-28DD-4C7A-9BAA-1E2E41397E83}" dt="2026-10-03T05:03:59.100" v="1806" actId="478"/>
-          <ac:grpSpMkLst>
-            <pc:docMk/>
-            <pc:sldMk cId="4177060301" sldId="361"/>
-            <ac:grpSpMk id="4" creationId="{00000000-0000-0000-0000-000000000000}"/>
-          </ac:grpSpMkLst>
-        </pc:grpChg>
-        <pc:grpChg chg="del">
-          <ac:chgData name="Zhiyang Zhou" userId="715b216a-9552-4d73-a9aa-1ef002111b6f" providerId="ADAL" clId="{2B661EA1-28DD-4C7A-9BAA-1E2E41397E83}" dt="2026-10-03T05:04:02.972" v="1808" actId="478"/>
-          <ac:grpSpMkLst>
-            <pc:docMk/>
-            <pc:sldMk cId="4177060301" sldId="361"/>
-            <ac:grpSpMk id="5" creationId="{00000000-0000-0000-0000-000000000000}"/>
-          </ac:grpSpMkLst>
-        </pc:grpChg>
-        <pc:grpChg chg="del">
-          <ac:chgData name="Zhiyang Zhou" userId="715b216a-9552-4d73-a9aa-1ef002111b6f" providerId="ADAL" clId="{2B661EA1-28DD-4C7A-9BAA-1E2E41397E83}" dt="2026-10-03T05:03:59.100" v="1806" actId="478"/>
-          <ac:grpSpMkLst>
-            <pc:docMk/>
-            <pc:sldMk cId="4177060301" sldId="361"/>
-            <ac:grpSpMk id="6" creationId="{00000000-0000-0000-0000-000000000000}"/>
-          </ac:grpSpMkLst>
-        </pc:grpChg>
-      </pc:sldChg>
-      <pc:sldChg chg="addSp delSp modSp add mod delAnim modAnim">
-        <pc:chgData name="Zhiyang Zhou" userId="715b216a-9552-4d73-a9aa-1ef002111b6f" providerId="ADAL" clId="{2B661EA1-28DD-4C7A-9BAA-1E2E41397E83}" dt="2026-10-03T02:56:06.930" v="932" actId="20577"/>
-        <pc:sldMkLst>
-          <pc:docMk/>
-          <pc:sldMk cId="1074156784" sldId="363"/>
-        </pc:sldMkLst>
-        <pc:spChg chg="add mod">
-          <ac:chgData name="Zhiyang Zhou" userId="715b216a-9552-4d73-a9aa-1ef002111b6f" providerId="ADAL" clId="{2B661EA1-28DD-4C7A-9BAA-1E2E41397E83}" dt="2026-10-03T02:45:32.095" v="907" actId="20577"/>
-          <ac:spMkLst>
-            <pc:docMk/>
-            <pc:sldMk cId="1074156784" sldId="363"/>
-            <ac:spMk id="2" creationId="{31E859C6-F202-04BC-A3A0-C96BED52A9A3}"/>
-          </ac:spMkLst>
-        </pc:spChg>
-        <pc:spChg chg="mod">
-          <ac:chgData name="Zhiyang Zhou" userId="715b216a-9552-4d73-a9aa-1ef002111b6f" providerId="ADAL" clId="{2B661EA1-28DD-4C7A-9BAA-1E2E41397E83}" dt="2026-10-03T02:55:54.892" v="923" actId="1035"/>
-          <ac:spMkLst>
-            <pc:docMk/>
-            <pc:sldMk cId="1074156784" sldId="363"/>
-            <ac:spMk id="8" creationId="{D548D190-8CF8-7D54-254F-B47BD7A9D6DA}"/>
-          </ac:spMkLst>
-        </pc:spChg>
-        <pc:spChg chg="del">
-          <ac:chgData name="Zhiyang Zhou" userId="715b216a-9552-4d73-a9aa-1ef002111b6f" providerId="ADAL" clId="{2B661EA1-28DD-4C7A-9BAA-1E2E41397E83}" dt="2026-10-03T02:39:17.876" v="769" actId="478"/>
-          <ac:spMkLst>
-            <pc:docMk/>
-            <pc:sldMk cId="1074156784" sldId="363"/>
-            <ac:spMk id="9" creationId="{53543F3F-E532-AA88-7775-43A166383887}"/>
-          </ac:spMkLst>
-        </pc:spChg>
-        <pc:spChg chg="mod">
-          <ac:chgData name="Zhiyang Zhou" userId="715b216a-9552-4d73-a9aa-1ef002111b6f" providerId="ADAL" clId="{2B661EA1-28DD-4C7A-9BAA-1E2E41397E83}" dt="2026-10-03T02:56:06.930" v="932" actId="20577"/>
-          <ac:spMkLst>
-            <pc:docMk/>
-            <pc:sldMk cId="1074156784" sldId="363"/>
-            <ac:spMk id="38918" creationId="{77AB3295-E1CF-1DD3-F8CB-AD372BDE2FF1}"/>
-          </ac:spMkLst>
-        </pc:spChg>
-        <pc:spChg chg="del">
-          <ac:chgData name="Zhiyang Zhou" userId="715b216a-9552-4d73-a9aa-1ef002111b6f" providerId="ADAL" clId="{2B661EA1-28DD-4C7A-9BAA-1E2E41397E83}" dt="2026-10-03T02:39:16.340" v="768" actId="478"/>
-          <ac:spMkLst>
-            <pc:docMk/>
-            <pc:sldMk cId="1074156784" sldId="363"/>
-            <ac:spMk id="44035" creationId="{245FD86D-3829-C0A0-BB63-1107CE3AAAE7}"/>
-          </ac:spMkLst>
-        </pc:spChg>
-      </pc:sldChg>
-      <pc:sldChg chg="delSp modSp add mod">
-        <pc:chgData name="Zhiyang Zhou" userId="715b216a-9552-4d73-a9aa-1ef002111b6f" providerId="ADAL" clId="{2B661EA1-28DD-4C7A-9BAA-1E2E41397E83}" dt="2026-10-03T03:30:11.624" v="1076" actId="1035"/>
-        <pc:sldMkLst>
-          <pc:docMk/>
-          <pc:sldMk cId="851934012" sldId="364"/>
-        </pc:sldMkLst>
-        <pc:spChg chg="del">
-          <ac:chgData name="Zhiyang Zhou" userId="715b216a-9552-4d73-a9aa-1ef002111b6f" providerId="ADAL" clId="{2B661EA1-28DD-4C7A-9BAA-1E2E41397E83}" dt="2026-10-03T03:30:04.155" v="1052" actId="478"/>
-          <ac:spMkLst>
-            <pc:docMk/>
-            <pc:sldMk cId="851934012" sldId="364"/>
-            <ac:spMk id="3" creationId="{AB920035-1DB3-B692-B0EB-7806115AA701}"/>
-          </ac:spMkLst>
-        </pc:spChg>
-        <pc:spChg chg="mod">
-          <ac:chgData name="Zhiyang Zhou" userId="715b216a-9552-4d73-a9aa-1ef002111b6f" providerId="ADAL" clId="{2B661EA1-28DD-4C7A-9BAA-1E2E41397E83}" dt="2026-10-03T03:30:07.978" v="1066" actId="1036"/>
-          <ac:spMkLst>
-            <pc:docMk/>
-            <pc:sldMk cId="851934012" sldId="364"/>
-            <ac:spMk id="10" creationId="{35A17D55-1552-B6AD-12BC-D3AF76962FB9}"/>
-          </ac:spMkLst>
-        </pc:spChg>
-        <pc:picChg chg="mod">
-          <ac:chgData name="Zhiyang Zhou" userId="715b216a-9552-4d73-a9aa-1ef002111b6f" providerId="ADAL" clId="{2B661EA1-28DD-4C7A-9BAA-1E2E41397E83}" dt="2026-10-03T03:30:11.624" v="1076" actId="1035"/>
-          <ac:picMkLst>
-            <pc:docMk/>
-            <pc:sldMk cId="851934012" sldId="364"/>
-            <ac:picMk id="5" creationId="{1F14A10C-496B-340B-4CBA-EBC21A10CE7C}"/>
-          </ac:picMkLst>
-        </pc:picChg>
-      </pc:sldChg>
-      <pc:sldChg chg="delSp modSp add mod delAnim modAnim">
-        <pc:chgData name="Zhiyang Zhou" userId="715b216a-9552-4d73-a9aa-1ef002111b6f" providerId="ADAL" clId="{2B661EA1-28DD-4C7A-9BAA-1E2E41397E83}" dt="2026-10-03T05:11:24.936" v="1925" actId="20577"/>
-        <pc:sldMkLst>
-          <pc:docMk/>
-          <pc:sldMk cId="2420492008" sldId="365"/>
-        </pc:sldMkLst>
-        <pc:spChg chg="mod">
-          <ac:chgData name="Zhiyang Zhou" userId="715b216a-9552-4d73-a9aa-1ef002111b6f" providerId="ADAL" clId="{2B661EA1-28DD-4C7A-9BAA-1E2E41397E83}" dt="2026-10-03T05:10:25.845" v="1916" actId="1035"/>
-          <ac:spMkLst>
-            <pc:docMk/>
-            <pc:sldMk cId="2420492008" sldId="365"/>
-            <ac:spMk id="4" creationId="{40A31F00-75C5-190D-1F95-244CC7487C45}"/>
-          </ac:spMkLst>
-        </pc:spChg>
-        <pc:spChg chg="mod">
-          <ac:chgData name="Zhiyang Zhou" userId="715b216a-9552-4d73-a9aa-1ef002111b6f" providerId="ADAL" clId="{2B661EA1-28DD-4C7A-9BAA-1E2E41397E83}" dt="2026-10-03T05:11:24.936" v="1925" actId="20577"/>
-          <ac:spMkLst>
-            <pc:docMk/>
-            <pc:sldMk cId="2420492008" sldId="365"/>
-            <ac:spMk id="5" creationId="{24522A50-67EA-223A-5C3B-875DC6A54F30}"/>
+            <pc:sldMk cId="1091396764" sldId="367"/>
+            <ac:spMk id="55298" creationId="{3384E4CE-D00C-DA42-8D15-FEDF27285274}"/>
           </ac:spMkLst>
         </pc:spChg>
         <pc:spChg chg="del mod">
-          <ac:chgData name="Zhiyang Zhou" userId="715b216a-9552-4d73-a9aa-1ef002111b6f" providerId="ADAL" clId="{2B661EA1-28DD-4C7A-9BAA-1E2E41397E83}" dt="2026-10-03T05:09:32.901" v="1859" actId="478"/>
+          <ac:chgData name="Zhiyang Zhou" userId="715b216a-9552-4d73-a9aa-1ef002111b6f" providerId="ADAL" clId="{2B661EA1-28DD-4C7A-9BAA-1E2E41397E83}" dt="2026-10-06T03:01:06.137" v="273" actId="478"/>
           <ac:spMkLst>
             <pc:docMk/>
-            <pc:sldMk cId="2420492008" sldId="365"/>
-            <ac:spMk id="7" creationId="{E6DCCF15-E0E4-9169-65EE-0FE3B66B8F42}"/>
-          </ac:spMkLst>
-        </pc:spChg>
-        <pc:spChg chg="del">
-          <ac:chgData name="Zhiyang Zhou" userId="715b216a-9552-4d73-a9aa-1ef002111b6f" providerId="ADAL" clId="{2B661EA1-28DD-4C7A-9BAA-1E2E41397E83}" dt="2026-10-03T05:06:25.838" v="1841" actId="478"/>
-          <ac:spMkLst>
-            <pc:docMk/>
-            <pc:sldMk cId="2420492008" sldId="365"/>
-            <ac:spMk id="10" creationId="{41FF3B5B-B0F4-9B2E-B446-4EA2840D85E5}"/>
-          </ac:spMkLst>
-        </pc:spChg>
-        <pc:spChg chg="mod">
-          <ac:chgData name="Zhiyang Zhou" userId="715b216a-9552-4d73-a9aa-1ef002111b6f" providerId="ADAL" clId="{2B661EA1-28DD-4C7A-9BAA-1E2E41397E83}" dt="2026-10-03T05:04:41.645" v="1813"/>
-          <ac:spMkLst>
-            <pc:docMk/>
-            <pc:sldMk cId="2420492008" sldId="365"/>
-            <ac:spMk id="52226" creationId="{53445834-303D-7EF8-5BB6-CE552FF50405}"/>
-          </ac:spMkLst>
-        </pc:spChg>
-      </pc:sldChg>
-      <pc:sldChg chg="addSp delSp modSp add mod delAnim modAnim">
-        <pc:chgData name="Zhiyang Zhou" userId="715b216a-9552-4d73-a9aa-1ef002111b6f" providerId="ADAL" clId="{2B661EA1-28DD-4C7A-9BAA-1E2E41397E83}" dt="2026-10-03T06:24:33.858" v="2467" actId="1035"/>
-        <pc:sldMkLst>
-          <pc:docMk/>
-          <pc:sldMk cId="1316429597" sldId="366"/>
-        </pc:sldMkLst>
-        <pc:spChg chg="del">
-          <ac:chgData name="Zhiyang Zhou" userId="715b216a-9552-4d73-a9aa-1ef002111b6f" providerId="ADAL" clId="{2B661EA1-28DD-4C7A-9BAA-1E2E41397E83}" dt="2026-10-03T05:52:21.960" v="1981" actId="478"/>
-          <ac:spMkLst>
-            <pc:docMk/>
-            <pc:sldMk cId="1316429597" sldId="366"/>
-            <ac:spMk id="2" creationId="{AAE23DAC-51F9-3A0A-F904-906695FB6360}"/>
-          </ac:spMkLst>
-        </pc:spChg>
-        <pc:spChg chg="add mod">
-          <ac:chgData name="Zhiyang Zhou" userId="715b216a-9552-4d73-a9aa-1ef002111b6f" providerId="ADAL" clId="{2B661EA1-28DD-4C7A-9BAA-1E2E41397E83}" dt="2026-10-03T06:24:27.716" v="2457" actId="1036"/>
-          <ac:spMkLst>
-            <pc:docMk/>
-            <pc:sldMk cId="1316429597" sldId="366"/>
-            <ac:spMk id="4" creationId="{CA6E17AC-0B2D-6A9D-848D-B18B4FE3D30F}"/>
-          </ac:spMkLst>
-        </pc:spChg>
-        <pc:spChg chg="mod">
-          <ac:chgData name="Zhiyang Zhou" userId="715b216a-9552-4d73-a9aa-1ef002111b6f" providerId="ADAL" clId="{2B661EA1-28DD-4C7A-9BAA-1E2E41397E83}" dt="2026-10-03T06:24:33.858" v="2467" actId="1035"/>
-          <ac:spMkLst>
-            <pc:docMk/>
-            <pc:sldMk cId="1316429597" sldId="366"/>
-            <ac:spMk id="10" creationId="{4B1245F3-03EE-880C-7BD1-F43A47276E88}"/>
-          </ac:spMkLst>
-        </pc:spChg>
-        <pc:spChg chg="mod">
-          <ac:chgData name="Zhiyang Zhou" userId="715b216a-9552-4d73-a9aa-1ef002111b6f" providerId="ADAL" clId="{2B661EA1-28DD-4C7A-9BAA-1E2E41397E83}" dt="2026-10-03T05:52:49.081" v="1983" actId="14100"/>
-          <ac:spMkLst>
-            <pc:docMk/>
-            <pc:sldMk cId="1316429597" sldId="366"/>
-            <ac:spMk id="56322" creationId="{1C3F3C88-9B00-CC5A-B11E-D0EFD4F84750}"/>
-          </ac:spMkLst>
-        </pc:spChg>
-        <pc:spChg chg="mod">
-          <ac:chgData name="Zhiyang Zhou" userId="715b216a-9552-4d73-a9aa-1ef002111b6f" providerId="ADAL" clId="{2B661EA1-28DD-4C7A-9BAA-1E2E41397E83}" dt="2026-10-03T06:24:31.609" v="2463" actId="1035"/>
-          <ac:spMkLst>
-            <pc:docMk/>
-            <pc:sldMk cId="1316429597" sldId="366"/>
-            <ac:spMk id="56323" creationId="{EA780D06-2139-0490-A0C8-67C879229468}"/>
-          </ac:spMkLst>
-        </pc:spChg>
-      </pc:sldChg>
-      <pc:sldChg chg="addSp delSp modSp new del mod modAnim">
-        <pc:chgData name="Zhiyang Zhou" userId="715b216a-9552-4d73-a9aa-1ef002111b6f" providerId="ADAL" clId="{2B661EA1-28DD-4C7A-9BAA-1E2E41397E83}" dt="2026-10-03T06:24:50.141" v="2468" actId="2696"/>
-        <pc:sldMkLst>
-          <pc:docMk/>
-          <pc:sldMk cId="2464911920" sldId="367"/>
-        </pc:sldMkLst>
-        <pc:spChg chg="mod">
-          <ac:chgData name="Zhiyang Zhou" userId="715b216a-9552-4d73-a9aa-1ef002111b6f" providerId="ADAL" clId="{2B661EA1-28DD-4C7A-9BAA-1E2E41397E83}" dt="2026-10-03T06:03:29.822" v="2055" actId="14100"/>
-          <ac:spMkLst>
-            <pc:docMk/>
-            <pc:sldMk cId="2464911920" sldId="367"/>
-            <ac:spMk id="2" creationId="{83D8FC48-D534-281B-A150-2AA42496D5EF}"/>
-          </ac:spMkLst>
-        </pc:spChg>
-        <pc:spChg chg="add mod">
-          <ac:chgData name="Zhiyang Zhou" userId="715b216a-9552-4d73-a9aa-1ef002111b6f" providerId="ADAL" clId="{2B661EA1-28DD-4C7A-9BAA-1E2E41397E83}" dt="2026-10-03T06:12:09.399" v="2277" actId="1035"/>
-          <ac:spMkLst>
-            <pc:docMk/>
-            <pc:sldMk cId="2464911920" sldId="367"/>
-            <ac:spMk id="4" creationId="{916378E3-11B4-30C8-7428-6725F81F624B}"/>
-          </ac:spMkLst>
-        </pc:spChg>
-        <pc:spChg chg="add del mod">
-          <ac:chgData name="Zhiyang Zhou" userId="715b216a-9552-4d73-a9aa-1ef002111b6f" providerId="ADAL" clId="{2B661EA1-28DD-4C7A-9BAA-1E2E41397E83}" dt="2026-10-03T06:10:03.059" v="2215"/>
-          <ac:spMkLst>
-            <pc:docMk/>
-            <pc:sldMk cId="2464911920" sldId="367"/>
-            <ac:spMk id="6" creationId="{F33F0819-C600-421E-D2A1-1DC16E660236}"/>
-          </ac:spMkLst>
-        </pc:spChg>
-        <pc:spChg chg="add mod">
-          <ac:chgData name="Zhiyang Zhou" userId="715b216a-9552-4d73-a9aa-1ef002111b6f" providerId="ADAL" clId="{2B661EA1-28DD-4C7A-9BAA-1E2E41397E83}" dt="2026-10-03T06:09:45.577" v="2208" actId="1035"/>
-          <ac:spMkLst>
-            <pc:docMk/>
-            <pc:sldMk cId="2464911920" sldId="367"/>
-            <ac:spMk id="8" creationId="{9FA82FF8-6F8E-86E6-C702-B8439F5641C9}"/>
-          </ac:spMkLst>
-        </pc:spChg>
-        <pc:spChg chg="add mod">
-          <ac:chgData name="Zhiyang Zhou" userId="715b216a-9552-4d73-a9aa-1ef002111b6f" providerId="ADAL" clId="{2B661EA1-28DD-4C7A-9BAA-1E2E41397E83}" dt="2026-10-03T06:12:01.032" v="2271" actId="14100"/>
-          <ac:spMkLst>
-            <pc:docMk/>
-            <pc:sldMk cId="2464911920" sldId="367"/>
-            <ac:spMk id="10" creationId="{9109AE30-8650-8063-01A4-B9F7D6C30425}"/>
+            <pc:sldMk cId="1091396764" sldId="367"/>
+            <ac:spMk id="55299" creationId="{EB68BC67-B5A3-2629-5B22-7F15032B219B}"/>
           </ac:spMkLst>
         </pc:spChg>
       </pc:sldChg>
@@ -1145,7 +583,7 @@
             <a:fld id="{BF12BCAD-C829-4DA0-936D-15D76EB44FFD}" type="datetime1">
               <a:rPr lang="en-US"/>
               <a:pPr/>
-              <a:t>10/3/2026</a:t>
+              <a:t>10/5/2026</a:t>
             </a:fld>
             <a:endParaRPr lang="en-US"/>
           </a:p>
@@ -1351,7 +789,7 @@
             <a:fld id="{61D1A506-E10C-404C-A4D0-633FEBA7921E}" type="datetime1">
               <a:rPr lang="en-US"/>
               <a:pPr/>
-              <a:t>10/3/2026</a:t>
+              <a:t>10/5/2026</a:t>
             </a:fld>
             <a:endParaRPr lang="en-US"/>
           </a:p>
@@ -1799,7 +1237,13 @@
   <p:cSld>
     <p:spTree>
       <p:nvGrpSpPr>
-        <p:cNvPr id="1" name=""/>
+        <p:cNvPr id="1" name="">
+          <a:extLst>
+            <a:ext uri="{FF2B5EF4-FFF2-40B4-BE49-F238E27FC236}">
+              <a16:creationId xmlns:a16="http://schemas.microsoft.com/office/drawing/2014/main" id="{BDAB7A32-A04B-2393-0B9C-227DF2002281}"/>
+            </a:ext>
+          </a:extLst>
+        </p:cNvPr>
         <p:cNvGrpSpPr/>
         <p:nvPr/>
       </p:nvGrpSpPr>
@@ -1813,7 +1257,13 @@
       </p:grpSpPr>
       <p:sp>
         <p:nvSpPr>
-          <p:cNvPr id="2" name="Slide Image Placeholder 1"/>
+          <p:cNvPr id="2" name="Slide Image Placeholder 1">
+            <a:extLst>
+              <a:ext uri="{FF2B5EF4-FFF2-40B4-BE49-F238E27FC236}">
+                <a16:creationId xmlns:a16="http://schemas.microsoft.com/office/drawing/2014/main" id="{1FA4909B-8962-33C6-13AC-1ED003DD0012}"/>
+              </a:ext>
+            </a:extLst>
+          </p:cNvPr>
           <p:cNvSpPr>
             <a:spLocks noGrp="1" noRot="1" noChangeAspect="1"/>
           </p:cNvSpPr>
@@ -1825,7 +1275,13 @@
       </p:sp>
       <p:sp>
         <p:nvSpPr>
-          <p:cNvPr id="3" name="Notes Placeholder 2"/>
+          <p:cNvPr id="3" name="Notes Placeholder 2">
+            <a:extLst>
+              <a:ext uri="{FF2B5EF4-FFF2-40B4-BE49-F238E27FC236}">
+                <a16:creationId xmlns:a16="http://schemas.microsoft.com/office/drawing/2014/main" id="{905AE0CB-B9FD-8BE2-6F46-892523202F5F}"/>
+              </a:ext>
+            </a:extLst>
+          </p:cNvPr>
           <p:cNvSpPr>
             <a:spLocks noGrp="1"/>
           </p:cNvSpPr>
@@ -1844,7 +1300,13 @@
       </p:sp>
       <p:sp>
         <p:nvSpPr>
-          <p:cNvPr id="4" name="Slide Number Placeholder 3"/>
+          <p:cNvPr id="4" name="Slide Number Placeholder 3">
+            <a:extLst>
+              <a:ext uri="{FF2B5EF4-FFF2-40B4-BE49-F238E27FC236}">
+                <a16:creationId xmlns:a16="http://schemas.microsoft.com/office/drawing/2014/main" id="{0BF545F8-1F76-D9D9-9F40-141984BBD614}"/>
+              </a:ext>
+            </a:extLst>
+          </p:cNvPr>
           <p:cNvSpPr>
             <a:spLocks noGrp="1"/>
           </p:cNvSpPr>
@@ -1869,7 +1331,7 @@
     </p:spTree>
     <p:extLst>
       <p:ext uri="{BB962C8B-B14F-4D97-AF65-F5344CB8AC3E}">
-        <p14:creationId xmlns:p14="http://schemas.microsoft.com/office/powerpoint/2010/main" val="2132925261"/>
+        <p14:creationId xmlns:p14="http://schemas.microsoft.com/office/powerpoint/2010/main" val="630696855"/>
       </p:ext>
     </p:extLst>
   </p:cSld>
@@ -2660,6 +2122,560 @@
       </p:grpSpPr>
       <p:sp>
         <p:nvSpPr>
+          <p:cNvPr id="47105" name="Slide Image Placeholder 1"/>
+          <p:cNvSpPr>
+            <a:spLocks noGrp="1" noRot="1" noChangeAspect="1" noTextEdit="1"/>
+          </p:cNvSpPr>
+          <p:nvPr>
+            <p:ph type="sldImg"/>
+          </p:nvPr>
+        </p:nvSpPr>
+        <p:spPr bwMode="auto">
+          <a:noFill/>
+          <a:ln>
+            <a:solidFill>
+              <a:srgbClr val="000000"/>
+            </a:solidFill>
+            <a:miter lim="800000"/>
+            <a:headEnd/>
+            <a:tailEnd/>
+          </a:ln>
+          <a:extLst>
+            <a:ext uri="{909E8E84-426E-40DD-AFC4-6F175D3DCCD1}">
+              <a14:hiddenFill xmlns:a14="http://schemas.microsoft.com/office/drawing/2010/main">
+                <a:solidFill>
+                  <a:srgbClr val="FFFFFF"/>
+                </a:solidFill>
+              </a14:hiddenFill>
+            </a:ext>
+          </a:extLst>
+        </p:spPr>
+      </p:sp>
+      <p:sp>
+        <p:nvSpPr>
+          <p:cNvPr id="47106" name="Notes Placeholder 2"/>
+          <p:cNvSpPr>
+            <a:spLocks noGrp="1"/>
+          </p:cNvSpPr>
+          <p:nvPr>
+            <p:ph type="body" idx="1"/>
+          </p:nvPr>
+        </p:nvSpPr>
+        <p:spPr bwMode="auto">
+          <a:noFill/>
+          <a:extLst>
+            <a:ext uri="{909E8E84-426E-40DD-AFC4-6F175D3DCCD1}">
+              <a14:hiddenFill xmlns:a14="http://schemas.microsoft.com/office/drawing/2010/main">
+                <a:solidFill>
+                  <a:srgbClr val="FFFFFF"/>
+                </a:solidFill>
+              </a14:hiddenFill>
+            </a:ext>
+            <a:ext uri="{91240B29-F687-4F45-9708-019B960494DF}">
+              <a14:hiddenLine xmlns:a14="http://schemas.microsoft.com/office/drawing/2010/main" w="9525">
+                <a:solidFill>
+                  <a:srgbClr val="000000"/>
+                </a:solidFill>
+                <a:miter lim="800000"/>
+                <a:headEnd/>
+                <a:tailEnd/>
+              </a14:hiddenLine>
+            </a:ext>
+          </a:extLst>
+        </p:spPr>
+        <p:txBody>
+          <a:bodyPr wrap="square" numCol="1" anchor="t" anchorCtr="0" compatLnSpc="1">
+            <a:prstTxWarp prst="textNoShape">
+              <a:avLst/>
+            </a:prstTxWarp>
+          </a:bodyPr>
+          <a:lstStyle/>
+          <a:p>
+            <a:r>
+              <a:rPr lang="en-US" dirty="0">
+                <a:ea typeface="ＭＳ Ｐゴシック" pitchFamily="34" charset="-128"/>
+              </a:rPr>
+              <a:t>The progress of a type of cancer differs in women and men (p.184)</a:t>
+            </a:r>
+          </a:p>
+        </p:txBody>
+      </p:sp>
+      <p:sp>
+        <p:nvSpPr>
+          <p:cNvPr id="47107" name="Slide Number Placeholder 3"/>
+          <p:cNvSpPr>
+            <a:spLocks noGrp="1"/>
+          </p:cNvSpPr>
+          <p:nvPr>
+            <p:ph type="sldNum" sz="quarter" idx="5"/>
+          </p:nvPr>
+        </p:nvSpPr>
+        <p:spPr bwMode="auto">
+          <a:noFill/>
+          <a:extLst>
+            <a:ext uri="{909E8E84-426E-40DD-AFC4-6F175D3DCCD1}">
+              <a14:hiddenFill xmlns:a14="http://schemas.microsoft.com/office/drawing/2010/main">
+                <a:solidFill>
+                  <a:srgbClr val="FFFFFF"/>
+                </a:solidFill>
+              </a14:hiddenFill>
+            </a:ext>
+            <a:ext uri="{91240B29-F687-4F45-9708-019B960494DF}">
+              <a14:hiddenLine xmlns:a14="http://schemas.microsoft.com/office/drawing/2010/main" w="9525">
+                <a:solidFill>
+                  <a:srgbClr val="000000"/>
+                </a:solidFill>
+                <a:miter lim="800000"/>
+                <a:headEnd/>
+                <a:tailEnd/>
+              </a14:hiddenLine>
+            </a:ext>
+          </a:extLst>
+        </p:spPr>
+        <p:txBody>
+          <a:bodyPr/>
+          <a:lstStyle>
+            <a:lvl1pPr>
+              <a:defRPr sz="2400">
+                <a:solidFill>
+                  <a:schemeClr val="tx1"/>
+                </a:solidFill>
+                <a:latin typeface="Arial" pitchFamily="34" charset="0"/>
+                <a:ea typeface="ＭＳ Ｐゴシック" pitchFamily="34" charset="-128"/>
+              </a:defRPr>
+            </a:lvl1pPr>
+            <a:lvl2pPr marL="742950" indent="-285750">
+              <a:defRPr sz="2400">
+                <a:solidFill>
+                  <a:schemeClr val="tx1"/>
+                </a:solidFill>
+                <a:latin typeface="Arial" pitchFamily="34" charset="0"/>
+                <a:ea typeface="ＭＳ Ｐゴシック" pitchFamily="34" charset="-128"/>
+              </a:defRPr>
+            </a:lvl2pPr>
+            <a:lvl3pPr marL="1143000" indent="-228600">
+              <a:defRPr sz="2400">
+                <a:solidFill>
+                  <a:schemeClr val="tx1"/>
+                </a:solidFill>
+                <a:latin typeface="Arial" pitchFamily="34" charset="0"/>
+                <a:ea typeface="ＭＳ Ｐゴシック" pitchFamily="34" charset="-128"/>
+              </a:defRPr>
+            </a:lvl3pPr>
+            <a:lvl4pPr marL="1600200" indent="-228600">
+              <a:defRPr sz="2400">
+                <a:solidFill>
+                  <a:schemeClr val="tx1"/>
+                </a:solidFill>
+                <a:latin typeface="Arial" pitchFamily="34" charset="0"/>
+                <a:ea typeface="ＭＳ Ｐゴシック" pitchFamily="34" charset="-128"/>
+              </a:defRPr>
+            </a:lvl4pPr>
+            <a:lvl5pPr marL="2057400" indent="-228600">
+              <a:defRPr sz="2400">
+                <a:solidFill>
+                  <a:schemeClr val="tx1"/>
+                </a:solidFill>
+                <a:latin typeface="Arial" pitchFamily="34" charset="0"/>
+                <a:ea typeface="ＭＳ Ｐゴシック" pitchFamily="34" charset="-128"/>
+              </a:defRPr>
+            </a:lvl5pPr>
+            <a:lvl6pPr marL="2514600" indent="-228600" defTabSz="457200" eaLnBrk="0" fontAlgn="base" hangingPunct="0">
+              <a:spcBef>
+                <a:spcPct val="0"/>
+              </a:spcBef>
+              <a:spcAft>
+                <a:spcPct val="0"/>
+              </a:spcAft>
+              <a:defRPr sz="2400">
+                <a:solidFill>
+                  <a:schemeClr val="tx1"/>
+                </a:solidFill>
+                <a:latin typeface="Arial" pitchFamily="34" charset="0"/>
+                <a:ea typeface="ＭＳ Ｐゴシック" pitchFamily="34" charset="-128"/>
+              </a:defRPr>
+            </a:lvl6pPr>
+            <a:lvl7pPr marL="2971800" indent="-228600" defTabSz="457200" eaLnBrk="0" fontAlgn="base" hangingPunct="0">
+              <a:spcBef>
+                <a:spcPct val="0"/>
+              </a:spcBef>
+              <a:spcAft>
+                <a:spcPct val="0"/>
+              </a:spcAft>
+              <a:defRPr sz="2400">
+                <a:solidFill>
+                  <a:schemeClr val="tx1"/>
+                </a:solidFill>
+                <a:latin typeface="Arial" pitchFamily="34" charset="0"/>
+                <a:ea typeface="ＭＳ Ｐゴシック" pitchFamily="34" charset="-128"/>
+              </a:defRPr>
+            </a:lvl7pPr>
+            <a:lvl8pPr marL="3429000" indent="-228600" defTabSz="457200" eaLnBrk="0" fontAlgn="base" hangingPunct="0">
+              <a:spcBef>
+                <a:spcPct val="0"/>
+              </a:spcBef>
+              <a:spcAft>
+                <a:spcPct val="0"/>
+              </a:spcAft>
+              <a:defRPr sz="2400">
+                <a:solidFill>
+                  <a:schemeClr val="tx1"/>
+                </a:solidFill>
+                <a:latin typeface="Arial" pitchFamily="34" charset="0"/>
+                <a:ea typeface="ＭＳ Ｐゴシック" pitchFamily="34" charset="-128"/>
+              </a:defRPr>
+            </a:lvl8pPr>
+            <a:lvl9pPr marL="3886200" indent="-228600" defTabSz="457200" eaLnBrk="0" fontAlgn="base" hangingPunct="0">
+              <a:spcBef>
+                <a:spcPct val="0"/>
+              </a:spcBef>
+              <a:spcAft>
+                <a:spcPct val="0"/>
+              </a:spcAft>
+              <a:defRPr sz="2400">
+                <a:solidFill>
+                  <a:schemeClr val="tx1"/>
+                </a:solidFill>
+                <a:latin typeface="Arial" pitchFamily="34" charset="0"/>
+                <a:ea typeface="ＭＳ Ｐゴシック" pitchFamily="34" charset="-128"/>
+              </a:defRPr>
+            </a:lvl9pPr>
+          </a:lstStyle>
+          <a:p>
+            <a:fld id="{C58890A0-04D6-4C54-9DDA-8F446812B62B}" type="slidenum">
+              <a:rPr lang="en-US" sz="1200">
+                <a:latin typeface="Calibri" pitchFamily="34" charset="0"/>
+              </a:rPr>
+              <a:pPr/>
+              <a:t>15</a:t>
+            </a:fld>
+            <a:endParaRPr lang="en-US" sz="1200">
+              <a:latin typeface="Calibri" pitchFamily="34" charset="0"/>
+            </a:endParaRPr>
+          </a:p>
+        </p:txBody>
+      </p:sp>
+    </p:spTree>
+    <p:extLst>
+      <p:ext uri="{BB962C8B-B14F-4D97-AF65-F5344CB8AC3E}">
+        <p14:creationId xmlns:p14="http://schemas.microsoft.com/office/powerpoint/2010/main" val="324783487"/>
+      </p:ext>
+    </p:extLst>
+  </p:cSld>
+  <p:clrMapOvr>
+    <a:masterClrMapping/>
+  </p:clrMapOvr>
+</p:notes>
+</file>
+
+<file path=ppt/notesSlides/notesSlide4.xml><?xml version="1.0" encoding="utf-8"?>
+<p:notes xmlns:a="http://schemas.openxmlformats.org/drawingml/2006/main" xmlns:r="http://schemas.openxmlformats.org/officeDocument/2006/relationships" xmlns:p="http://schemas.openxmlformats.org/presentationml/2006/main">
+  <p:cSld>
+    <p:spTree>
+      <p:nvGrpSpPr>
+        <p:cNvPr id="1" name="">
+          <a:extLst>
+            <a:ext uri="{FF2B5EF4-FFF2-40B4-BE49-F238E27FC236}">
+              <a16:creationId xmlns:a16="http://schemas.microsoft.com/office/drawing/2014/main" id="{0694506E-91FC-B313-258C-BB9C058CBAB3}"/>
+            </a:ext>
+          </a:extLst>
+        </p:cNvPr>
+        <p:cNvGrpSpPr/>
+        <p:nvPr/>
+      </p:nvGrpSpPr>
+      <p:grpSpPr>
+        <a:xfrm>
+          <a:off x="0" y="0"/>
+          <a:ext cx="0" cy="0"/>
+          <a:chOff x="0" y="0"/>
+          <a:chExt cx="0" cy="0"/>
+        </a:xfrm>
+      </p:grpSpPr>
+      <p:sp>
+        <p:nvSpPr>
+          <p:cNvPr id="47105" name="Slide Image Placeholder 1">
+            <a:extLst>
+              <a:ext uri="{FF2B5EF4-FFF2-40B4-BE49-F238E27FC236}">
+                <a16:creationId xmlns:a16="http://schemas.microsoft.com/office/drawing/2014/main" id="{91CC1105-E079-1C75-013A-4C387A8D2D77}"/>
+              </a:ext>
+            </a:extLst>
+          </p:cNvPr>
+          <p:cNvSpPr>
+            <a:spLocks noGrp="1" noRot="1" noChangeAspect="1" noTextEdit="1"/>
+          </p:cNvSpPr>
+          <p:nvPr>
+            <p:ph type="sldImg"/>
+          </p:nvPr>
+        </p:nvSpPr>
+        <p:spPr bwMode="auto">
+          <a:noFill/>
+          <a:ln>
+            <a:solidFill>
+              <a:srgbClr val="000000"/>
+            </a:solidFill>
+            <a:miter lim="800000"/>
+            <a:headEnd/>
+            <a:tailEnd/>
+          </a:ln>
+          <a:extLst>
+            <a:ext uri="{909E8E84-426E-40DD-AFC4-6F175D3DCCD1}">
+              <a14:hiddenFill xmlns:a14="http://schemas.microsoft.com/office/drawing/2010/main">
+                <a:solidFill>
+                  <a:srgbClr val="FFFFFF"/>
+                </a:solidFill>
+              </a14:hiddenFill>
+            </a:ext>
+          </a:extLst>
+        </p:spPr>
+      </p:sp>
+      <p:sp>
+        <p:nvSpPr>
+          <p:cNvPr id="47106" name="Notes Placeholder 2">
+            <a:extLst>
+              <a:ext uri="{FF2B5EF4-FFF2-40B4-BE49-F238E27FC236}">
+                <a16:creationId xmlns:a16="http://schemas.microsoft.com/office/drawing/2014/main" id="{383E9BB2-4CCA-6710-19EB-0256D5FB2166}"/>
+              </a:ext>
+            </a:extLst>
+          </p:cNvPr>
+          <p:cNvSpPr>
+            <a:spLocks noGrp="1"/>
+          </p:cNvSpPr>
+          <p:nvPr>
+            <p:ph type="body" idx="1"/>
+          </p:nvPr>
+        </p:nvSpPr>
+        <p:spPr bwMode="auto">
+          <a:noFill/>
+          <a:extLst>
+            <a:ext uri="{909E8E84-426E-40DD-AFC4-6F175D3DCCD1}">
+              <a14:hiddenFill xmlns:a14="http://schemas.microsoft.com/office/drawing/2010/main">
+                <a:solidFill>
+                  <a:srgbClr val="FFFFFF"/>
+                </a:solidFill>
+              </a14:hiddenFill>
+            </a:ext>
+            <a:ext uri="{91240B29-F687-4F45-9708-019B960494DF}">
+              <a14:hiddenLine xmlns:a14="http://schemas.microsoft.com/office/drawing/2010/main" w="9525">
+                <a:solidFill>
+                  <a:srgbClr val="000000"/>
+                </a:solidFill>
+                <a:miter lim="800000"/>
+                <a:headEnd/>
+                <a:tailEnd/>
+              </a14:hiddenLine>
+            </a:ext>
+          </a:extLst>
+        </p:spPr>
+        <p:txBody>
+          <a:bodyPr wrap="square" numCol="1" anchor="t" anchorCtr="0" compatLnSpc="1">
+            <a:prstTxWarp prst="textNoShape">
+              <a:avLst/>
+            </a:prstTxWarp>
+          </a:bodyPr>
+          <a:lstStyle/>
+          <a:p>
+            <a:r>
+              <a:rPr lang="en-US" dirty="0">
+                <a:ea typeface="ＭＳ Ｐゴシック" pitchFamily="34" charset="-128"/>
+              </a:rPr>
+              <a:t>The progress of a type of cancer differs in women and men (p.184)</a:t>
+            </a:r>
+          </a:p>
+        </p:txBody>
+      </p:sp>
+      <p:sp>
+        <p:nvSpPr>
+          <p:cNvPr id="47107" name="Slide Number Placeholder 3">
+            <a:extLst>
+              <a:ext uri="{FF2B5EF4-FFF2-40B4-BE49-F238E27FC236}">
+                <a16:creationId xmlns:a16="http://schemas.microsoft.com/office/drawing/2014/main" id="{E76484FF-9528-7862-7EFE-65991AF83CA1}"/>
+              </a:ext>
+            </a:extLst>
+          </p:cNvPr>
+          <p:cNvSpPr>
+            <a:spLocks noGrp="1"/>
+          </p:cNvSpPr>
+          <p:nvPr>
+            <p:ph type="sldNum" sz="quarter" idx="5"/>
+          </p:nvPr>
+        </p:nvSpPr>
+        <p:spPr bwMode="auto">
+          <a:noFill/>
+          <a:extLst>
+            <a:ext uri="{909E8E84-426E-40DD-AFC4-6F175D3DCCD1}">
+              <a14:hiddenFill xmlns:a14="http://schemas.microsoft.com/office/drawing/2010/main">
+                <a:solidFill>
+                  <a:srgbClr val="FFFFFF"/>
+                </a:solidFill>
+              </a14:hiddenFill>
+            </a:ext>
+            <a:ext uri="{91240B29-F687-4F45-9708-019B960494DF}">
+              <a14:hiddenLine xmlns:a14="http://schemas.microsoft.com/office/drawing/2010/main" w="9525">
+                <a:solidFill>
+                  <a:srgbClr val="000000"/>
+                </a:solidFill>
+                <a:miter lim="800000"/>
+                <a:headEnd/>
+                <a:tailEnd/>
+              </a14:hiddenLine>
+            </a:ext>
+          </a:extLst>
+        </p:spPr>
+        <p:txBody>
+          <a:bodyPr/>
+          <a:lstStyle>
+            <a:lvl1pPr>
+              <a:defRPr sz="2400">
+                <a:solidFill>
+                  <a:schemeClr val="tx1"/>
+                </a:solidFill>
+                <a:latin typeface="Arial" pitchFamily="34" charset="0"/>
+                <a:ea typeface="ＭＳ Ｐゴシック" pitchFamily="34" charset="-128"/>
+              </a:defRPr>
+            </a:lvl1pPr>
+            <a:lvl2pPr marL="742950" indent="-285750">
+              <a:defRPr sz="2400">
+                <a:solidFill>
+                  <a:schemeClr val="tx1"/>
+                </a:solidFill>
+                <a:latin typeface="Arial" pitchFamily="34" charset="0"/>
+                <a:ea typeface="ＭＳ Ｐゴシック" pitchFamily="34" charset="-128"/>
+              </a:defRPr>
+            </a:lvl2pPr>
+            <a:lvl3pPr marL="1143000" indent="-228600">
+              <a:defRPr sz="2400">
+                <a:solidFill>
+                  <a:schemeClr val="tx1"/>
+                </a:solidFill>
+                <a:latin typeface="Arial" pitchFamily="34" charset="0"/>
+                <a:ea typeface="ＭＳ Ｐゴシック" pitchFamily="34" charset="-128"/>
+              </a:defRPr>
+            </a:lvl3pPr>
+            <a:lvl4pPr marL="1600200" indent="-228600">
+              <a:defRPr sz="2400">
+                <a:solidFill>
+                  <a:schemeClr val="tx1"/>
+                </a:solidFill>
+                <a:latin typeface="Arial" pitchFamily="34" charset="0"/>
+                <a:ea typeface="ＭＳ Ｐゴシック" pitchFamily="34" charset="-128"/>
+              </a:defRPr>
+            </a:lvl4pPr>
+            <a:lvl5pPr marL="2057400" indent="-228600">
+              <a:defRPr sz="2400">
+                <a:solidFill>
+                  <a:schemeClr val="tx1"/>
+                </a:solidFill>
+                <a:latin typeface="Arial" pitchFamily="34" charset="0"/>
+                <a:ea typeface="ＭＳ Ｐゴシック" pitchFamily="34" charset="-128"/>
+              </a:defRPr>
+            </a:lvl5pPr>
+            <a:lvl6pPr marL="2514600" indent="-228600" defTabSz="457200" eaLnBrk="0" fontAlgn="base" hangingPunct="0">
+              <a:spcBef>
+                <a:spcPct val="0"/>
+              </a:spcBef>
+              <a:spcAft>
+                <a:spcPct val="0"/>
+              </a:spcAft>
+              <a:defRPr sz="2400">
+                <a:solidFill>
+                  <a:schemeClr val="tx1"/>
+                </a:solidFill>
+                <a:latin typeface="Arial" pitchFamily="34" charset="0"/>
+                <a:ea typeface="ＭＳ Ｐゴシック" pitchFamily="34" charset="-128"/>
+              </a:defRPr>
+            </a:lvl6pPr>
+            <a:lvl7pPr marL="2971800" indent="-228600" defTabSz="457200" eaLnBrk="0" fontAlgn="base" hangingPunct="0">
+              <a:spcBef>
+                <a:spcPct val="0"/>
+              </a:spcBef>
+              <a:spcAft>
+                <a:spcPct val="0"/>
+              </a:spcAft>
+              <a:defRPr sz="2400">
+                <a:solidFill>
+                  <a:schemeClr val="tx1"/>
+                </a:solidFill>
+                <a:latin typeface="Arial" pitchFamily="34" charset="0"/>
+                <a:ea typeface="ＭＳ Ｐゴシック" pitchFamily="34" charset="-128"/>
+              </a:defRPr>
+            </a:lvl7pPr>
+            <a:lvl8pPr marL="3429000" indent="-228600" defTabSz="457200" eaLnBrk="0" fontAlgn="base" hangingPunct="0">
+              <a:spcBef>
+                <a:spcPct val="0"/>
+              </a:spcBef>
+              <a:spcAft>
+                <a:spcPct val="0"/>
+              </a:spcAft>
+              <a:defRPr sz="2400">
+                <a:solidFill>
+                  <a:schemeClr val="tx1"/>
+                </a:solidFill>
+                <a:latin typeface="Arial" pitchFamily="34" charset="0"/>
+                <a:ea typeface="ＭＳ Ｐゴシック" pitchFamily="34" charset="-128"/>
+              </a:defRPr>
+            </a:lvl8pPr>
+            <a:lvl9pPr marL="3886200" indent="-228600" defTabSz="457200" eaLnBrk="0" fontAlgn="base" hangingPunct="0">
+              <a:spcBef>
+                <a:spcPct val="0"/>
+              </a:spcBef>
+              <a:spcAft>
+                <a:spcPct val="0"/>
+              </a:spcAft>
+              <a:defRPr sz="2400">
+                <a:solidFill>
+                  <a:schemeClr val="tx1"/>
+                </a:solidFill>
+                <a:latin typeface="Arial" pitchFamily="34" charset="0"/>
+                <a:ea typeface="ＭＳ Ｐゴシック" pitchFamily="34" charset="-128"/>
+              </a:defRPr>
+            </a:lvl9pPr>
+          </a:lstStyle>
+          <a:p>
+            <a:fld id="{C58890A0-04D6-4C54-9DDA-8F446812B62B}" type="slidenum">
+              <a:rPr lang="en-US" sz="1200">
+                <a:latin typeface="Calibri" pitchFamily="34" charset="0"/>
+              </a:rPr>
+              <a:pPr/>
+              <a:t>16</a:t>
+            </a:fld>
+            <a:endParaRPr lang="en-US" sz="1200">
+              <a:latin typeface="Calibri" pitchFamily="34" charset="0"/>
+            </a:endParaRPr>
+          </a:p>
+        </p:txBody>
+      </p:sp>
+    </p:spTree>
+    <p:extLst>
+      <p:ext uri="{BB962C8B-B14F-4D97-AF65-F5344CB8AC3E}">
+        <p14:creationId xmlns:p14="http://schemas.microsoft.com/office/powerpoint/2010/main" val="1347942567"/>
+      </p:ext>
+    </p:extLst>
+  </p:cSld>
+  <p:clrMapOvr>
+    <a:masterClrMapping/>
+  </p:clrMapOvr>
+</p:notes>
+</file>
+
+<file path=ppt/notesSlides/notesSlide5.xml><?xml version="1.0" encoding="utf-8"?>
+<p:notes xmlns:a="http://schemas.openxmlformats.org/drawingml/2006/main" xmlns:r="http://schemas.openxmlformats.org/officeDocument/2006/relationships" xmlns:p="http://schemas.openxmlformats.org/presentationml/2006/main">
+  <p:cSld>
+    <p:spTree>
+      <p:nvGrpSpPr>
+        <p:cNvPr id="1" name=""/>
+        <p:cNvGrpSpPr/>
+        <p:nvPr/>
+      </p:nvGrpSpPr>
+      <p:grpSpPr>
+        <a:xfrm>
+          <a:off x="0" y="0"/>
+          <a:ext cx="0" cy="0"/>
+          <a:chOff x="0" y="0"/>
+          <a:chExt cx="0" cy="0"/>
+        </a:xfrm>
+      </p:grpSpPr>
+      <p:sp>
+        <p:nvSpPr>
           <p:cNvPr id="2" name="Slide Image Placeholder 1"/>
           <p:cNvSpPr>
             <a:spLocks noGrp="1" noRot="1" noChangeAspect="1"/>
@@ -2707,7 +2723,7 @@
             <a:fld id="{E6C021B2-4005-4FC1-8451-5FBAFD39D8B2}" type="slidenum">
               <a:rPr lang="en-US" smtClean="0"/>
               <a:pPr/>
-              <a:t>16</a:t>
+              <a:t>18</a:t>
             </a:fld>
             <a:endParaRPr lang="en-US"/>
           </a:p>
@@ -2726,7 +2742,7 @@
 </p:notes>
 </file>
 
-<file path=ppt/notesSlides/notesSlide4.xml><?xml version="1.0" encoding="utf-8"?>
+<file path=ppt/notesSlides/notesSlide6.xml><?xml version="1.0" encoding="utf-8"?>
 <p:notes xmlns:a="http://schemas.openxmlformats.org/drawingml/2006/main" xmlns:r="http://schemas.openxmlformats.org/officeDocument/2006/relationships" xmlns:p="http://schemas.openxmlformats.org/presentationml/2006/main">
   <p:cSld>
     <p:spTree>
@@ -2816,7 +2832,7 @@
             <a:fld id="{E6C021B2-4005-4FC1-8451-5FBAFD39D8B2}" type="slidenum">
               <a:rPr lang="en-US" smtClean="0"/>
               <a:pPr/>
-              <a:t>17</a:t>
+              <a:t>19</a:t>
             </a:fld>
             <a:endParaRPr lang="en-US"/>
           </a:p>
@@ -2835,7 +2851,7 @@
 </p:notes>
 </file>
 
-<file path=ppt/notesSlides/notesSlide5.xml><?xml version="1.0" encoding="utf-8"?>
+<file path=ppt/notesSlides/notesSlide7.xml><?xml version="1.0" encoding="utf-8"?>
 <p:notes xmlns:a="http://schemas.openxmlformats.org/drawingml/2006/main" xmlns:r="http://schemas.openxmlformats.org/officeDocument/2006/relationships" xmlns:p="http://schemas.openxmlformats.org/presentationml/2006/main">
   <p:cSld>
     <p:spTree>
@@ -2881,8 +2897,57 @@
           <a:p>
             <a:r>
               <a:rPr lang="en-US" dirty="0"/>
-              <a:t>Wash out period</a:t>
-            </a:r>
+              <a:t>An example of a </a:t>
+            </a:r>
+            <a:r>
+              <a:rPr lang="en-US" b="1" dirty="0"/>
+              <a:t>convenience sample</a:t>
+            </a:r>
+            <a:r>
+              <a:rPr lang="en-US" dirty="0"/>
+              <a:t> would be a professor conducting a survey on study habits by asking students in their own class to participate. Since these students are easily accessible to the professor and willing to participate, they are chosen out of convenience rather than through a random sampling process.</a:t>
+            </a:r>
+          </a:p>
+          <a:p>
+            <a:r>
+              <a:rPr lang="en-US" dirty="0"/>
+              <a:t>This type of sampling is often easier and less costly but may not be representative of the broader population.</a:t>
+            </a:r>
+          </a:p>
+          <a:p>
+            <a:endParaRPr lang="en-US" dirty="0"/>
+          </a:p>
+          <a:p>
+            <a:r>
+              <a:rPr lang="en-US" dirty="0"/>
+              <a:t>An example of a </a:t>
+            </a:r>
+            <a:r>
+              <a:rPr lang="en-US" b="1" dirty="0"/>
+              <a:t>voluntary response sample</a:t>
+            </a:r>
+            <a:r>
+              <a:rPr lang="en-US" dirty="0"/>
+              <a:t> would be an online survey posted on a news website asking readers to share their opinions on a political issue. Only those who feel strongly about the topic may choose to respond, making the sample self-selected.</a:t>
+            </a:r>
+          </a:p>
+          <a:p>
+            <a:r>
+              <a:rPr lang="en-US" dirty="0"/>
+              <a:t>Since participation is entirely voluntary, the results might be biased, as they typically reflect the views of more passionate individuals rather than a random or representative group of the population.</a:t>
+            </a:r>
+          </a:p>
+          <a:p>
+            <a:endParaRPr lang="en-US" dirty="0"/>
+          </a:p>
+          <a:p>
+            <a:endParaRPr lang="en-US" dirty="0"/>
+          </a:p>
+          <a:p>
+            <a:endParaRPr lang="en-US" dirty="0"/>
+          </a:p>
+          <a:p>
+            <a:endParaRPr lang="en-US" dirty="0"/>
           </a:p>
         </p:txBody>
       </p:sp>
@@ -2893,7 +2958,7 @@
             <a:spLocks noGrp="1"/>
           </p:cNvSpPr>
           <p:nvPr>
-            <p:ph type="sldNum" sz="quarter" idx="10"/>
+            <p:ph type="sldNum" sz="quarter" idx="5"/>
           </p:nvPr>
         </p:nvSpPr>
         <p:spPr/>
@@ -2904,7 +2969,7 @@
             <a:fld id="{E6C021B2-4005-4FC1-8451-5FBAFD39D8B2}" type="slidenum">
               <a:rPr lang="en-US" smtClean="0"/>
               <a:pPr/>
-              <a:t>18</a:t>
+              <a:t>22</a:t>
             </a:fld>
             <a:endParaRPr lang="en-US"/>
           </a:p>
@@ -2913,561 +2978,7 @@
     </p:spTree>
     <p:extLst>
       <p:ext uri="{BB962C8B-B14F-4D97-AF65-F5344CB8AC3E}">
-        <p14:creationId xmlns:p14="http://schemas.microsoft.com/office/powerpoint/2010/main" val="3811808758"/>
-      </p:ext>
-    </p:extLst>
-  </p:cSld>
-  <p:clrMapOvr>
-    <a:masterClrMapping/>
-  </p:clrMapOvr>
-</p:notes>
-</file>
-
-<file path=ppt/notesSlides/notesSlide6.xml><?xml version="1.0" encoding="utf-8"?>
-<p:notes xmlns:a="http://schemas.openxmlformats.org/drawingml/2006/main" xmlns:r="http://schemas.openxmlformats.org/officeDocument/2006/relationships" xmlns:p="http://schemas.openxmlformats.org/presentationml/2006/main">
-  <p:cSld>
-    <p:spTree>
-      <p:nvGrpSpPr>
-        <p:cNvPr id="1" name=""/>
-        <p:cNvGrpSpPr/>
-        <p:nvPr/>
-      </p:nvGrpSpPr>
-      <p:grpSpPr>
-        <a:xfrm>
-          <a:off x="0" y="0"/>
-          <a:ext cx="0" cy="0"/>
-          <a:chOff x="0" y="0"/>
-          <a:chExt cx="0" cy="0"/>
-        </a:xfrm>
-      </p:grpSpPr>
-      <p:sp>
-        <p:nvSpPr>
-          <p:cNvPr id="47105" name="Slide Image Placeholder 1"/>
-          <p:cNvSpPr>
-            <a:spLocks noGrp="1" noRot="1" noChangeAspect="1" noTextEdit="1"/>
-          </p:cNvSpPr>
-          <p:nvPr>
-            <p:ph type="sldImg"/>
-          </p:nvPr>
-        </p:nvSpPr>
-        <p:spPr bwMode="auto">
-          <a:noFill/>
-          <a:ln>
-            <a:solidFill>
-              <a:srgbClr val="000000"/>
-            </a:solidFill>
-            <a:miter lim="800000"/>
-            <a:headEnd/>
-            <a:tailEnd/>
-          </a:ln>
-          <a:extLst>
-            <a:ext uri="{909E8E84-426E-40DD-AFC4-6F175D3DCCD1}">
-              <a14:hiddenFill xmlns:a14="http://schemas.microsoft.com/office/drawing/2010/main">
-                <a:solidFill>
-                  <a:srgbClr val="FFFFFF"/>
-                </a:solidFill>
-              </a14:hiddenFill>
-            </a:ext>
-          </a:extLst>
-        </p:spPr>
-      </p:sp>
-      <p:sp>
-        <p:nvSpPr>
-          <p:cNvPr id="47106" name="Notes Placeholder 2"/>
-          <p:cNvSpPr>
-            <a:spLocks noGrp="1"/>
-          </p:cNvSpPr>
-          <p:nvPr>
-            <p:ph type="body" idx="1"/>
-          </p:nvPr>
-        </p:nvSpPr>
-        <p:spPr bwMode="auto">
-          <a:noFill/>
-          <a:extLst>
-            <a:ext uri="{909E8E84-426E-40DD-AFC4-6F175D3DCCD1}">
-              <a14:hiddenFill xmlns:a14="http://schemas.microsoft.com/office/drawing/2010/main">
-                <a:solidFill>
-                  <a:srgbClr val="FFFFFF"/>
-                </a:solidFill>
-              </a14:hiddenFill>
-            </a:ext>
-            <a:ext uri="{91240B29-F687-4F45-9708-019B960494DF}">
-              <a14:hiddenLine xmlns:a14="http://schemas.microsoft.com/office/drawing/2010/main" w="9525">
-                <a:solidFill>
-                  <a:srgbClr val="000000"/>
-                </a:solidFill>
-                <a:miter lim="800000"/>
-                <a:headEnd/>
-                <a:tailEnd/>
-              </a14:hiddenLine>
-            </a:ext>
-          </a:extLst>
-        </p:spPr>
-        <p:txBody>
-          <a:bodyPr wrap="square" numCol="1" anchor="t" anchorCtr="0" compatLnSpc="1">
-            <a:prstTxWarp prst="textNoShape">
-              <a:avLst/>
-            </a:prstTxWarp>
-          </a:bodyPr>
-          <a:lstStyle/>
-          <a:p>
-            <a:r>
-              <a:rPr lang="en-US" dirty="0">
-                <a:ea typeface="ＭＳ Ｐゴシック" pitchFamily="34" charset="-128"/>
-              </a:rPr>
-              <a:t>The progress of a type of cancer differs in women and men (p.184)</a:t>
-            </a:r>
-          </a:p>
-        </p:txBody>
-      </p:sp>
-      <p:sp>
-        <p:nvSpPr>
-          <p:cNvPr id="47107" name="Slide Number Placeholder 3"/>
-          <p:cNvSpPr>
-            <a:spLocks noGrp="1"/>
-          </p:cNvSpPr>
-          <p:nvPr>
-            <p:ph type="sldNum" sz="quarter" idx="5"/>
-          </p:nvPr>
-        </p:nvSpPr>
-        <p:spPr bwMode="auto">
-          <a:noFill/>
-          <a:extLst>
-            <a:ext uri="{909E8E84-426E-40DD-AFC4-6F175D3DCCD1}">
-              <a14:hiddenFill xmlns:a14="http://schemas.microsoft.com/office/drawing/2010/main">
-                <a:solidFill>
-                  <a:srgbClr val="FFFFFF"/>
-                </a:solidFill>
-              </a14:hiddenFill>
-            </a:ext>
-            <a:ext uri="{91240B29-F687-4F45-9708-019B960494DF}">
-              <a14:hiddenLine xmlns:a14="http://schemas.microsoft.com/office/drawing/2010/main" w="9525">
-                <a:solidFill>
-                  <a:srgbClr val="000000"/>
-                </a:solidFill>
-                <a:miter lim="800000"/>
-                <a:headEnd/>
-                <a:tailEnd/>
-              </a14:hiddenLine>
-            </a:ext>
-          </a:extLst>
-        </p:spPr>
-        <p:txBody>
-          <a:bodyPr/>
-          <a:lstStyle>
-            <a:lvl1pPr>
-              <a:defRPr sz="2400">
-                <a:solidFill>
-                  <a:schemeClr val="tx1"/>
-                </a:solidFill>
-                <a:latin typeface="Arial" pitchFamily="34" charset="0"/>
-                <a:ea typeface="ＭＳ Ｐゴシック" pitchFamily="34" charset="-128"/>
-              </a:defRPr>
-            </a:lvl1pPr>
-            <a:lvl2pPr marL="742950" indent="-285750">
-              <a:defRPr sz="2400">
-                <a:solidFill>
-                  <a:schemeClr val="tx1"/>
-                </a:solidFill>
-                <a:latin typeface="Arial" pitchFamily="34" charset="0"/>
-                <a:ea typeface="ＭＳ Ｐゴシック" pitchFamily="34" charset="-128"/>
-              </a:defRPr>
-            </a:lvl2pPr>
-            <a:lvl3pPr marL="1143000" indent="-228600">
-              <a:defRPr sz="2400">
-                <a:solidFill>
-                  <a:schemeClr val="tx1"/>
-                </a:solidFill>
-                <a:latin typeface="Arial" pitchFamily="34" charset="0"/>
-                <a:ea typeface="ＭＳ Ｐゴシック" pitchFamily="34" charset="-128"/>
-              </a:defRPr>
-            </a:lvl3pPr>
-            <a:lvl4pPr marL="1600200" indent="-228600">
-              <a:defRPr sz="2400">
-                <a:solidFill>
-                  <a:schemeClr val="tx1"/>
-                </a:solidFill>
-                <a:latin typeface="Arial" pitchFamily="34" charset="0"/>
-                <a:ea typeface="ＭＳ Ｐゴシック" pitchFamily="34" charset="-128"/>
-              </a:defRPr>
-            </a:lvl4pPr>
-            <a:lvl5pPr marL="2057400" indent="-228600">
-              <a:defRPr sz="2400">
-                <a:solidFill>
-                  <a:schemeClr val="tx1"/>
-                </a:solidFill>
-                <a:latin typeface="Arial" pitchFamily="34" charset="0"/>
-                <a:ea typeface="ＭＳ Ｐゴシック" pitchFamily="34" charset="-128"/>
-              </a:defRPr>
-            </a:lvl5pPr>
-            <a:lvl6pPr marL="2514600" indent="-228600" defTabSz="457200" eaLnBrk="0" fontAlgn="base" hangingPunct="0">
-              <a:spcBef>
-                <a:spcPct val="0"/>
-              </a:spcBef>
-              <a:spcAft>
-                <a:spcPct val="0"/>
-              </a:spcAft>
-              <a:defRPr sz="2400">
-                <a:solidFill>
-                  <a:schemeClr val="tx1"/>
-                </a:solidFill>
-                <a:latin typeface="Arial" pitchFamily="34" charset="0"/>
-                <a:ea typeface="ＭＳ Ｐゴシック" pitchFamily="34" charset="-128"/>
-              </a:defRPr>
-            </a:lvl6pPr>
-            <a:lvl7pPr marL="2971800" indent="-228600" defTabSz="457200" eaLnBrk="0" fontAlgn="base" hangingPunct="0">
-              <a:spcBef>
-                <a:spcPct val="0"/>
-              </a:spcBef>
-              <a:spcAft>
-                <a:spcPct val="0"/>
-              </a:spcAft>
-              <a:defRPr sz="2400">
-                <a:solidFill>
-                  <a:schemeClr val="tx1"/>
-                </a:solidFill>
-                <a:latin typeface="Arial" pitchFamily="34" charset="0"/>
-                <a:ea typeface="ＭＳ Ｐゴシック" pitchFamily="34" charset="-128"/>
-              </a:defRPr>
-            </a:lvl7pPr>
-            <a:lvl8pPr marL="3429000" indent="-228600" defTabSz="457200" eaLnBrk="0" fontAlgn="base" hangingPunct="0">
-              <a:spcBef>
-                <a:spcPct val="0"/>
-              </a:spcBef>
-              <a:spcAft>
-                <a:spcPct val="0"/>
-              </a:spcAft>
-              <a:defRPr sz="2400">
-                <a:solidFill>
-                  <a:schemeClr val="tx1"/>
-                </a:solidFill>
-                <a:latin typeface="Arial" pitchFamily="34" charset="0"/>
-                <a:ea typeface="ＭＳ Ｐゴシック" pitchFamily="34" charset="-128"/>
-              </a:defRPr>
-            </a:lvl8pPr>
-            <a:lvl9pPr marL="3886200" indent="-228600" defTabSz="457200" eaLnBrk="0" fontAlgn="base" hangingPunct="0">
-              <a:spcBef>
-                <a:spcPct val="0"/>
-              </a:spcBef>
-              <a:spcAft>
-                <a:spcPct val="0"/>
-              </a:spcAft>
-              <a:defRPr sz="2400">
-                <a:solidFill>
-                  <a:schemeClr val="tx1"/>
-                </a:solidFill>
-                <a:latin typeface="Arial" pitchFamily="34" charset="0"/>
-                <a:ea typeface="ＭＳ Ｐゴシック" pitchFamily="34" charset="-128"/>
-              </a:defRPr>
-            </a:lvl9pPr>
-          </a:lstStyle>
-          <a:p>
-            <a:fld id="{C58890A0-04D6-4C54-9DDA-8F446812B62B}" type="slidenum">
-              <a:rPr lang="en-US" sz="1200">
-                <a:latin typeface="Calibri" pitchFamily="34" charset="0"/>
-              </a:rPr>
-              <a:pPr/>
-              <a:t>19</a:t>
-            </a:fld>
-            <a:endParaRPr lang="en-US" sz="1200">
-              <a:latin typeface="Calibri" pitchFamily="34" charset="0"/>
-            </a:endParaRPr>
-          </a:p>
-        </p:txBody>
-      </p:sp>
-    </p:spTree>
-    <p:extLst>
-      <p:ext uri="{BB962C8B-B14F-4D97-AF65-F5344CB8AC3E}">
-        <p14:creationId xmlns:p14="http://schemas.microsoft.com/office/powerpoint/2010/main" val="324783487"/>
-      </p:ext>
-    </p:extLst>
-  </p:cSld>
-  <p:clrMapOvr>
-    <a:masterClrMapping/>
-  </p:clrMapOvr>
-</p:notes>
-</file>
-
-<file path=ppt/notesSlides/notesSlide7.xml><?xml version="1.0" encoding="utf-8"?>
-<p:notes xmlns:a="http://schemas.openxmlformats.org/drawingml/2006/main" xmlns:r="http://schemas.openxmlformats.org/officeDocument/2006/relationships" xmlns:p="http://schemas.openxmlformats.org/presentationml/2006/main">
-  <p:cSld>
-    <p:spTree>
-      <p:nvGrpSpPr>
-        <p:cNvPr id="1" name="">
-          <a:extLst>
-            <a:ext uri="{FF2B5EF4-FFF2-40B4-BE49-F238E27FC236}">
-              <a16:creationId xmlns:a16="http://schemas.microsoft.com/office/drawing/2014/main" id="{0694506E-91FC-B313-258C-BB9C058CBAB3}"/>
-            </a:ext>
-          </a:extLst>
-        </p:cNvPr>
-        <p:cNvGrpSpPr/>
-        <p:nvPr/>
-      </p:nvGrpSpPr>
-      <p:grpSpPr>
-        <a:xfrm>
-          <a:off x="0" y="0"/>
-          <a:ext cx="0" cy="0"/>
-          <a:chOff x="0" y="0"/>
-          <a:chExt cx="0" cy="0"/>
-        </a:xfrm>
-      </p:grpSpPr>
-      <p:sp>
-        <p:nvSpPr>
-          <p:cNvPr id="47105" name="Slide Image Placeholder 1">
-            <a:extLst>
-              <a:ext uri="{FF2B5EF4-FFF2-40B4-BE49-F238E27FC236}">
-                <a16:creationId xmlns:a16="http://schemas.microsoft.com/office/drawing/2014/main" id="{91CC1105-E079-1C75-013A-4C387A8D2D77}"/>
-              </a:ext>
-            </a:extLst>
-          </p:cNvPr>
-          <p:cNvSpPr>
-            <a:spLocks noGrp="1" noRot="1" noChangeAspect="1" noTextEdit="1"/>
-          </p:cNvSpPr>
-          <p:nvPr>
-            <p:ph type="sldImg"/>
-          </p:nvPr>
-        </p:nvSpPr>
-        <p:spPr bwMode="auto">
-          <a:noFill/>
-          <a:ln>
-            <a:solidFill>
-              <a:srgbClr val="000000"/>
-            </a:solidFill>
-            <a:miter lim="800000"/>
-            <a:headEnd/>
-            <a:tailEnd/>
-          </a:ln>
-          <a:extLst>
-            <a:ext uri="{909E8E84-426E-40DD-AFC4-6F175D3DCCD1}">
-              <a14:hiddenFill xmlns:a14="http://schemas.microsoft.com/office/drawing/2010/main">
-                <a:solidFill>
-                  <a:srgbClr val="FFFFFF"/>
-                </a:solidFill>
-              </a14:hiddenFill>
-            </a:ext>
-          </a:extLst>
-        </p:spPr>
-      </p:sp>
-      <p:sp>
-        <p:nvSpPr>
-          <p:cNvPr id="47106" name="Notes Placeholder 2">
-            <a:extLst>
-              <a:ext uri="{FF2B5EF4-FFF2-40B4-BE49-F238E27FC236}">
-                <a16:creationId xmlns:a16="http://schemas.microsoft.com/office/drawing/2014/main" id="{383E9BB2-4CCA-6710-19EB-0256D5FB2166}"/>
-              </a:ext>
-            </a:extLst>
-          </p:cNvPr>
-          <p:cNvSpPr>
-            <a:spLocks noGrp="1"/>
-          </p:cNvSpPr>
-          <p:nvPr>
-            <p:ph type="body" idx="1"/>
-          </p:nvPr>
-        </p:nvSpPr>
-        <p:spPr bwMode="auto">
-          <a:noFill/>
-          <a:extLst>
-            <a:ext uri="{909E8E84-426E-40DD-AFC4-6F175D3DCCD1}">
-              <a14:hiddenFill xmlns:a14="http://schemas.microsoft.com/office/drawing/2010/main">
-                <a:solidFill>
-                  <a:srgbClr val="FFFFFF"/>
-                </a:solidFill>
-              </a14:hiddenFill>
-            </a:ext>
-            <a:ext uri="{91240B29-F687-4F45-9708-019B960494DF}">
-              <a14:hiddenLine xmlns:a14="http://schemas.microsoft.com/office/drawing/2010/main" w="9525">
-                <a:solidFill>
-                  <a:srgbClr val="000000"/>
-                </a:solidFill>
-                <a:miter lim="800000"/>
-                <a:headEnd/>
-                <a:tailEnd/>
-              </a14:hiddenLine>
-            </a:ext>
-          </a:extLst>
-        </p:spPr>
-        <p:txBody>
-          <a:bodyPr wrap="square" numCol="1" anchor="t" anchorCtr="0" compatLnSpc="1">
-            <a:prstTxWarp prst="textNoShape">
-              <a:avLst/>
-            </a:prstTxWarp>
-          </a:bodyPr>
-          <a:lstStyle/>
-          <a:p>
-            <a:r>
-              <a:rPr lang="en-US" dirty="0">
-                <a:ea typeface="ＭＳ Ｐゴシック" pitchFamily="34" charset="-128"/>
-              </a:rPr>
-              <a:t>The progress of a type of cancer differs in women and men (p.184)</a:t>
-            </a:r>
-          </a:p>
-        </p:txBody>
-      </p:sp>
-      <p:sp>
-        <p:nvSpPr>
-          <p:cNvPr id="47107" name="Slide Number Placeholder 3">
-            <a:extLst>
-              <a:ext uri="{FF2B5EF4-FFF2-40B4-BE49-F238E27FC236}">
-                <a16:creationId xmlns:a16="http://schemas.microsoft.com/office/drawing/2014/main" id="{E76484FF-9528-7862-7EFE-65991AF83CA1}"/>
-              </a:ext>
-            </a:extLst>
-          </p:cNvPr>
-          <p:cNvSpPr>
-            <a:spLocks noGrp="1"/>
-          </p:cNvSpPr>
-          <p:nvPr>
-            <p:ph type="sldNum" sz="quarter" idx="5"/>
-          </p:nvPr>
-        </p:nvSpPr>
-        <p:spPr bwMode="auto">
-          <a:noFill/>
-          <a:extLst>
-            <a:ext uri="{909E8E84-426E-40DD-AFC4-6F175D3DCCD1}">
-              <a14:hiddenFill xmlns:a14="http://schemas.microsoft.com/office/drawing/2010/main">
-                <a:solidFill>
-                  <a:srgbClr val="FFFFFF"/>
-                </a:solidFill>
-              </a14:hiddenFill>
-            </a:ext>
-            <a:ext uri="{91240B29-F687-4F45-9708-019B960494DF}">
-              <a14:hiddenLine xmlns:a14="http://schemas.microsoft.com/office/drawing/2010/main" w="9525">
-                <a:solidFill>
-                  <a:srgbClr val="000000"/>
-                </a:solidFill>
-                <a:miter lim="800000"/>
-                <a:headEnd/>
-                <a:tailEnd/>
-              </a14:hiddenLine>
-            </a:ext>
-          </a:extLst>
-        </p:spPr>
-        <p:txBody>
-          <a:bodyPr/>
-          <a:lstStyle>
-            <a:lvl1pPr>
-              <a:defRPr sz="2400">
-                <a:solidFill>
-                  <a:schemeClr val="tx1"/>
-                </a:solidFill>
-                <a:latin typeface="Arial" pitchFamily="34" charset="0"/>
-                <a:ea typeface="ＭＳ Ｐゴシック" pitchFamily="34" charset="-128"/>
-              </a:defRPr>
-            </a:lvl1pPr>
-            <a:lvl2pPr marL="742950" indent="-285750">
-              <a:defRPr sz="2400">
-                <a:solidFill>
-                  <a:schemeClr val="tx1"/>
-                </a:solidFill>
-                <a:latin typeface="Arial" pitchFamily="34" charset="0"/>
-                <a:ea typeface="ＭＳ Ｐゴシック" pitchFamily="34" charset="-128"/>
-              </a:defRPr>
-            </a:lvl2pPr>
-            <a:lvl3pPr marL="1143000" indent="-228600">
-              <a:defRPr sz="2400">
-                <a:solidFill>
-                  <a:schemeClr val="tx1"/>
-                </a:solidFill>
-                <a:latin typeface="Arial" pitchFamily="34" charset="0"/>
-                <a:ea typeface="ＭＳ Ｐゴシック" pitchFamily="34" charset="-128"/>
-              </a:defRPr>
-            </a:lvl3pPr>
-            <a:lvl4pPr marL="1600200" indent="-228600">
-              <a:defRPr sz="2400">
-                <a:solidFill>
-                  <a:schemeClr val="tx1"/>
-                </a:solidFill>
-                <a:latin typeface="Arial" pitchFamily="34" charset="0"/>
-                <a:ea typeface="ＭＳ Ｐゴシック" pitchFamily="34" charset="-128"/>
-              </a:defRPr>
-            </a:lvl4pPr>
-            <a:lvl5pPr marL="2057400" indent="-228600">
-              <a:defRPr sz="2400">
-                <a:solidFill>
-                  <a:schemeClr val="tx1"/>
-                </a:solidFill>
-                <a:latin typeface="Arial" pitchFamily="34" charset="0"/>
-                <a:ea typeface="ＭＳ Ｐゴシック" pitchFamily="34" charset="-128"/>
-              </a:defRPr>
-            </a:lvl5pPr>
-            <a:lvl6pPr marL="2514600" indent="-228600" defTabSz="457200" eaLnBrk="0" fontAlgn="base" hangingPunct="0">
-              <a:spcBef>
-                <a:spcPct val="0"/>
-              </a:spcBef>
-              <a:spcAft>
-                <a:spcPct val="0"/>
-              </a:spcAft>
-              <a:defRPr sz="2400">
-                <a:solidFill>
-                  <a:schemeClr val="tx1"/>
-                </a:solidFill>
-                <a:latin typeface="Arial" pitchFamily="34" charset="0"/>
-                <a:ea typeface="ＭＳ Ｐゴシック" pitchFamily="34" charset="-128"/>
-              </a:defRPr>
-            </a:lvl6pPr>
-            <a:lvl7pPr marL="2971800" indent="-228600" defTabSz="457200" eaLnBrk="0" fontAlgn="base" hangingPunct="0">
-              <a:spcBef>
-                <a:spcPct val="0"/>
-              </a:spcBef>
-              <a:spcAft>
-                <a:spcPct val="0"/>
-              </a:spcAft>
-              <a:defRPr sz="2400">
-                <a:solidFill>
-                  <a:schemeClr val="tx1"/>
-                </a:solidFill>
-                <a:latin typeface="Arial" pitchFamily="34" charset="0"/>
-                <a:ea typeface="ＭＳ Ｐゴシック" pitchFamily="34" charset="-128"/>
-              </a:defRPr>
-            </a:lvl7pPr>
-            <a:lvl8pPr marL="3429000" indent="-228600" defTabSz="457200" eaLnBrk="0" fontAlgn="base" hangingPunct="0">
-              <a:spcBef>
-                <a:spcPct val="0"/>
-              </a:spcBef>
-              <a:spcAft>
-                <a:spcPct val="0"/>
-              </a:spcAft>
-              <a:defRPr sz="2400">
-                <a:solidFill>
-                  <a:schemeClr val="tx1"/>
-                </a:solidFill>
-                <a:latin typeface="Arial" pitchFamily="34" charset="0"/>
-                <a:ea typeface="ＭＳ Ｐゴシック" pitchFamily="34" charset="-128"/>
-              </a:defRPr>
-            </a:lvl8pPr>
-            <a:lvl9pPr marL="3886200" indent="-228600" defTabSz="457200" eaLnBrk="0" fontAlgn="base" hangingPunct="0">
-              <a:spcBef>
-                <a:spcPct val="0"/>
-              </a:spcBef>
-              <a:spcAft>
-                <a:spcPct val="0"/>
-              </a:spcAft>
-              <a:defRPr sz="2400">
-                <a:solidFill>
-                  <a:schemeClr val="tx1"/>
-                </a:solidFill>
-                <a:latin typeface="Arial" pitchFamily="34" charset="0"/>
-                <a:ea typeface="ＭＳ Ｐゴシック" pitchFamily="34" charset="-128"/>
-              </a:defRPr>
-            </a:lvl9pPr>
-          </a:lstStyle>
-          <a:p>
-            <a:fld id="{C58890A0-04D6-4C54-9DDA-8F446812B62B}" type="slidenum">
-              <a:rPr lang="en-US" sz="1200">
-                <a:latin typeface="Calibri" pitchFamily="34" charset="0"/>
-              </a:rPr>
-              <a:pPr/>
-              <a:t>20</a:t>
-            </a:fld>
-            <a:endParaRPr lang="en-US" sz="1200">
-              <a:latin typeface="Calibri" pitchFamily="34" charset="0"/>
-            </a:endParaRPr>
-          </a:p>
-        </p:txBody>
-      </p:sp>
-    </p:spTree>
-    <p:extLst>
-      <p:ext uri="{BB962C8B-B14F-4D97-AF65-F5344CB8AC3E}">
-        <p14:creationId xmlns:p14="http://schemas.microsoft.com/office/powerpoint/2010/main" val="1347942567"/>
+        <p14:creationId xmlns:p14="http://schemas.microsoft.com/office/powerpoint/2010/main" val="3980868774"/>
       </p:ext>
     </p:extLst>
   </p:cSld>
@@ -3523,57 +3034,78 @@
           <a:p>
             <a:r>
               <a:rPr lang="en-US" dirty="0"/>
-              <a:t>An example of a </a:t>
+              <a:t>A </a:t>
             </a:r>
             <a:r>
               <a:rPr lang="en-US" b="1" dirty="0"/>
-              <a:t>convenience sample</a:t>
+              <a:t>probability sample</a:t>
             </a:r>
             <a:r>
               <a:rPr lang="en-US" dirty="0"/>
-              <a:t> would be a professor conducting a survey on study habits by asking students in their own class to participate. Since these students are easily accessible to the professor and willing to participate, they are chosen out of convenience rather than through a random sampling process.</a:t>
+              <a:t> is a sampling technique in which each member of the population has a known, non-zero chance (probability) of being selected. This method ensures that the sample is representative of the population, allowing researchers to make inferences about the population with measurable accuracy. Probability sampling is used to minimize bias and improve the generalizability of the results.</a:t>
             </a:r>
           </a:p>
           <a:p>
             <a:r>
               <a:rPr lang="en-US" dirty="0"/>
-              <a:t>This type of sampling is often easier and less costly but may not be representative of the broader population.</a:t>
-            </a:r>
-          </a:p>
-          <a:p>
-            <a:endParaRPr lang="en-US" dirty="0"/>
-          </a:p>
-          <a:p>
+              <a:t>There are several types of probability sampling:</a:t>
+            </a:r>
+          </a:p>
+          <a:p>
+            <a:pPr>
+              <a:buFont typeface="+mj-lt"/>
+              <a:buAutoNum type="arabicPeriod"/>
+            </a:pPr>
+            <a:r>
+              <a:rPr lang="en-US" b="1" dirty="0"/>
+              <a:t>Simple Random Sampling</a:t>
+            </a:r>
             <a:r>
               <a:rPr lang="en-US" dirty="0"/>
-              <a:t>An example of a </a:t>
-            </a:r>
+              <a:t>: Every individual in the population has an equal chance of being selected.</a:t>
+            </a:r>
+          </a:p>
+          <a:p>
+            <a:pPr>
+              <a:buFont typeface="+mj-lt"/>
+              <a:buAutoNum type="arabicPeriod"/>
+            </a:pPr>
             <a:r>
               <a:rPr lang="en-US" b="1" dirty="0"/>
-              <a:t>voluntary response sample</a:t>
+              <a:t>Systematic Sampling</a:t>
             </a:r>
             <a:r>
               <a:rPr lang="en-US" dirty="0"/>
-              <a:t> would be an online survey posted on a news website asking readers to share their opinions on a political issue. Only those who feel strongly about the topic may choose to respond, making the sample self-selected.</a:t>
-            </a:r>
-          </a:p>
-          <a:p>
+              <a:t>: A random starting point is chosen, and then every nth member of the population is selected.</a:t>
+            </a:r>
+          </a:p>
+          <a:p>
+            <a:pPr>
+              <a:buFont typeface="+mj-lt"/>
+              <a:buAutoNum type="arabicPeriod"/>
+            </a:pPr>
+            <a:r>
+              <a:rPr lang="en-US" b="1" dirty="0"/>
+              <a:t>Stratified Sampling</a:t>
+            </a:r>
             <a:r>
               <a:rPr lang="en-US" dirty="0"/>
-              <a:t>Since participation is entirely voluntary, the results might be biased, as they typically reflect the views of more passionate individuals rather than a random or representative group of the population.</a:t>
-            </a:r>
-          </a:p>
-          <a:p>
-            <a:endParaRPr lang="en-US" dirty="0"/>
-          </a:p>
-          <a:p>
-            <a:endParaRPr lang="en-US" dirty="0"/>
-          </a:p>
-          <a:p>
-            <a:endParaRPr lang="en-US" dirty="0"/>
-          </a:p>
-          <a:p>
-            <a:endParaRPr lang="en-US" dirty="0"/>
+              <a:t>: The population is divided into subgroups (strata) based on specific characteristics, and random samples are taken from each subgroup.</a:t>
+            </a:r>
+          </a:p>
+          <a:p>
+            <a:pPr>
+              <a:buFont typeface="+mj-lt"/>
+              <a:buAutoNum type="arabicPeriod"/>
+            </a:pPr>
+            <a:r>
+              <a:rPr lang="en-US" b="1" dirty="0"/>
+              <a:t>Cluster Sampling</a:t>
+            </a:r>
+            <a:r>
+              <a:rPr lang="en-US" dirty="0"/>
+              <a:t>: The population is divided into clusters (often geographically), and a random selection of clusters is made, followed by sampling within those clusters.</a:t>
+            </a:r>
           </a:p>
         </p:txBody>
       </p:sp>
@@ -3595,7 +3127,7 @@
             <a:fld id="{E6C021B2-4005-4FC1-8451-5FBAFD39D8B2}" type="slidenum">
               <a:rPr lang="en-US" smtClean="0"/>
               <a:pPr/>
-              <a:t>23</a:t>
+              <a:t>26</a:t>
             </a:fld>
             <a:endParaRPr lang="en-US"/>
           </a:p>
@@ -3604,7 +3136,7 @@
     </p:spTree>
     <p:extLst>
       <p:ext uri="{BB962C8B-B14F-4D97-AF65-F5344CB8AC3E}">
-        <p14:creationId xmlns:p14="http://schemas.microsoft.com/office/powerpoint/2010/main" val="3980868774"/>
+        <p14:creationId xmlns:p14="http://schemas.microsoft.com/office/powerpoint/2010/main" val="2821079973"/>
       </p:ext>
     </p:extLst>
   </p:cSld>
@@ -3658,80 +3190,7 @@
           <a:bodyPr/>
           <a:lstStyle/>
           <a:p>
-            <a:r>
-              <a:rPr lang="en-US" dirty="0"/>
-              <a:t>A </a:t>
-            </a:r>
-            <a:r>
-              <a:rPr lang="en-US" b="1" dirty="0"/>
-              <a:t>probability sample</a:t>
-            </a:r>
-            <a:r>
-              <a:rPr lang="en-US" dirty="0"/>
-              <a:t> is a sampling technique in which each member of the population has a known, non-zero chance (probability) of being selected. This method ensures that the sample is representative of the population, allowing researchers to make inferences about the population with measurable accuracy. Probability sampling is used to minimize bias and improve the generalizability of the results.</a:t>
-            </a:r>
-          </a:p>
-          <a:p>
-            <a:r>
-              <a:rPr lang="en-US" dirty="0"/>
-              <a:t>There are several types of probability sampling:</a:t>
-            </a:r>
-          </a:p>
-          <a:p>
-            <a:pPr>
-              <a:buFont typeface="+mj-lt"/>
-              <a:buAutoNum type="arabicPeriod"/>
-            </a:pPr>
-            <a:r>
-              <a:rPr lang="en-US" b="1" dirty="0"/>
-              <a:t>Simple Random Sampling</a:t>
-            </a:r>
-            <a:r>
-              <a:rPr lang="en-US" dirty="0"/>
-              <a:t>: Every individual in the population has an equal chance of being selected.</a:t>
-            </a:r>
-          </a:p>
-          <a:p>
-            <a:pPr>
-              <a:buFont typeface="+mj-lt"/>
-              <a:buAutoNum type="arabicPeriod"/>
-            </a:pPr>
-            <a:r>
-              <a:rPr lang="en-US" b="1" dirty="0"/>
-              <a:t>Systematic Sampling</a:t>
-            </a:r>
-            <a:r>
-              <a:rPr lang="en-US" dirty="0"/>
-              <a:t>: A random starting point is chosen, and then every nth member of the population is selected.</a:t>
-            </a:r>
-          </a:p>
-          <a:p>
-            <a:pPr>
-              <a:buFont typeface="+mj-lt"/>
-              <a:buAutoNum type="arabicPeriod"/>
-            </a:pPr>
-            <a:r>
-              <a:rPr lang="en-US" b="1" dirty="0"/>
-              <a:t>Stratified Sampling</a:t>
-            </a:r>
-            <a:r>
-              <a:rPr lang="en-US" dirty="0"/>
-              <a:t>: The population is divided into subgroups (strata) based on specific characteristics, and random samples are taken from each subgroup.</a:t>
-            </a:r>
-          </a:p>
-          <a:p>
-            <a:pPr>
-              <a:buFont typeface="+mj-lt"/>
-              <a:buAutoNum type="arabicPeriod"/>
-            </a:pPr>
-            <a:r>
-              <a:rPr lang="en-US" b="1" dirty="0"/>
-              <a:t>Cluster Sampling</a:t>
-            </a:r>
-            <a:r>
-              <a:rPr lang="en-US" dirty="0"/>
-              <a:t>: The population is divided into clusters (often geographically), and a random selection of clusters is made, followed by sampling within those clusters.</a:t>
-            </a:r>
+            <a:endParaRPr lang="en-US" dirty="0"/>
           </a:p>
         </p:txBody>
       </p:sp>
@@ -3742,7 +3201,7 @@
             <a:spLocks noGrp="1"/>
           </p:cNvSpPr>
           <p:nvPr>
-            <p:ph type="sldNum" sz="quarter" idx="5"/>
+            <p:ph type="sldNum" sz="quarter" idx="10"/>
           </p:nvPr>
         </p:nvSpPr>
         <p:spPr/>
@@ -3762,7 +3221,7 @@
     </p:spTree>
     <p:extLst>
       <p:ext uri="{BB962C8B-B14F-4D97-AF65-F5344CB8AC3E}">
-        <p14:creationId xmlns:p14="http://schemas.microsoft.com/office/powerpoint/2010/main" val="2821079973"/>
+        <p14:creationId xmlns:p14="http://schemas.microsoft.com/office/powerpoint/2010/main" val="2132925261"/>
       </p:ext>
     </p:extLst>
   </p:cSld>
@@ -11200,7 +10659,7 @@
         </p:nvSpPr>
         <p:spPr bwMode="auto">
           <a:xfrm>
-            <a:off x="542925" y="1233374"/>
+            <a:off x="542925" y="1028274"/>
             <a:ext cx="8058150" cy="1631950"/>
           </a:xfrm>
           <a:prstGeom prst="rect">
@@ -11258,8 +10717,8 @@
         </p:nvSpPr>
         <p:spPr bwMode="auto">
           <a:xfrm>
-            <a:off x="542925" y="2940050"/>
-            <a:ext cx="8058150" cy="3416300"/>
+            <a:off x="542925" y="2717857"/>
+            <a:ext cx="8058150" cy="3970318"/>
           </a:xfrm>
           <a:prstGeom prst="rect">
             <a:avLst/>
@@ -11301,7 +10760,7 @@
                 <a:ea typeface="ＭＳ Ｐゴシック" charset="0"/>
                 <a:cs typeface="Arial" charset="0"/>
               </a:rPr>
-              <a:t>Example: A study designed to reduce test anxiety had students write an essay about their feelings concerning an upcoming exam.</a:t>
+              <a:t>Example: Researchers asked students to spend a short period writing openly about their worries, thoughts, and feelings about an upcoming exam, with the idea that expressing those worries might reduce test anxiety and improve performance.</a:t>
             </a:r>
           </a:p>
           <a:p>
@@ -11376,7 +10835,7 @@
                 <a:ea typeface="ＭＳ Ｐゴシック" charset="0"/>
                 <a:cs typeface="Arial" charset="0"/>
               </a:rPr>
-              <a:t> Observe exam scores</a:t>
+              <a:t> Observe the next exam scores</a:t>
             </a:r>
           </a:p>
           <a:p>
@@ -11405,7 +10864,7 @@
                 <a:ea typeface="ＭＳ Ｐゴシック" charset="0"/>
                 <a:cs typeface="Arial" charset="0"/>
               </a:rPr>
-              <a:t>The scores on this exam (the second exam of the semester) were compared with those on the first exam. The mean score on the second exam was </a:t>
+              <a:t>The scores on the next exam (the second exam of the semester) were compared with those on the first exam. The mean score on the second exam was </a:t>
             </a:r>
             <a:r>
               <a:rPr lang="en-US" i="1" dirty="0">
@@ -13937,6 +13396,1409 @@
       </p:grpSpPr>
       <p:sp>
         <p:nvSpPr>
+          <p:cNvPr id="46082" name="Rectangle 2"/>
+          <p:cNvSpPr>
+            <a:spLocks noGrp="1" noChangeArrowheads="1"/>
+          </p:cNvSpPr>
+          <p:nvPr>
+            <p:ph type="title"/>
+          </p:nvPr>
+        </p:nvSpPr>
+        <p:spPr/>
+        <p:txBody>
+          <a:bodyPr/>
+          <a:lstStyle/>
+          <a:p>
+            <a:pPr eaLnBrk="1" hangingPunct="1"/>
+            <a:r>
+              <a:rPr lang="en-US" dirty="0">
+                <a:ea typeface="ＭＳ Ｐゴシック" pitchFamily="34" charset="-128"/>
+              </a:rPr>
+              <a:t>Block Designs</a:t>
+            </a:r>
+          </a:p>
+        </p:txBody>
+      </p:sp>
+      <p:sp>
+        <p:nvSpPr>
+          <p:cNvPr id="46081" name="Slide Number Placeholder 5"/>
+          <p:cNvSpPr>
+            <a:spLocks noGrp="1"/>
+          </p:cNvSpPr>
+          <p:nvPr>
+            <p:ph type="sldNum" sz="quarter" idx="12"/>
+          </p:nvPr>
+        </p:nvSpPr>
+        <p:spPr bwMode="auto">
+          <a:noFill/>
+          <a:extLst>
+            <a:ext uri="{909E8E84-426E-40DD-AFC4-6F175D3DCCD1}">
+              <a14:hiddenFill xmlns:a14="http://schemas.microsoft.com/office/drawing/2010/main">
+                <a:solidFill>
+                  <a:srgbClr val="FFFFFF"/>
+                </a:solidFill>
+              </a14:hiddenFill>
+            </a:ext>
+            <a:ext uri="{91240B29-F687-4F45-9708-019B960494DF}">
+              <a14:hiddenLine xmlns:a14="http://schemas.microsoft.com/office/drawing/2010/main" w="9525">
+                <a:solidFill>
+                  <a:srgbClr val="000000"/>
+                </a:solidFill>
+                <a:miter lim="800000"/>
+                <a:headEnd/>
+                <a:tailEnd/>
+              </a14:hiddenLine>
+            </a:ext>
+          </a:extLst>
+        </p:spPr>
+        <p:txBody>
+          <a:bodyPr/>
+          <a:lstStyle>
+            <a:lvl1pPr>
+              <a:defRPr sz="2400">
+                <a:solidFill>
+                  <a:schemeClr val="tx1"/>
+                </a:solidFill>
+                <a:latin typeface="Arial" pitchFamily="34" charset="0"/>
+                <a:ea typeface="ＭＳ Ｐゴシック" pitchFamily="34" charset="-128"/>
+              </a:defRPr>
+            </a:lvl1pPr>
+            <a:lvl2pPr marL="742950" indent="-285750">
+              <a:defRPr sz="2400">
+                <a:solidFill>
+                  <a:schemeClr val="tx1"/>
+                </a:solidFill>
+                <a:latin typeface="Arial" pitchFamily="34" charset="0"/>
+                <a:ea typeface="ＭＳ Ｐゴシック" pitchFamily="34" charset="-128"/>
+              </a:defRPr>
+            </a:lvl2pPr>
+            <a:lvl3pPr marL="1143000" indent="-228600">
+              <a:defRPr sz="2400">
+                <a:solidFill>
+                  <a:schemeClr val="tx1"/>
+                </a:solidFill>
+                <a:latin typeface="Arial" pitchFamily="34" charset="0"/>
+                <a:ea typeface="ＭＳ Ｐゴシック" pitchFamily="34" charset="-128"/>
+              </a:defRPr>
+            </a:lvl3pPr>
+            <a:lvl4pPr marL="1600200" indent="-228600">
+              <a:defRPr sz="2400">
+                <a:solidFill>
+                  <a:schemeClr val="tx1"/>
+                </a:solidFill>
+                <a:latin typeface="Arial" pitchFamily="34" charset="0"/>
+                <a:ea typeface="ＭＳ Ｐゴシック" pitchFamily="34" charset="-128"/>
+              </a:defRPr>
+            </a:lvl4pPr>
+            <a:lvl5pPr marL="2057400" indent="-228600">
+              <a:defRPr sz="2400">
+                <a:solidFill>
+                  <a:schemeClr val="tx1"/>
+                </a:solidFill>
+                <a:latin typeface="Arial" pitchFamily="34" charset="0"/>
+                <a:ea typeface="ＭＳ Ｐゴシック" pitchFamily="34" charset="-128"/>
+              </a:defRPr>
+            </a:lvl5pPr>
+            <a:lvl6pPr marL="2514600" indent="-228600" defTabSz="457200" eaLnBrk="0" fontAlgn="base" hangingPunct="0">
+              <a:spcBef>
+                <a:spcPct val="0"/>
+              </a:spcBef>
+              <a:spcAft>
+                <a:spcPct val="0"/>
+              </a:spcAft>
+              <a:defRPr sz="2400">
+                <a:solidFill>
+                  <a:schemeClr val="tx1"/>
+                </a:solidFill>
+                <a:latin typeface="Arial" pitchFamily="34" charset="0"/>
+                <a:ea typeface="ＭＳ Ｐゴシック" pitchFamily="34" charset="-128"/>
+              </a:defRPr>
+            </a:lvl6pPr>
+            <a:lvl7pPr marL="2971800" indent="-228600" defTabSz="457200" eaLnBrk="0" fontAlgn="base" hangingPunct="0">
+              <a:spcBef>
+                <a:spcPct val="0"/>
+              </a:spcBef>
+              <a:spcAft>
+                <a:spcPct val="0"/>
+              </a:spcAft>
+              <a:defRPr sz="2400">
+                <a:solidFill>
+                  <a:schemeClr val="tx1"/>
+                </a:solidFill>
+                <a:latin typeface="Arial" pitchFamily="34" charset="0"/>
+                <a:ea typeface="ＭＳ Ｐゴシック" pitchFamily="34" charset="-128"/>
+              </a:defRPr>
+            </a:lvl7pPr>
+            <a:lvl8pPr marL="3429000" indent="-228600" defTabSz="457200" eaLnBrk="0" fontAlgn="base" hangingPunct="0">
+              <a:spcBef>
+                <a:spcPct val="0"/>
+              </a:spcBef>
+              <a:spcAft>
+                <a:spcPct val="0"/>
+              </a:spcAft>
+              <a:defRPr sz="2400">
+                <a:solidFill>
+                  <a:schemeClr val="tx1"/>
+                </a:solidFill>
+                <a:latin typeface="Arial" pitchFamily="34" charset="0"/>
+                <a:ea typeface="ＭＳ Ｐゴシック" pitchFamily="34" charset="-128"/>
+              </a:defRPr>
+            </a:lvl8pPr>
+            <a:lvl9pPr marL="3886200" indent="-228600" defTabSz="457200" eaLnBrk="0" fontAlgn="base" hangingPunct="0">
+              <a:spcBef>
+                <a:spcPct val="0"/>
+              </a:spcBef>
+              <a:spcAft>
+                <a:spcPct val="0"/>
+              </a:spcAft>
+              <a:defRPr sz="2400">
+                <a:solidFill>
+                  <a:schemeClr val="tx1"/>
+                </a:solidFill>
+                <a:latin typeface="Arial" pitchFamily="34" charset="0"/>
+                <a:ea typeface="ＭＳ Ｐゴシック" pitchFamily="34" charset="-128"/>
+              </a:defRPr>
+            </a:lvl9pPr>
+          </a:lstStyle>
+          <a:p>
+            <a:pPr>
+              <a:lnSpc>
+                <a:spcPct val="80000"/>
+              </a:lnSpc>
+            </a:pPr>
+            <a:fld id="{3441456D-DFB5-49DB-A121-9AFDE4CCCA00}" type="slidenum">
+              <a:rPr lang="en-US" sz="1200">
+                <a:solidFill>
+                  <a:schemeClr val="accent1"/>
+                </a:solidFill>
+              </a:rPr>
+              <a:pPr>
+                <a:lnSpc>
+                  <a:spcPct val="80000"/>
+                </a:lnSpc>
+              </a:pPr>
+              <a:t>15</a:t>
+            </a:fld>
+            <a:endParaRPr lang="en-US" sz="1200" dirty="0">
+              <a:solidFill>
+                <a:schemeClr val="accent1"/>
+              </a:solidFill>
+            </a:endParaRPr>
+          </a:p>
+        </p:txBody>
+      </p:sp>
+      <p:sp>
+        <p:nvSpPr>
+          <p:cNvPr id="10" name="TextBox 9"/>
+          <p:cNvSpPr txBox="1">
+            <a:spLocks noChangeArrowheads="1"/>
+          </p:cNvSpPr>
+          <p:nvPr/>
+        </p:nvSpPr>
+        <p:spPr bwMode="auto">
+          <a:xfrm>
+            <a:off x="540298" y="1468157"/>
+            <a:ext cx="7947025" cy="1785104"/>
+          </a:xfrm>
+          <a:prstGeom prst="rect">
+            <a:avLst/>
+          </a:prstGeom>
+          <a:solidFill>
+            <a:srgbClr val="EAEDCB"/>
+          </a:solidFill>
+          <a:ln w="10000">
+            <a:solidFill>
+              <a:srgbClr val="D2DA7A"/>
+            </a:solidFill>
+            <a:miter lim="800000"/>
+            <a:headEnd/>
+            <a:tailEnd/>
+          </a:ln>
+          <a:effectLst>
+            <a:outerShdw blurRad="38100" dist="30000" dir="5400000" rotWithShape="0">
+              <a:srgbClr val="808080">
+                <a:alpha val="45000"/>
+              </a:srgbClr>
+            </a:outerShdw>
+          </a:effectLst>
+        </p:spPr>
+        <p:txBody>
+          <a:bodyPr>
+            <a:spAutoFit/>
+          </a:bodyPr>
+          <a:lstStyle>
+            <a:lvl1pPr eaLnBrk="0" hangingPunct="0">
+              <a:defRPr sz="2400">
+                <a:solidFill>
+                  <a:schemeClr val="tx1"/>
+                </a:solidFill>
+                <a:latin typeface="Arial" charset="0"/>
+                <a:ea typeface="ＭＳ Ｐゴシック" pitchFamily="-65" charset="-128"/>
+              </a:defRPr>
+            </a:lvl1pPr>
+            <a:lvl2pPr marL="37931725" indent="-37474525" eaLnBrk="0" hangingPunct="0">
+              <a:defRPr sz="2400">
+                <a:solidFill>
+                  <a:schemeClr val="tx1"/>
+                </a:solidFill>
+                <a:latin typeface="Arial" charset="0"/>
+                <a:ea typeface="ＭＳ Ｐゴシック" pitchFamily="-65" charset="-128"/>
+              </a:defRPr>
+            </a:lvl2pPr>
+            <a:lvl3pPr eaLnBrk="0" hangingPunct="0">
+              <a:defRPr sz="2400">
+                <a:solidFill>
+                  <a:schemeClr val="tx1"/>
+                </a:solidFill>
+                <a:latin typeface="Arial" charset="0"/>
+                <a:ea typeface="ＭＳ Ｐゴシック" pitchFamily="-65" charset="-128"/>
+              </a:defRPr>
+            </a:lvl3pPr>
+            <a:lvl4pPr eaLnBrk="0" hangingPunct="0">
+              <a:defRPr sz="2400">
+                <a:solidFill>
+                  <a:schemeClr val="tx1"/>
+                </a:solidFill>
+                <a:latin typeface="Arial" charset="0"/>
+                <a:ea typeface="ＭＳ Ｐゴシック" pitchFamily="-65" charset="-128"/>
+              </a:defRPr>
+            </a:lvl4pPr>
+            <a:lvl5pPr eaLnBrk="0" hangingPunct="0">
+              <a:defRPr sz="2400">
+                <a:solidFill>
+                  <a:schemeClr val="tx1"/>
+                </a:solidFill>
+                <a:latin typeface="Arial" charset="0"/>
+                <a:ea typeface="ＭＳ Ｐゴシック" pitchFamily="-65" charset="-128"/>
+              </a:defRPr>
+            </a:lvl5pPr>
+            <a:lvl6pPr marL="457200" eaLnBrk="0" fontAlgn="base" hangingPunct="0">
+              <a:spcBef>
+                <a:spcPct val="0"/>
+              </a:spcBef>
+              <a:spcAft>
+                <a:spcPct val="0"/>
+              </a:spcAft>
+              <a:defRPr sz="2400">
+                <a:solidFill>
+                  <a:schemeClr val="tx1"/>
+                </a:solidFill>
+                <a:latin typeface="Arial" charset="0"/>
+                <a:ea typeface="ＭＳ Ｐゴシック" pitchFamily="-65" charset="-128"/>
+              </a:defRPr>
+            </a:lvl6pPr>
+            <a:lvl7pPr marL="914400" eaLnBrk="0" fontAlgn="base" hangingPunct="0">
+              <a:spcBef>
+                <a:spcPct val="0"/>
+              </a:spcBef>
+              <a:spcAft>
+                <a:spcPct val="0"/>
+              </a:spcAft>
+              <a:defRPr sz="2400">
+                <a:solidFill>
+                  <a:schemeClr val="tx1"/>
+                </a:solidFill>
+                <a:latin typeface="Arial" charset="0"/>
+                <a:ea typeface="ＭＳ Ｐゴシック" pitchFamily="-65" charset="-128"/>
+              </a:defRPr>
+            </a:lvl7pPr>
+            <a:lvl8pPr marL="1371600" eaLnBrk="0" fontAlgn="base" hangingPunct="0">
+              <a:spcBef>
+                <a:spcPct val="0"/>
+              </a:spcBef>
+              <a:spcAft>
+                <a:spcPct val="0"/>
+              </a:spcAft>
+              <a:defRPr sz="2400">
+                <a:solidFill>
+                  <a:schemeClr val="tx1"/>
+                </a:solidFill>
+                <a:latin typeface="Arial" charset="0"/>
+                <a:ea typeface="ＭＳ Ｐゴシック" pitchFamily="-65" charset="-128"/>
+              </a:defRPr>
+            </a:lvl8pPr>
+            <a:lvl9pPr marL="1828800" eaLnBrk="0" fontAlgn="base" hangingPunct="0">
+              <a:spcBef>
+                <a:spcPct val="0"/>
+              </a:spcBef>
+              <a:spcAft>
+                <a:spcPct val="0"/>
+              </a:spcAft>
+              <a:defRPr sz="2400">
+                <a:solidFill>
+                  <a:schemeClr val="tx1"/>
+                </a:solidFill>
+                <a:latin typeface="Arial" charset="0"/>
+                <a:ea typeface="ＭＳ Ｐゴシック" pitchFamily="-65" charset="-128"/>
+              </a:defRPr>
+            </a:lvl9pPr>
+          </a:lstStyle>
+          <a:p>
+            <a:pPr eaLnBrk="1" hangingPunct="1">
+              <a:spcAft>
+                <a:spcPts val="1200"/>
+              </a:spcAft>
+              <a:defRPr/>
+            </a:pPr>
+            <a:r>
+              <a:rPr lang="en-US" altLang="en-US" sz="2000" dirty="0">
+                <a:solidFill>
+                  <a:srgbClr val="000000"/>
+                </a:solidFill>
+              </a:rPr>
+              <a:t>A </a:t>
+            </a:r>
+            <a:r>
+              <a:rPr lang="en-US" altLang="en-US" sz="2000" b="1" dirty="0">
+                <a:solidFill>
+                  <a:srgbClr val="800000"/>
+                </a:solidFill>
+              </a:rPr>
+              <a:t>block</a:t>
+            </a:r>
+            <a:r>
+              <a:rPr lang="en-US" altLang="en-US" sz="2000" b="1" dirty="0">
+                <a:solidFill>
+                  <a:srgbClr val="000000"/>
+                </a:solidFill>
+              </a:rPr>
+              <a:t> </a:t>
+            </a:r>
+            <a:r>
+              <a:rPr lang="en-US" altLang="en-US" sz="2000" dirty="0">
+                <a:solidFill>
+                  <a:srgbClr val="000000"/>
+                </a:solidFill>
+              </a:rPr>
+              <a:t>is a group of experimental units that are known before the experiment to be similar in some way that is expected to affect the response to the treatments. </a:t>
+            </a:r>
+          </a:p>
+          <a:p>
+            <a:pPr eaLnBrk="1" hangingPunct="1">
+              <a:spcAft>
+                <a:spcPts val="1200"/>
+              </a:spcAft>
+              <a:defRPr/>
+            </a:pPr>
+            <a:r>
+              <a:rPr lang="en-US" altLang="en-US" sz="2000" dirty="0">
+                <a:solidFill>
+                  <a:srgbClr val="000000"/>
+                </a:solidFill>
+              </a:rPr>
+              <a:t>In a </a:t>
+            </a:r>
+            <a:r>
+              <a:rPr lang="en-US" altLang="en-US" sz="2000" b="1" dirty="0">
+                <a:solidFill>
+                  <a:srgbClr val="800000"/>
+                </a:solidFill>
+              </a:rPr>
+              <a:t>block design</a:t>
+            </a:r>
+            <a:r>
+              <a:rPr lang="en-US" altLang="en-US" sz="2000" dirty="0">
+                <a:solidFill>
+                  <a:srgbClr val="000000"/>
+                </a:solidFill>
+              </a:rPr>
+              <a:t>, the random assignment of experimental units to treatments is carried out separately within each block.</a:t>
+            </a:r>
+          </a:p>
+        </p:txBody>
+      </p:sp>
+      <p:sp>
+        <p:nvSpPr>
+          <p:cNvPr id="3" name="TextBox 2">
+            <a:extLst>
+              <a:ext uri="{FF2B5EF4-FFF2-40B4-BE49-F238E27FC236}">
+                <a16:creationId xmlns:a16="http://schemas.microsoft.com/office/drawing/2014/main" id="{CD2B8BE2-B24B-8CCA-2A92-723074F17292}"/>
+              </a:ext>
+            </a:extLst>
+          </p:cNvPr>
+          <p:cNvSpPr txBox="1"/>
+          <p:nvPr/>
+        </p:nvSpPr>
+        <p:spPr>
+          <a:xfrm>
+            <a:off x="1418601" y="3606105"/>
+            <a:ext cx="5535538" cy="646331"/>
+          </a:xfrm>
+          <a:prstGeom prst="rect">
+            <a:avLst/>
+          </a:prstGeom>
+          <a:noFill/>
+        </p:spPr>
+        <p:txBody>
+          <a:bodyPr wrap="square">
+            <a:spAutoFit/>
+          </a:bodyPr>
+          <a:lstStyle/>
+          <a:p>
+            <a:r>
+              <a:rPr lang="en-US" dirty="0"/>
+              <a:t>“Block what you can; randomize what you cannot.”</a:t>
+            </a:r>
+          </a:p>
+          <a:p>
+            <a:pPr algn="r"/>
+            <a:r>
+              <a:rPr lang="en-US" dirty="0"/>
+              <a:t>— Box, Hunter, and Hunter (1978)</a:t>
+            </a:r>
+          </a:p>
+        </p:txBody>
+      </p:sp>
+      <p:sp>
+        <p:nvSpPr>
+          <p:cNvPr id="4" name="TextBox 3">
+            <a:extLst>
+              <a:ext uri="{FF2B5EF4-FFF2-40B4-BE49-F238E27FC236}">
+                <a16:creationId xmlns:a16="http://schemas.microsoft.com/office/drawing/2014/main" id="{0DF6336C-BAB6-FABE-06D2-E9BD5BC003B0}"/>
+              </a:ext>
+            </a:extLst>
+          </p:cNvPr>
+          <p:cNvSpPr txBox="1">
+            <a:spLocks noChangeArrowheads="1"/>
+          </p:cNvSpPr>
+          <p:nvPr/>
+        </p:nvSpPr>
+        <p:spPr bwMode="auto">
+          <a:xfrm>
+            <a:off x="540297" y="4497291"/>
+            <a:ext cx="7947025" cy="1015663"/>
+          </a:xfrm>
+          <a:prstGeom prst="rect">
+            <a:avLst/>
+          </a:prstGeom>
+          <a:solidFill>
+            <a:srgbClr val="EAEDCB"/>
+          </a:solidFill>
+          <a:ln w="10000">
+            <a:solidFill>
+              <a:srgbClr val="D2DA7A"/>
+            </a:solidFill>
+            <a:miter lim="800000"/>
+            <a:headEnd/>
+            <a:tailEnd/>
+          </a:ln>
+          <a:effectLst>
+            <a:outerShdw blurRad="38100" dist="30000" dir="5400000" rotWithShape="0">
+              <a:srgbClr val="808080">
+                <a:alpha val="45000"/>
+              </a:srgbClr>
+            </a:outerShdw>
+          </a:effectLst>
+        </p:spPr>
+        <p:txBody>
+          <a:bodyPr>
+            <a:spAutoFit/>
+          </a:bodyPr>
+          <a:lstStyle>
+            <a:lvl1pPr eaLnBrk="0" hangingPunct="0">
+              <a:defRPr sz="2400">
+                <a:solidFill>
+                  <a:schemeClr val="tx1"/>
+                </a:solidFill>
+                <a:latin typeface="Arial" charset="0"/>
+                <a:ea typeface="ＭＳ Ｐゴシック" pitchFamily="-65" charset="-128"/>
+              </a:defRPr>
+            </a:lvl1pPr>
+            <a:lvl2pPr marL="37931725" indent="-37474525" eaLnBrk="0" hangingPunct="0">
+              <a:defRPr sz="2400">
+                <a:solidFill>
+                  <a:schemeClr val="tx1"/>
+                </a:solidFill>
+                <a:latin typeface="Arial" charset="0"/>
+                <a:ea typeface="ＭＳ Ｐゴシック" pitchFamily="-65" charset="-128"/>
+              </a:defRPr>
+            </a:lvl2pPr>
+            <a:lvl3pPr eaLnBrk="0" hangingPunct="0">
+              <a:defRPr sz="2400">
+                <a:solidFill>
+                  <a:schemeClr val="tx1"/>
+                </a:solidFill>
+                <a:latin typeface="Arial" charset="0"/>
+                <a:ea typeface="ＭＳ Ｐゴシック" pitchFamily="-65" charset="-128"/>
+              </a:defRPr>
+            </a:lvl3pPr>
+            <a:lvl4pPr eaLnBrk="0" hangingPunct="0">
+              <a:defRPr sz="2400">
+                <a:solidFill>
+                  <a:schemeClr val="tx1"/>
+                </a:solidFill>
+                <a:latin typeface="Arial" charset="0"/>
+                <a:ea typeface="ＭＳ Ｐゴシック" pitchFamily="-65" charset="-128"/>
+              </a:defRPr>
+            </a:lvl4pPr>
+            <a:lvl5pPr eaLnBrk="0" hangingPunct="0">
+              <a:defRPr sz="2400">
+                <a:solidFill>
+                  <a:schemeClr val="tx1"/>
+                </a:solidFill>
+                <a:latin typeface="Arial" charset="0"/>
+                <a:ea typeface="ＭＳ Ｐゴシック" pitchFamily="-65" charset="-128"/>
+              </a:defRPr>
+            </a:lvl5pPr>
+            <a:lvl6pPr marL="457200" eaLnBrk="0" fontAlgn="base" hangingPunct="0">
+              <a:spcBef>
+                <a:spcPct val="0"/>
+              </a:spcBef>
+              <a:spcAft>
+                <a:spcPct val="0"/>
+              </a:spcAft>
+              <a:defRPr sz="2400">
+                <a:solidFill>
+                  <a:schemeClr val="tx1"/>
+                </a:solidFill>
+                <a:latin typeface="Arial" charset="0"/>
+                <a:ea typeface="ＭＳ Ｐゴシック" pitchFamily="-65" charset="-128"/>
+              </a:defRPr>
+            </a:lvl6pPr>
+            <a:lvl7pPr marL="914400" eaLnBrk="0" fontAlgn="base" hangingPunct="0">
+              <a:spcBef>
+                <a:spcPct val="0"/>
+              </a:spcBef>
+              <a:spcAft>
+                <a:spcPct val="0"/>
+              </a:spcAft>
+              <a:defRPr sz="2400">
+                <a:solidFill>
+                  <a:schemeClr val="tx1"/>
+                </a:solidFill>
+                <a:latin typeface="Arial" charset="0"/>
+                <a:ea typeface="ＭＳ Ｐゴシック" pitchFamily="-65" charset="-128"/>
+              </a:defRPr>
+            </a:lvl7pPr>
+            <a:lvl8pPr marL="1371600" eaLnBrk="0" fontAlgn="base" hangingPunct="0">
+              <a:spcBef>
+                <a:spcPct val="0"/>
+              </a:spcBef>
+              <a:spcAft>
+                <a:spcPct val="0"/>
+              </a:spcAft>
+              <a:defRPr sz="2400">
+                <a:solidFill>
+                  <a:schemeClr val="tx1"/>
+                </a:solidFill>
+                <a:latin typeface="Arial" charset="0"/>
+                <a:ea typeface="ＭＳ Ｐゴシック" pitchFamily="-65" charset="-128"/>
+              </a:defRPr>
+            </a:lvl8pPr>
+            <a:lvl9pPr marL="1828800" eaLnBrk="0" fontAlgn="base" hangingPunct="0">
+              <a:spcBef>
+                <a:spcPct val="0"/>
+              </a:spcBef>
+              <a:spcAft>
+                <a:spcPct val="0"/>
+              </a:spcAft>
+              <a:defRPr sz="2400">
+                <a:solidFill>
+                  <a:schemeClr val="tx1"/>
+                </a:solidFill>
+                <a:latin typeface="Arial" charset="0"/>
+                <a:ea typeface="ＭＳ Ｐゴシック" pitchFamily="-65" charset="-128"/>
+              </a:defRPr>
+            </a:lvl9pPr>
+          </a:lstStyle>
+          <a:p>
+            <a:pPr eaLnBrk="1" hangingPunct="1">
+              <a:spcAft>
+                <a:spcPts val="1200"/>
+              </a:spcAft>
+              <a:defRPr/>
+            </a:pPr>
+            <a:r>
+              <a:rPr lang="en-US" altLang="en-US" sz="2000" dirty="0">
+                <a:solidFill>
+                  <a:srgbClr val="000000"/>
+                </a:solidFill>
+              </a:rPr>
+              <a:t>Use blocking for important known sources of variation, then use randomization to protect against remaining uncontrolled/unknown sources.</a:t>
+            </a:r>
+          </a:p>
+        </p:txBody>
+      </p:sp>
+    </p:spTree>
+  </p:cSld>
+  <p:clrMapOvr>
+    <a:masterClrMapping/>
+  </p:clrMapOvr>
+  <p:transition spd="med">
+    <p:fade/>
+  </p:transition>
+  <p:timing>
+    <p:tnLst>
+      <p:par>
+        <p:cTn id="1" dur="indefinite" restart="never" nodeType="tmRoot">
+          <p:childTnLst>
+            <p:seq concurrent="1" nextAc="seek">
+              <p:cTn id="2" dur="indefinite" nodeType="mainSeq">
+                <p:childTnLst>
+                  <p:par>
+                    <p:cTn id="3" fill="hold" nodeType="clickPar">
+                      <p:stCondLst>
+                        <p:cond delay="indefinite"/>
+                      </p:stCondLst>
+                      <p:childTnLst>
+                        <p:par>
+                          <p:cTn id="4" fill="hold" nodeType="withGroup">
+                            <p:stCondLst>
+                              <p:cond delay="0"/>
+                            </p:stCondLst>
+                            <p:childTnLst>
+                              <p:par>
+                                <p:cTn id="5" presetID="10" presetClass="entr" presetSubtype="0" fill="hold" grpId="0" nodeType="clickEffect">
+                                  <p:stCondLst>
+                                    <p:cond delay="0"/>
+                                  </p:stCondLst>
+                                  <p:childTnLst>
+                                    <p:set>
+                                      <p:cBhvr>
+                                        <p:cTn id="6" dur="1" fill="hold">
+                                          <p:stCondLst>
+                                            <p:cond delay="0"/>
+                                          </p:stCondLst>
+                                        </p:cTn>
+                                        <p:tgtEl>
+                                          <p:spTgt spid="10"/>
+                                        </p:tgtEl>
+                                        <p:attrNameLst>
+                                          <p:attrName>style.visibility</p:attrName>
+                                        </p:attrNameLst>
+                                      </p:cBhvr>
+                                      <p:to>
+                                        <p:strVal val="visible"/>
+                                      </p:to>
+                                    </p:set>
+                                    <p:animEffect transition="in" filter="fade">
+                                      <p:cBhvr>
+                                        <p:cTn id="7" dur="1000"/>
+                                        <p:tgtEl>
+                                          <p:spTgt spid="10"/>
+                                        </p:tgtEl>
+                                      </p:cBhvr>
+                                    </p:animEffect>
+                                  </p:childTnLst>
+                                </p:cTn>
+                              </p:par>
+                            </p:childTnLst>
+                          </p:cTn>
+                        </p:par>
+                      </p:childTnLst>
+                    </p:cTn>
+                  </p:par>
+                  <p:par>
+                    <p:cTn id="8" fill="hold">
+                      <p:stCondLst>
+                        <p:cond delay="indefinite"/>
+                      </p:stCondLst>
+                      <p:childTnLst>
+                        <p:par>
+                          <p:cTn id="9" fill="hold">
+                            <p:stCondLst>
+                              <p:cond delay="0"/>
+                            </p:stCondLst>
+                            <p:childTnLst>
+                              <p:par>
+                                <p:cTn id="10" presetID="10" presetClass="entr" presetSubtype="0" fill="hold" grpId="0" nodeType="clickEffect">
+                                  <p:stCondLst>
+                                    <p:cond delay="0"/>
+                                  </p:stCondLst>
+                                  <p:childTnLst>
+                                    <p:set>
+                                      <p:cBhvr>
+                                        <p:cTn id="11" dur="1" fill="hold">
+                                          <p:stCondLst>
+                                            <p:cond delay="0"/>
+                                          </p:stCondLst>
+                                        </p:cTn>
+                                        <p:tgtEl>
+                                          <p:spTgt spid="4"/>
+                                        </p:tgtEl>
+                                        <p:attrNameLst>
+                                          <p:attrName>style.visibility</p:attrName>
+                                        </p:attrNameLst>
+                                      </p:cBhvr>
+                                      <p:to>
+                                        <p:strVal val="visible"/>
+                                      </p:to>
+                                    </p:set>
+                                    <p:animEffect transition="in" filter="fade">
+                                      <p:cBhvr>
+                                        <p:cTn id="12" dur="1000"/>
+                                        <p:tgtEl>
+                                          <p:spTgt spid="4"/>
+                                        </p:tgtEl>
+                                      </p:cBhvr>
+                                    </p:animEffect>
+                                  </p:childTnLst>
+                                </p:cTn>
+                              </p:par>
+                            </p:childTnLst>
+                          </p:cTn>
+                        </p:par>
+                      </p:childTnLst>
+                    </p:cTn>
+                  </p:par>
+                </p:childTnLst>
+              </p:cTn>
+              <p:prevCondLst>
+                <p:cond evt="onPrev" delay="0">
+                  <p:tgtEl>
+                    <p:sldTgt/>
+                  </p:tgtEl>
+                </p:cond>
+              </p:prevCondLst>
+              <p:nextCondLst>
+                <p:cond evt="onNext" delay="0">
+                  <p:tgtEl>
+                    <p:sldTgt/>
+                  </p:tgtEl>
+                </p:cond>
+              </p:nextCondLst>
+            </p:seq>
+          </p:childTnLst>
+        </p:cTn>
+      </p:par>
+    </p:tnLst>
+    <p:bldLst>
+      <p:bldP spid="10" grpId="0" animBg="1"/>
+      <p:bldP spid="4" grpId="0" animBg="1"/>
+    </p:bldLst>
+  </p:timing>
+</p:sld>
+</file>
+
+<file path=ppt/slides/slide16.xml><?xml version="1.0" encoding="utf-8"?>
+<p:sld xmlns:a="http://schemas.openxmlformats.org/drawingml/2006/main" xmlns:r="http://schemas.openxmlformats.org/officeDocument/2006/relationships" xmlns:p="http://schemas.openxmlformats.org/presentationml/2006/main" showMasterPhAnim="0">
+  <p:cSld>
+    <p:spTree>
+      <p:nvGrpSpPr>
+        <p:cNvPr id="1" name="">
+          <a:extLst>
+            <a:ext uri="{FF2B5EF4-FFF2-40B4-BE49-F238E27FC236}">
+              <a16:creationId xmlns:a16="http://schemas.microsoft.com/office/drawing/2014/main" id="{A8BDB338-09B8-DAC9-A710-F02D2A03CAFA}"/>
+            </a:ext>
+          </a:extLst>
+        </p:cNvPr>
+        <p:cNvGrpSpPr/>
+        <p:nvPr/>
+      </p:nvGrpSpPr>
+      <p:grpSpPr>
+        <a:xfrm>
+          <a:off x="0" y="0"/>
+          <a:ext cx="0" cy="0"/>
+          <a:chOff x="0" y="0"/>
+          <a:chExt cx="0" cy="0"/>
+        </a:xfrm>
+      </p:grpSpPr>
+      <p:sp>
+        <p:nvSpPr>
+          <p:cNvPr id="46082" name="Rectangle 2">
+            <a:extLst>
+              <a:ext uri="{FF2B5EF4-FFF2-40B4-BE49-F238E27FC236}">
+                <a16:creationId xmlns:a16="http://schemas.microsoft.com/office/drawing/2014/main" id="{90C0279F-1C1B-27C5-E335-93360B972F47}"/>
+              </a:ext>
+            </a:extLst>
+          </p:cNvPr>
+          <p:cNvSpPr>
+            <a:spLocks noGrp="1" noChangeArrowheads="1"/>
+          </p:cNvSpPr>
+          <p:nvPr>
+            <p:ph type="title"/>
+          </p:nvPr>
+        </p:nvSpPr>
+        <p:spPr/>
+        <p:txBody>
+          <a:bodyPr/>
+          <a:lstStyle/>
+          <a:p>
+            <a:pPr eaLnBrk="1" hangingPunct="1"/>
+            <a:r>
+              <a:rPr lang="en-US" dirty="0">
+                <a:ea typeface="ＭＳ Ｐゴシック" pitchFamily="34" charset="-128"/>
+              </a:rPr>
+              <a:t>Block Designs</a:t>
+            </a:r>
+          </a:p>
+        </p:txBody>
+      </p:sp>
+      <p:sp>
+        <p:nvSpPr>
+          <p:cNvPr id="46081" name="Slide Number Placeholder 5">
+            <a:extLst>
+              <a:ext uri="{FF2B5EF4-FFF2-40B4-BE49-F238E27FC236}">
+                <a16:creationId xmlns:a16="http://schemas.microsoft.com/office/drawing/2014/main" id="{BAE899FD-241F-3201-82A1-08B8A48D96B4}"/>
+              </a:ext>
+            </a:extLst>
+          </p:cNvPr>
+          <p:cNvSpPr>
+            <a:spLocks noGrp="1"/>
+          </p:cNvSpPr>
+          <p:nvPr>
+            <p:ph type="sldNum" sz="quarter" idx="12"/>
+          </p:nvPr>
+        </p:nvSpPr>
+        <p:spPr bwMode="auto">
+          <a:noFill/>
+          <a:extLst>
+            <a:ext uri="{909E8E84-426E-40DD-AFC4-6F175D3DCCD1}">
+              <a14:hiddenFill xmlns:a14="http://schemas.microsoft.com/office/drawing/2010/main">
+                <a:solidFill>
+                  <a:srgbClr val="FFFFFF"/>
+                </a:solidFill>
+              </a14:hiddenFill>
+            </a:ext>
+            <a:ext uri="{91240B29-F687-4F45-9708-019B960494DF}">
+              <a14:hiddenLine xmlns:a14="http://schemas.microsoft.com/office/drawing/2010/main" w="9525">
+                <a:solidFill>
+                  <a:srgbClr val="000000"/>
+                </a:solidFill>
+                <a:miter lim="800000"/>
+                <a:headEnd/>
+                <a:tailEnd/>
+              </a14:hiddenLine>
+            </a:ext>
+          </a:extLst>
+        </p:spPr>
+        <p:txBody>
+          <a:bodyPr/>
+          <a:lstStyle>
+            <a:lvl1pPr>
+              <a:defRPr sz="2400">
+                <a:solidFill>
+                  <a:schemeClr val="tx1"/>
+                </a:solidFill>
+                <a:latin typeface="Arial" pitchFamily="34" charset="0"/>
+                <a:ea typeface="ＭＳ Ｐゴシック" pitchFamily="34" charset="-128"/>
+              </a:defRPr>
+            </a:lvl1pPr>
+            <a:lvl2pPr marL="742950" indent="-285750">
+              <a:defRPr sz="2400">
+                <a:solidFill>
+                  <a:schemeClr val="tx1"/>
+                </a:solidFill>
+                <a:latin typeface="Arial" pitchFamily="34" charset="0"/>
+                <a:ea typeface="ＭＳ Ｐゴシック" pitchFamily="34" charset="-128"/>
+              </a:defRPr>
+            </a:lvl2pPr>
+            <a:lvl3pPr marL="1143000" indent="-228600">
+              <a:defRPr sz="2400">
+                <a:solidFill>
+                  <a:schemeClr val="tx1"/>
+                </a:solidFill>
+                <a:latin typeface="Arial" pitchFamily="34" charset="0"/>
+                <a:ea typeface="ＭＳ Ｐゴシック" pitchFamily="34" charset="-128"/>
+              </a:defRPr>
+            </a:lvl3pPr>
+            <a:lvl4pPr marL="1600200" indent="-228600">
+              <a:defRPr sz="2400">
+                <a:solidFill>
+                  <a:schemeClr val="tx1"/>
+                </a:solidFill>
+                <a:latin typeface="Arial" pitchFamily="34" charset="0"/>
+                <a:ea typeface="ＭＳ Ｐゴシック" pitchFamily="34" charset="-128"/>
+              </a:defRPr>
+            </a:lvl4pPr>
+            <a:lvl5pPr marL="2057400" indent="-228600">
+              <a:defRPr sz="2400">
+                <a:solidFill>
+                  <a:schemeClr val="tx1"/>
+                </a:solidFill>
+                <a:latin typeface="Arial" pitchFamily="34" charset="0"/>
+                <a:ea typeface="ＭＳ Ｐゴシック" pitchFamily="34" charset="-128"/>
+              </a:defRPr>
+            </a:lvl5pPr>
+            <a:lvl6pPr marL="2514600" indent="-228600" defTabSz="457200" eaLnBrk="0" fontAlgn="base" hangingPunct="0">
+              <a:spcBef>
+                <a:spcPct val="0"/>
+              </a:spcBef>
+              <a:spcAft>
+                <a:spcPct val="0"/>
+              </a:spcAft>
+              <a:defRPr sz="2400">
+                <a:solidFill>
+                  <a:schemeClr val="tx1"/>
+                </a:solidFill>
+                <a:latin typeface="Arial" pitchFamily="34" charset="0"/>
+                <a:ea typeface="ＭＳ Ｐゴシック" pitchFamily="34" charset="-128"/>
+              </a:defRPr>
+            </a:lvl6pPr>
+            <a:lvl7pPr marL="2971800" indent="-228600" defTabSz="457200" eaLnBrk="0" fontAlgn="base" hangingPunct="0">
+              <a:spcBef>
+                <a:spcPct val="0"/>
+              </a:spcBef>
+              <a:spcAft>
+                <a:spcPct val="0"/>
+              </a:spcAft>
+              <a:defRPr sz="2400">
+                <a:solidFill>
+                  <a:schemeClr val="tx1"/>
+                </a:solidFill>
+                <a:latin typeface="Arial" pitchFamily="34" charset="0"/>
+                <a:ea typeface="ＭＳ Ｐゴシック" pitchFamily="34" charset="-128"/>
+              </a:defRPr>
+            </a:lvl7pPr>
+            <a:lvl8pPr marL="3429000" indent="-228600" defTabSz="457200" eaLnBrk="0" fontAlgn="base" hangingPunct="0">
+              <a:spcBef>
+                <a:spcPct val="0"/>
+              </a:spcBef>
+              <a:spcAft>
+                <a:spcPct val="0"/>
+              </a:spcAft>
+              <a:defRPr sz="2400">
+                <a:solidFill>
+                  <a:schemeClr val="tx1"/>
+                </a:solidFill>
+                <a:latin typeface="Arial" pitchFamily="34" charset="0"/>
+                <a:ea typeface="ＭＳ Ｐゴシック" pitchFamily="34" charset="-128"/>
+              </a:defRPr>
+            </a:lvl8pPr>
+            <a:lvl9pPr marL="3886200" indent="-228600" defTabSz="457200" eaLnBrk="0" fontAlgn="base" hangingPunct="0">
+              <a:spcBef>
+                <a:spcPct val="0"/>
+              </a:spcBef>
+              <a:spcAft>
+                <a:spcPct val="0"/>
+              </a:spcAft>
+              <a:defRPr sz="2400">
+                <a:solidFill>
+                  <a:schemeClr val="tx1"/>
+                </a:solidFill>
+                <a:latin typeface="Arial" pitchFamily="34" charset="0"/>
+                <a:ea typeface="ＭＳ Ｐゴシック" pitchFamily="34" charset="-128"/>
+              </a:defRPr>
+            </a:lvl9pPr>
+          </a:lstStyle>
+          <a:p>
+            <a:pPr>
+              <a:lnSpc>
+                <a:spcPct val="80000"/>
+              </a:lnSpc>
+            </a:pPr>
+            <a:fld id="{3441456D-DFB5-49DB-A121-9AFDE4CCCA00}" type="slidenum">
+              <a:rPr lang="en-US" sz="1200">
+                <a:solidFill>
+                  <a:schemeClr val="accent1"/>
+                </a:solidFill>
+              </a:rPr>
+              <a:pPr>
+                <a:lnSpc>
+                  <a:spcPct val="80000"/>
+                </a:lnSpc>
+              </a:pPr>
+              <a:t>16</a:t>
+            </a:fld>
+            <a:endParaRPr lang="en-US" sz="1200" dirty="0">
+              <a:solidFill>
+                <a:schemeClr val="accent1"/>
+              </a:solidFill>
+            </a:endParaRPr>
+          </a:p>
+        </p:txBody>
+      </p:sp>
+      <p:sp>
+        <p:nvSpPr>
+          <p:cNvPr id="10" name="TextBox 9">
+            <a:extLst>
+              <a:ext uri="{FF2B5EF4-FFF2-40B4-BE49-F238E27FC236}">
+                <a16:creationId xmlns:a16="http://schemas.microsoft.com/office/drawing/2014/main" id="{35A17D55-1552-B6AD-12BC-D3AF76962FB9}"/>
+              </a:ext>
+            </a:extLst>
+          </p:cNvPr>
+          <p:cNvSpPr txBox="1">
+            <a:spLocks noChangeArrowheads="1"/>
+          </p:cNvSpPr>
+          <p:nvPr/>
+        </p:nvSpPr>
+        <p:spPr bwMode="auto">
+          <a:xfrm>
+            <a:off x="540298" y="1333793"/>
+            <a:ext cx="7947025" cy="2246769"/>
+          </a:xfrm>
+          <a:prstGeom prst="rect">
+            <a:avLst/>
+          </a:prstGeom>
+          <a:solidFill>
+            <a:srgbClr val="EAEDCB"/>
+          </a:solidFill>
+          <a:ln w="10000">
+            <a:solidFill>
+              <a:srgbClr val="D2DA7A"/>
+            </a:solidFill>
+            <a:miter lim="800000"/>
+            <a:headEnd/>
+            <a:tailEnd/>
+          </a:ln>
+          <a:effectLst>
+            <a:outerShdw blurRad="38100" dist="30000" dir="5400000" rotWithShape="0">
+              <a:srgbClr val="808080">
+                <a:alpha val="45000"/>
+              </a:srgbClr>
+            </a:outerShdw>
+          </a:effectLst>
+        </p:spPr>
+        <p:txBody>
+          <a:bodyPr>
+            <a:spAutoFit/>
+          </a:bodyPr>
+          <a:lstStyle>
+            <a:lvl1pPr eaLnBrk="0" hangingPunct="0">
+              <a:defRPr sz="2400">
+                <a:solidFill>
+                  <a:schemeClr val="tx1"/>
+                </a:solidFill>
+                <a:latin typeface="Arial" charset="0"/>
+                <a:ea typeface="ＭＳ Ｐゴシック" pitchFamily="-65" charset="-128"/>
+              </a:defRPr>
+            </a:lvl1pPr>
+            <a:lvl2pPr marL="37931725" indent="-37474525" eaLnBrk="0" hangingPunct="0">
+              <a:defRPr sz="2400">
+                <a:solidFill>
+                  <a:schemeClr val="tx1"/>
+                </a:solidFill>
+                <a:latin typeface="Arial" charset="0"/>
+                <a:ea typeface="ＭＳ Ｐゴシック" pitchFamily="-65" charset="-128"/>
+              </a:defRPr>
+            </a:lvl2pPr>
+            <a:lvl3pPr eaLnBrk="0" hangingPunct="0">
+              <a:defRPr sz="2400">
+                <a:solidFill>
+                  <a:schemeClr val="tx1"/>
+                </a:solidFill>
+                <a:latin typeface="Arial" charset="0"/>
+                <a:ea typeface="ＭＳ Ｐゴシック" pitchFamily="-65" charset="-128"/>
+              </a:defRPr>
+            </a:lvl3pPr>
+            <a:lvl4pPr eaLnBrk="0" hangingPunct="0">
+              <a:defRPr sz="2400">
+                <a:solidFill>
+                  <a:schemeClr val="tx1"/>
+                </a:solidFill>
+                <a:latin typeface="Arial" charset="0"/>
+                <a:ea typeface="ＭＳ Ｐゴシック" pitchFamily="-65" charset="-128"/>
+              </a:defRPr>
+            </a:lvl4pPr>
+            <a:lvl5pPr eaLnBrk="0" hangingPunct="0">
+              <a:defRPr sz="2400">
+                <a:solidFill>
+                  <a:schemeClr val="tx1"/>
+                </a:solidFill>
+                <a:latin typeface="Arial" charset="0"/>
+                <a:ea typeface="ＭＳ Ｐゴシック" pitchFamily="-65" charset="-128"/>
+              </a:defRPr>
+            </a:lvl5pPr>
+            <a:lvl6pPr marL="457200" eaLnBrk="0" fontAlgn="base" hangingPunct="0">
+              <a:spcBef>
+                <a:spcPct val="0"/>
+              </a:spcBef>
+              <a:spcAft>
+                <a:spcPct val="0"/>
+              </a:spcAft>
+              <a:defRPr sz="2400">
+                <a:solidFill>
+                  <a:schemeClr val="tx1"/>
+                </a:solidFill>
+                <a:latin typeface="Arial" charset="0"/>
+                <a:ea typeface="ＭＳ Ｐゴシック" pitchFamily="-65" charset="-128"/>
+              </a:defRPr>
+            </a:lvl6pPr>
+            <a:lvl7pPr marL="914400" eaLnBrk="0" fontAlgn="base" hangingPunct="0">
+              <a:spcBef>
+                <a:spcPct val="0"/>
+              </a:spcBef>
+              <a:spcAft>
+                <a:spcPct val="0"/>
+              </a:spcAft>
+              <a:defRPr sz="2400">
+                <a:solidFill>
+                  <a:schemeClr val="tx1"/>
+                </a:solidFill>
+                <a:latin typeface="Arial" charset="0"/>
+                <a:ea typeface="ＭＳ Ｐゴシック" pitchFamily="-65" charset="-128"/>
+              </a:defRPr>
+            </a:lvl7pPr>
+            <a:lvl8pPr marL="1371600" eaLnBrk="0" fontAlgn="base" hangingPunct="0">
+              <a:spcBef>
+                <a:spcPct val="0"/>
+              </a:spcBef>
+              <a:spcAft>
+                <a:spcPct val="0"/>
+              </a:spcAft>
+              <a:defRPr sz="2400">
+                <a:solidFill>
+                  <a:schemeClr val="tx1"/>
+                </a:solidFill>
+                <a:latin typeface="Arial" charset="0"/>
+                <a:ea typeface="ＭＳ Ｐゴシック" pitchFamily="-65" charset="-128"/>
+              </a:defRPr>
+            </a:lvl8pPr>
+            <a:lvl9pPr marL="1828800" eaLnBrk="0" fontAlgn="base" hangingPunct="0">
+              <a:spcBef>
+                <a:spcPct val="0"/>
+              </a:spcBef>
+              <a:spcAft>
+                <a:spcPct val="0"/>
+              </a:spcAft>
+              <a:defRPr sz="2400">
+                <a:solidFill>
+                  <a:schemeClr val="tx1"/>
+                </a:solidFill>
+                <a:latin typeface="Arial" charset="0"/>
+                <a:ea typeface="ＭＳ Ｐゴシック" pitchFamily="-65" charset="-128"/>
+              </a:defRPr>
+            </a:lvl9pPr>
+          </a:lstStyle>
+          <a:p>
+            <a:r>
+              <a:rPr lang="en-US" altLang="en-US" sz="2000" dirty="0">
+                <a:solidFill>
+                  <a:srgbClr val="000000"/>
+                </a:solidFill>
+              </a:rPr>
+              <a:t>(</a:t>
+            </a:r>
+            <a:r>
+              <a:rPr lang="en-US" altLang="zh-CN" sz="2000" dirty="0">
+                <a:solidFill>
+                  <a:srgbClr val="000000"/>
+                </a:solidFill>
+              </a:rPr>
+              <a:t>E</a:t>
+            </a:r>
+            <a:r>
+              <a:rPr lang="en-US" altLang="en-US" sz="2000" dirty="0">
+                <a:solidFill>
+                  <a:srgbClr val="000000"/>
+                </a:solidFill>
+              </a:rPr>
+              <a:t>xample 3.18: </a:t>
+            </a:r>
+            <a:r>
+              <a:rPr lang="en-US" altLang="en-US" sz="2000" dirty="0"/>
+              <a:t>C</a:t>
+            </a:r>
+            <a:r>
+              <a:rPr lang="en-US" sz="2000" dirty="0"/>
+              <a:t>ancer Therapies</a:t>
+            </a:r>
+            <a:r>
+              <a:rPr lang="en-US" altLang="en-US" sz="2000" dirty="0">
+                <a:solidFill>
+                  <a:srgbClr val="000000"/>
+                </a:solidFill>
+              </a:rPr>
+              <a:t>) </a:t>
+            </a:r>
+            <a:r>
+              <a:rPr lang="en-US" sz="2000" dirty="0"/>
+              <a:t>Suppose cancer progression differs between women and men. To compare three therapies:</a:t>
+            </a:r>
+          </a:p>
+          <a:p>
+            <a:pPr marL="342900" lvl="0" indent="-342900">
+              <a:buFont typeface="Arial" panose="020B0604020202020204" pitchFamily="34" charset="0"/>
+              <a:buChar char="•"/>
+            </a:pPr>
+            <a:r>
+              <a:rPr lang="en-US" sz="2000" dirty="0"/>
+              <a:t>Form two blocks: </a:t>
+            </a:r>
+            <a:r>
+              <a:rPr lang="en-US" sz="2000" b="1" dirty="0"/>
+              <a:t>women</a:t>
+            </a:r>
+            <a:r>
+              <a:rPr lang="en-US" sz="2000" dirty="0"/>
+              <a:t> and </a:t>
+            </a:r>
+            <a:r>
+              <a:rPr lang="en-US" sz="2000" b="1" dirty="0"/>
+              <a:t>men</a:t>
+            </a:r>
+            <a:endParaRPr lang="en-US" sz="2000" dirty="0"/>
+          </a:p>
+          <a:p>
+            <a:pPr marL="342900" lvl="0" indent="-342900">
+              <a:buFont typeface="Arial" panose="020B0604020202020204" pitchFamily="34" charset="0"/>
+              <a:buChar char="•"/>
+            </a:pPr>
+            <a:r>
+              <a:rPr lang="en-US" sz="2000" dirty="0"/>
+              <a:t>Within each block, randomly assign subjects to therapies</a:t>
+            </a:r>
+            <a:r>
+              <a:rPr lang="en-US" sz="2000" b="1" dirty="0"/>
+              <a:t>.</a:t>
+            </a:r>
+          </a:p>
+          <a:p>
+            <a:pPr lvl="0"/>
+            <a:endParaRPr lang="en-US" sz="2000" dirty="0"/>
+          </a:p>
+          <a:p>
+            <a:r>
+              <a:rPr lang="en-US" sz="2000" b="1" dirty="0"/>
+              <a:t>Why block?</a:t>
+            </a:r>
+            <a:r>
+              <a:rPr lang="en-US" sz="2000" dirty="0"/>
+              <a:t> Sex may affect the response, so blocking helps separate sex-related variation from treatment effects.</a:t>
+            </a:r>
+          </a:p>
+        </p:txBody>
+      </p:sp>
+      <p:pic>
+        <p:nvPicPr>
+          <p:cNvPr id="5" name="Picture 4">
+            <a:extLst>
+              <a:ext uri="{FF2B5EF4-FFF2-40B4-BE49-F238E27FC236}">
+                <a16:creationId xmlns:a16="http://schemas.microsoft.com/office/drawing/2014/main" id="{1F14A10C-496B-340B-4CBA-EBC21A10CE7C}"/>
+              </a:ext>
+            </a:extLst>
+          </p:cNvPr>
+          <p:cNvPicPr>
+            <a:picLocks noChangeAspect="1"/>
+          </p:cNvPicPr>
+          <p:nvPr/>
+        </p:nvPicPr>
+        <p:blipFill>
+          <a:blip r:embed="rId3"/>
+          <a:srcRect l="4896" t="16297" r="8195" b="16852"/>
+          <a:stretch/>
+        </p:blipFill>
+        <p:spPr>
+          <a:xfrm>
+            <a:off x="1324598" y="4025069"/>
+            <a:ext cx="5994114" cy="2593538"/>
+          </a:xfrm>
+          <a:prstGeom prst="rect">
+            <a:avLst/>
+          </a:prstGeom>
+        </p:spPr>
+      </p:pic>
+    </p:spTree>
+    <p:extLst>
+      <p:ext uri="{BB962C8B-B14F-4D97-AF65-F5344CB8AC3E}">
+        <p14:creationId xmlns:p14="http://schemas.microsoft.com/office/powerpoint/2010/main" val="851934012"/>
+      </p:ext>
+    </p:extLst>
+  </p:cSld>
+  <p:clrMapOvr>
+    <a:masterClrMapping/>
+  </p:clrMapOvr>
+  <p:transition spd="med">
+    <p:fade/>
+  </p:transition>
+  <p:timing>
+    <p:tnLst>
+      <p:par>
+        <p:cTn id="1" dur="indefinite" restart="never" nodeType="tmRoot">
+          <p:childTnLst>
+            <p:seq concurrent="1" nextAc="seek">
+              <p:cTn id="2" dur="indefinite" nodeType="mainSeq">
+                <p:childTnLst>
+                  <p:par>
+                    <p:cTn id="3" fill="hold" nodeType="clickPar">
+                      <p:stCondLst>
+                        <p:cond delay="indefinite"/>
+                      </p:stCondLst>
+                      <p:childTnLst>
+                        <p:par>
+                          <p:cTn id="4" fill="hold" nodeType="withGroup">
+                            <p:stCondLst>
+                              <p:cond delay="0"/>
+                            </p:stCondLst>
+                            <p:childTnLst>
+                              <p:par>
+                                <p:cTn id="5" presetID="10" presetClass="entr" presetSubtype="0" fill="hold" grpId="0" nodeType="clickEffect">
+                                  <p:stCondLst>
+                                    <p:cond delay="0"/>
+                                  </p:stCondLst>
+                                  <p:childTnLst>
+                                    <p:set>
+                                      <p:cBhvr>
+                                        <p:cTn id="6" dur="1" fill="hold">
+                                          <p:stCondLst>
+                                            <p:cond delay="0"/>
+                                          </p:stCondLst>
+                                        </p:cTn>
+                                        <p:tgtEl>
+                                          <p:spTgt spid="10"/>
+                                        </p:tgtEl>
+                                        <p:attrNameLst>
+                                          <p:attrName>style.visibility</p:attrName>
+                                        </p:attrNameLst>
+                                      </p:cBhvr>
+                                      <p:to>
+                                        <p:strVal val="visible"/>
+                                      </p:to>
+                                    </p:set>
+                                    <p:animEffect transition="in" filter="fade">
+                                      <p:cBhvr>
+                                        <p:cTn id="7" dur="1000"/>
+                                        <p:tgtEl>
+                                          <p:spTgt spid="10"/>
+                                        </p:tgtEl>
+                                      </p:cBhvr>
+                                    </p:animEffect>
+                                  </p:childTnLst>
+                                </p:cTn>
+                              </p:par>
+                            </p:childTnLst>
+                          </p:cTn>
+                        </p:par>
+                      </p:childTnLst>
+                    </p:cTn>
+                  </p:par>
+                </p:childTnLst>
+              </p:cTn>
+              <p:prevCondLst>
+                <p:cond evt="onPrev" delay="0">
+                  <p:tgtEl>
+                    <p:sldTgt/>
+                  </p:tgtEl>
+                </p:cond>
+              </p:prevCondLst>
+              <p:nextCondLst>
+                <p:cond evt="onNext" delay="0">
+                  <p:tgtEl>
+                    <p:sldTgt/>
+                  </p:tgtEl>
+                </p:cond>
+              </p:nextCondLst>
+            </p:seq>
+          </p:childTnLst>
+        </p:cTn>
+      </p:par>
+    </p:tnLst>
+    <p:bldLst>
+      <p:bldP spid="10" grpId="0" animBg="1"/>
+    </p:bldLst>
+  </p:timing>
+</p:sld>
+</file>
+
+<file path=ppt/slides/slide17.xml><?xml version="1.0" encoding="utf-8"?>
+<p:sld xmlns:a="http://schemas.openxmlformats.org/drawingml/2006/main" xmlns:r="http://schemas.openxmlformats.org/officeDocument/2006/relationships" xmlns:p="http://schemas.openxmlformats.org/presentationml/2006/main" showMasterPhAnim="0">
+  <p:cSld>
+    <p:spTree>
+      <p:nvGrpSpPr>
+        <p:cNvPr id="1" name=""/>
+        <p:cNvGrpSpPr/>
+        <p:nvPr/>
+      </p:nvGrpSpPr>
+      <p:grpSpPr>
+        <a:xfrm>
+          <a:off x="0" y="0"/>
+          <a:ext cx="0" cy="0"/>
+          <a:chOff x="0" y="0"/>
+          <a:chExt cx="0" cy="0"/>
+        </a:xfrm>
+      </p:grpSpPr>
+      <p:sp>
+        <p:nvSpPr>
           <p:cNvPr id="43010" name="Rectangle 2"/>
           <p:cNvSpPr>
             <a:spLocks noGrp="1" noChangeArrowheads="1"/>
@@ -14119,7 +14981,7 @@
                   <a:spcPct val="80000"/>
                 </a:lnSpc>
               </a:pPr>
-              <a:t>15</a:t>
+              <a:t>17</a:t>
             </a:fld>
             <a:endParaRPr lang="en-US" sz="1200">
               <a:solidFill>
@@ -15037,7 +15899,7 @@
 </p:sld>
 </file>
 
-<file path=ppt/slides/slide16.xml><?xml version="1.0" encoding="utf-8"?>
+<file path=ppt/slides/slide18.xml><?xml version="1.0" encoding="utf-8"?>
 <p:sld xmlns:a="http://schemas.openxmlformats.org/drawingml/2006/main" xmlns:r="http://schemas.openxmlformats.org/officeDocument/2006/relationships" xmlns:p="http://schemas.openxmlformats.org/presentationml/2006/main" showMasterPhAnim="0">
   <p:cSld>
     <p:spTree>
@@ -15237,7 +16099,7 @@
                   <a:spcPct val="80000"/>
                 </a:lnSpc>
               </a:pPr>
-              <a:t>16</a:t>
+              <a:t>18</a:t>
             </a:fld>
             <a:endParaRPr lang="en-US" sz="1200" dirty="0">
               <a:solidFill>
@@ -15600,7 +16462,7 @@
 </p:sld>
 </file>
 
-<file path=ppt/slides/slide17.xml><?xml version="1.0" encoding="utf-8"?>
+<file path=ppt/slides/slide19.xml><?xml version="1.0" encoding="utf-8"?>
 <p:sld xmlns:a="http://schemas.openxmlformats.org/drawingml/2006/main" xmlns:r="http://schemas.openxmlformats.org/officeDocument/2006/relationships" xmlns:p="http://schemas.openxmlformats.org/presentationml/2006/main" showMasterPhAnim="0">
   <p:cSld>
     <p:spTree>
@@ -15818,7 +16680,7 @@
                   <a:spcPct val="80000"/>
                 </a:lnSpc>
               </a:pPr>
-              <a:t>17</a:t>
+              <a:t>19</a:t>
             </a:fld>
             <a:endParaRPr lang="en-US" sz="1200" dirty="0">
               <a:solidFill>
@@ -16546,1348 +17408,6 @@
 </p:sld>
 </file>
 
-<file path=ppt/slides/slide18.xml><?xml version="1.0" encoding="utf-8"?>
-<p:sld xmlns:a="http://schemas.openxmlformats.org/drawingml/2006/main" xmlns:r="http://schemas.openxmlformats.org/officeDocument/2006/relationships" xmlns:p="http://schemas.openxmlformats.org/presentationml/2006/main" showMasterPhAnim="0">
-  <p:cSld>
-    <p:spTree>
-      <p:nvGrpSpPr>
-        <p:cNvPr id="1" name=""/>
-        <p:cNvGrpSpPr/>
-        <p:nvPr/>
-      </p:nvGrpSpPr>
-      <p:grpSpPr>
-        <a:xfrm>
-          <a:off x="0" y="0"/>
-          <a:ext cx="0" cy="0"/>
-          <a:chOff x="0" y="0"/>
-          <a:chExt cx="0" cy="0"/>
-        </a:xfrm>
-      </p:grpSpPr>
-      <p:sp>
-        <p:nvSpPr>
-          <p:cNvPr id="45058" name="Rectangle 2"/>
-          <p:cNvSpPr>
-            <a:spLocks noGrp="1" noChangeArrowheads="1"/>
-          </p:cNvSpPr>
-          <p:nvPr>
-            <p:ph type="title"/>
-          </p:nvPr>
-        </p:nvSpPr>
-        <p:spPr/>
-        <p:txBody>
-          <a:bodyPr/>
-          <a:lstStyle/>
-          <a:p>
-            <a:pPr eaLnBrk="1" hangingPunct="1"/>
-            <a:r>
-              <a:rPr lang="en-US" dirty="0">
-                <a:ea typeface="ＭＳ Ｐゴシック" pitchFamily="34" charset="-128"/>
-              </a:rPr>
-              <a:t>Matched Pairs Design</a:t>
-            </a:r>
-          </a:p>
-        </p:txBody>
-      </p:sp>
-      <p:sp>
-        <p:nvSpPr>
-          <p:cNvPr id="45057" name="Slide Number Placeholder 5"/>
-          <p:cNvSpPr>
-            <a:spLocks noGrp="1"/>
-          </p:cNvSpPr>
-          <p:nvPr>
-            <p:ph type="sldNum" sz="quarter" idx="12"/>
-          </p:nvPr>
-        </p:nvSpPr>
-        <p:spPr bwMode="auto">
-          <a:noFill/>
-          <a:extLst>
-            <a:ext uri="{909E8E84-426E-40DD-AFC4-6F175D3DCCD1}">
-              <a14:hiddenFill xmlns:a14="http://schemas.microsoft.com/office/drawing/2010/main">
-                <a:solidFill>
-                  <a:srgbClr val="FFFFFF"/>
-                </a:solidFill>
-              </a14:hiddenFill>
-            </a:ext>
-            <a:ext uri="{91240B29-F687-4F45-9708-019B960494DF}">
-              <a14:hiddenLine xmlns:a14="http://schemas.microsoft.com/office/drawing/2010/main" w="9525">
-                <a:solidFill>
-                  <a:srgbClr val="000000"/>
-                </a:solidFill>
-                <a:miter lim="800000"/>
-                <a:headEnd/>
-                <a:tailEnd/>
-              </a14:hiddenLine>
-            </a:ext>
-          </a:extLst>
-        </p:spPr>
-        <p:txBody>
-          <a:bodyPr/>
-          <a:lstStyle>
-            <a:lvl1pPr>
-              <a:defRPr sz="2400">
-                <a:solidFill>
-                  <a:schemeClr val="tx1"/>
-                </a:solidFill>
-                <a:latin typeface="Arial" pitchFamily="34" charset="0"/>
-                <a:ea typeface="ＭＳ Ｐゴシック" pitchFamily="34" charset="-128"/>
-              </a:defRPr>
-            </a:lvl1pPr>
-            <a:lvl2pPr marL="742950" indent="-285750">
-              <a:defRPr sz="2400">
-                <a:solidFill>
-                  <a:schemeClr val="tx1"/>
-                </a:solidFill>
-                <a:latin typeface="Arial" pitchFamily="34" charset="0"/>
-                <a:ea typeface="ＭＳ Ｐゴシック" pitchFamily="34" charset="-128"/>
-              </a:defRPr>
-            </a:lvl2pPr>
-            <a:lvl3pPr marL="1143000" indent="-228600">
-              <a:defRPr sz="2400">
-                <a:solidFill>
-                  <a:schemeClr val="tx1"/>
-                </a:solidFill>
-                <a:latin typeface="Arial" pitchFamily="34" charset="0"/>
-                <a:ea typeface="ＭＳ Ｐゴシック" pitchFamily="34" charset="-128"/>
-              </a:defRPr>
-            </a:lvl3pPr>
-            <a:lvl4pPr marL="1600200" indent="-228600">
-              <a:defRPr sz="2400">
-                <a:solidFill>
-                  <a:schemeClr val="tx1"/>
-                </a:solidFill>
-                <a:latin typeface="Arial" pitchFamily="34" charset="0"/>
-                <a:ea typeface="ＭＳ Ｐゴシック" pitchFamily="34" charset="-128"/>
-              </a:defRPr>
-            </a:lvl4pPr>
-            <a:lvl5pPr marL="2057400" indent="-228600">
-              <a:defRPr sz="2400">
-                <a:solidFill>
-                  <a:schemeClr val="tx1"/>
-                </a:solidFill>
-                <a:latin typeface="Arial" pitchFamily="34" charset="0"/>
-                <a:ea typeface="ＭＳ Ｐゴシック" pitchFamily="34" charset="-128"/>
-              </a:defRPr>
-            </a:lvl5pPr>
-            <a:lvl6pPr marL="2514600" indent="-228600" defTabSz="457200" eaLnBrk="0" fontAlgn="base" hangingPunct="0">
-              <a:spcBef>
-                <a:spcPct val="0"/>
-              </a:spcBef>
-              <a:spcAft>
-                <a:spcPct val="0"/>
-              </a:spcAft>
-              <a:defRPr sz="2400">
-                <a:solidFill>
-                  <a:schemeClr val="tx1"/>
-                </a:solidFill>
-                <a:latin typeface="Arial" pitchFamily="34" charset="0"/>
-                <a:ea typeface="ＭＳ Ｐゴシック" pitchFamily="34" charset="-128"/>
-              </a:defRPr>
-            </a:lvl6pPr>
-            <a:lvl7pPr marL="2971800" indent="-228600" defTabSz="457200" eaLnBrk="0" fontAlgn="base" hangingPunct="0">
-              <a:spcBef>
-                <a:spcPct val="0"/>
-              </a:spcBef>
-              <a:spcAft>
-                <a:spcPct val="0"/>
-              </a:spcAft>
-              <a:defRPr sz="2400">
-                <a:solidFill>
-                  <a:schemeClr val="tx1"/>
-                </a:solidFill>
-                <a:latin typeface="Arial" pitchFamily="34" charset="0"/>
-                <a:ea typeface="ＭＳ Ｐゴシック" pitchFamily="34" charset="-128"/>
-              </a:defRPr>
-            </a:lvl7pPr>
-            <a:lvl8pPr marL="3429000" indent="-228600" defTabSz="457200" eaLnBrk="0" fontAlgn="base" hangingPunct="0">
-              <a:spcBef>
-                <a:spcPct val="0"/>
-              </a:spcBef>
-              <a:spcAft>
-                <a:spcPct val="0"/>
-              </a:spcAft>
-              <a:defRPr sz="2400">
-                <a:solidFill>
-                  <a:schemeClr val="tx1"/>
-                </a:solidFill>
-                <a:latin typeface="Arial" pitchFamily="34" charset="0"/>
-                <a:ea typeface="ＭＳ Ｐゴシック" pitchFamily="34" charset="-128"/>
-              </a:defRPr>
-            </a:lvl8pPr>
-            <a:lvl9pPr marL="3886200" indent="-228600" defTabSz="457200" eaLnBrk="0" fontAlgn="base" hangingPunct="0">
-              <a:spcBef>
-                <a:spcPct val="0"/>
-              </a:spcBef>
-              <a:spcAft>
-                <a:spcPct val="0"/>
-              </a:spcAft>
-              <a:defRPr sz="2400">
-                <a:solidFill>
-                  <a:schemeClr val="tx1"/>
-                </a:solidFill>
-                <a:latin typeface="Arial" pitchFamily="34" charset="0"/>
-                <a:ea typeface="ＭＳ Ｐゴシック" pitchFamily="34" charset="-128"/>
-              </a:defRPr>
-            </a:lvl9pPr>
-          </a:lstStyle>
-          <a:p>
-            <a:pPr>
-              <a:lnSpc>
-                <a:spcPct val="80000"/>
-              </a:lnSpc>
-            </a:pPr>
-            <a:fld id="{C0FF08C6-B9ED-4EFB-8B38-F75C2217EF3B}" type="slidenum">
-              <a:rPr lang="en-US" sz="1200">
-                <a:solidFill>
-                  <a:schemeClr val="accent1"/>
-                </a:solidFill>
-              </a:rPr>
-              <a:pPr>
-                <a:lnSpc>
-                  <a:spcPct val="80000"/>
-                </a:lnSpc>
-              </a:pPr>
-              <a:t>18</a:t>
-            </a:fld>
-            <a:endParaRPr lang="en-US" sz="1200">
-              <a:solidFill>
-                <a:schemeClr val="accent1"/>
-              </a:solidFill>
-            </a:endParaRPr>
-          </a:p>
-        </p:txBody>
-      </p:sp>
-      <p:sp>
-        <p:nvSpPr>
-          <p:cNvPr id="7" name="TextBox 6"/>
-          <p:cNvSpPr txBox="1">
-            <a:spLocks noChangeArrowheads="1"/>
-          </p:cNvSpPr>
-          <p:nvPr/>
-        </p:nvSpPr>
-        <p:spPr bwMode="auto">
-          <a:xfrm>
-            <a:off x="427290" y="1927225"/>
-            <a:ext cx="8161233" cy="2862322"/>
-          </a:xfrm>
-          <a:prstGeom prst="rect">
-            <a:avLst/>
-          </a:prstGeom>
-          <a:solidFill>
-            <a:srgbClr val="EAEDCB"/>
-          </a:solidFill>
-          <a:ln w="10000">
-            <a:solidFill>
-              <a:srgbClr val="D2DA7A"/>
-            </a:solidFill>
-            <a:miter lim="800000"/>
-            <a:headEnd/>
-            <a:tailEnd/>
-          </a:ln>
-          <a:effectLst>
-            <a:outerShdw blurRad="38100" dist="30000" dir="5400000" rotWithShape="0">
-              <a:srgbClr val="808080">
-                <a:alpha val="45000"/>
-              </a:srgbClr>
-            </a:outerShdw>
-          </a:effectLst>
-        </p:spPr>
-        <p:txBody>
-          <a:bodyPr wrap="square">
-            <a:spAutoFit/>
-          </a:bodyPr>
-          <a:lstStyle>
-            <a:lvl1pPr>
-              <a:defRPr sz="2400">
-                <a:solidFill>
-                  <a:schemeClr val="tx1"/>
-                </a:solidFill>
-                <a:latin typeface="Arial" pitchFamily="34" charset="0"/>
-                <a:ea typeface="ＭＳ Ｐゴシック" pitchFamily="34" charset="-128"/>
-              </a:defRPr>
-            </a:lvl1pPr>
-            <a:lvl2pPr marL="742950" indent="-285750">
-              <a:defRPr sz="2400">
-                <a:solidFill>
-                  <a:schemeClr val="tx1"/>
-                </a:solidFill>
-                <a:latin typeface="Arial" pitchFamily="34" charset="0"/>
-                <a:ea typeface="ＭＳ Ｐゴシック" pitchFamily="34" charset="-128"/>
-              </a:defRPr>
-            </a:lvl2pPr>
-            <a:lvl3pPr marL="1143000" indent="-228600">
-              <a:defRPr sz="2400">
-                <a:solidFill>
-                  <a:schemeClr val="tx1"/>
-                </a:solidFill>
-                <a:latin typeface="Arial" pitchFamily="34" charset="0"/>
-                <a:ea typeface="ＭＳ Ｐゴシック" pitchFamily="34" charset="-128"/>
-              </a:defRPr>
-            </a:lvl3pPr>
-            <a:lvl4pPr marL="1600200" indent="-228600">
-              <a:defRPr sz="2400">
-                <a:solidFill>
-                  <a:schemeClr val="tx1"/>
-                </a:solidFill>
-                <a:latin typeface="Arial" pitchFamily="34" charset="0"/>
-                <a:ea typeface="ＭＳ Ｐゴシック" pitchFamily="34" charset="-128"/>
-              </a:defRPr>
-            </a:lvl4pPr>
-            <a:lvl5pPr marL="2057400" indent="-228600">
-              <a:defRPr sz="2400">
-                <a:solidFill>
-                  <a:schemeClr val="tx1"/>
-                </a:solidFill>
-                <a:latin typeface="Arial" pitchFamily="34" charset="0"/>
-                <a:ea typeface="ＭＳ Ｐゴシック" pitchFamily="34" charset="-128"/>
-              </a:defRPr>
-            </a:lvl5pPr>
-            <a:lvl6pPr marL="2514600" indent="-228600" defTabSz="457200" eaLnBrk="0" fontAlgn="base" hangingPunct="0">
-              <a:spcBef>
-                <a:spcPct val="0"/>
-              </a:spcBef>
-              <a:spcAft>
-                <a:spcPct val="0"/>
-              </a:spcAft>
-              <a:defRPr sz="2400">
-                <a:solidFill>
-                  <a:schemeClr val="tx1"/>
-                </a:solidFill>
-                <a:latin typeface="Arial" pitchFamily="34" charset="0"/>
-                <a:ea typeface="ＭＳ Ｐゴシック" pitchFamily="34" charset="-128"/>
-              </a:defRPr>
-            </a:lvl6pPr>
-            <a:lvl7pPr marL="2971800" indent="-228600" defTabSz="457200" eaLnBrk="0" fontAlgn="base" hangingPunct="0">
-              <a:spcBef>
-                <a:spcPct val="0"/>
-              </a:spcBef>
-              <a:spcAft>
-                <a:spcPct val="0"/>
-              </a:spcAft>
-              <a:defRPr sz="2400">
-                <a:solidFill>
-                  <a:schemeClr val="tx1"/>
-                </a:solidFill>
-                <a:latin typeface="Arial" pitchFamily="34" charset="0"/>
-                <a:ea typeface="ＭＳ Ｐゴシック" pitchFamily="34" charset="-128"/>
-              </a:defRPr>
-            </a:lvl7pPr>
-            <a:lvl8pPr marL="3429000" indent="-228600" defTabSz="457200" eaLnBrk="0" fontAlgn="base" hangingPunct="0">
-              <a:spcBef>
-                <a:spcPct val="0"/>
-              </a:spcBef>
-              <a:spcAft>
-                <a:spcPct val="0"/>
-              </a:spcAft>
-              <a:defRPr sz="2400">
-                <a:solidFill>
-                  <a:schemeClr val="tx1"/>
-                </a:solidFill>
-                <a:latin typeface="Arial" pitchFamily="34" charset="0"/>
-                <a:ea typeface="ＭＳ Ｐゴシック" pitchFamily="34" charset="-128"/>
-              </a:defRPr>
-            </a:lvl8pPr>
-            <a:lvl9pPr marL="3886200" indent="-228600" defTabSz="457200" eaLnBrk="0" fontAlgn="base" hangingPunct="0">
-              <a:spcBef>
-                <a:spcPct val="0"/>
-              </a:spcBef>
-              <a:spcAft>
-                <a:spcPct val="0"/>
-              </a:spcAft>
-              <a:defRPr sz="2400">
-                <a:solidFill>
-                  <a:schemeClr val="tx1"/>
-                </a:solidFill>
-                <a:latin typeface="Arial" pitchFamily="34" charset="0"/>
-                <a:ea typeface="ＭＳ Ｐゴシック" pitchFamily="34" charset="-128"/>
-              </a:defRPr>
-            </a:lvl9pPr>
-          </a:lstStyle>
-          <a:p>
-            <a:pPr eaLnBrk="1" hangingPunct="1">
-              <a:spcAft>
-                <a:spcPts val="1200"/>
-              </a:spcAft>
-            </a:pPr>
-            <a:r>
-              <a:rPr lang="en-US" sz="2000" dirty="0">
-                <a:solidFill>
-                  <a:srgbClr val="000000"/>
-                </a:solidFill>
-              </a:rPr>
-              <a:t>A </a:t>
-            </a:r>
-            <a:r>
-              <a:rPr lang="en-US" sz="2000" b="1" dirty="0">
-                <a:solidFill>
-                  <a:srgbClr val="800000"/>
-                </a:solidFill>
-              </a:rPr>
-              <a:t>matched pairs design</a:t>
-            </a:r>
-            <a:r>
-              <a:rPr lang="en-US" sz="2000" dirty="0">
-                <a:solidFill>
-                  <a:srgbClr val="800000"/>
-                </a:solidFill>
-              </a:rPr>
-              <a:t> </a:t>
-            </a:r>
-            <a:r>
-              <a:rPr lang="en-US" sz="2000" dirty="0"/>
-              <a:t>compares two treatments. Experimental units are matched in pairs based on characteristics expected to affect the response.</a:t>
-            </a:r>
-          </a:p>
-          <a:p>
-            <a:pPr eaLnBrk="1" hangingPunct="1">
-              <a:spcAft>
-                <a:spcPts val="1200"/>
-              </a:spcAft>
-            </a:pPr>
-            <a:r>
-              <a:rPr lang="en-US" sz="2000" dirty="0"/>
-              <a:t>Chance determines which unit in each pair receives each treatment.</a:t>
-            </a:r>
-            <a:endParaRPr lang="en-US" sz="2000" dirty="0">
-              <a:solidFill>
-                <a:srgbClr val="000000"/>
-              </a:solidFill>
-            </a:endParaRPr>
-          </a:p>
-          <a:p>
-            <a:pPr eaLnBrk="1" hangingPunct="1">
-              <a:spcAft>
-                <a:spcPts val="1200"/>
-              </a:spcAft>
-            </a:pPr>
-            <a:r>
-              <a:rPr lang="en-US" sz="2000" dirty="0"/>
-              <a:t>Alternatively, the same unit may receive both treatments</a:t>
-            </a:r>
-            <a:r>
-              <a:rPr lang="en-US" altLang="ja-JP" sz="2000" dirty="0">
-                <a:solidFill>
-                  <a:srgbClr val="000000"/>
-                </a:solidFill>
-              </a:rPr>
-              <a:t>. Because the order of the treatments may influence the response, chance is used to determine which treatment is applied first for each unit. (</a:t>
-            </a:r>
-            <a:r>
-              <a:rPr lang="en-US" altLang="ja-JP" sz="2000" dirty="0">
-                <a:solidFill>
-                  <a:srgbClr val="FF0000"/>
-                </a:solidFill>
-              </a:rPr>
-              <a:t>cross-over experiment</a:t>
-            </a:r>
-            <a:r>
-              <a:rPr lang="en-US" altLang="ja-JP" sz="2000" dirty="0">
-                <a:solidFill>
-                  <a:srgbClr val="000000"/>
-                </a:solidFill>
-              </a:rPr>
-              <a:t>) </a:t>
-            </a:r>
-            <a:endParaRPr lang="en-US" sz="2000" dirty="0">
-              <a:solidFill>
-                <a:srgbClr val="000000"/>
-              </a:solidFill>
-            </a:endParaRPr>
-          </a:p>
-        </p:txBody>
-      </p:sp>
-    </p:spTree>
-  </p:cSld>
-  <p:clrMapOvr>
-    <a:masterClrMapping/>
-  </p:clrMapOvr>
-  <p:transition spd="med">
-    <p:fade/>
-  </p:transition>
-  <p:timing>
-    <p:tnLst>
-      <p:par>
-        <p:cTn id="1" dur="indefinite" restart="never" nodeType="tmRoot">
-          <p:childTnLst>
-            <p:seq concurrent="1" nextAc="seek">
-              <p:cTn id="2" dur="indefinite" nodeType="mainSeq">
-                <p:childTnLst>
-                  <p:par>
-                    <p:cTn id="3" fill="hold" nodeType="clickPar">
-                      <p:stCondLst>
-                        <p:cond delay="indefinite"/>
-                        <p:cond evt="onBegin" delay="0">
-                          <p:tn val="2"/>
-                        </p:cond>
-                      </p:stCondLst>
-                      <p:childTnLst>
-                        <p:par>
-                          <p:cTn id="4" fill="hold" nodeType="withGroup">
-                            <p:stCondLst>
-                              <p:cond delay="0"/>
-                            </p:stCondLst>
-                            <p:childTnLst>
-                              <p:par>
-                                <p:cTn id="5" presetID="10" presetClass="entr" presetSubtype="0" fill="hold" grpId="0" nodeType="withEffect">
-                                  <p:stCondLst>
-                                    <p:cond delay="0"/>
-                                  </p:stCondLst>
-                                  <p:childTnLst>
-                                    <p:set>
-                                      <p:cBhvr>
-                                        <p:cTn id="6" dur="1" fill="hold">
-                                          <p:stCondLst>
-                                            <p:cond delay="0"/>
-                                          </p:stCondLst>
-                                        </p:cTn>
-                                        <p:tgtEl>
-                                          <p:spTgt spid="7"/>
-                                        </p:tgtEl>
-                                        <p:attrNameLst>
-                                          <p:attrName>style.visibility</p:attrName>
-                                        </p:attrNameLst>
-                                      </p:cBhvr>
-                                      <p:to>
-                                        <p:strVal val="visible"/>
-                                      </p:to>
-                                    </p:set>
-                                    <p:animEffect transition="in" filter="fade">
-                                      <p:cBhvr>
-                                        <p:cTn id="7" dur="1000"/>
-                                        <p:tgtEl>
-                                          <p:spTgt spid="7"/>
-                                        </p:tgtEl>
-                                      </p:cBhvr>
-                                    </p:animEffect>
-                                  </p:childTnLst>
-                                </p:cTn>
-                              </p:par>
-                            </p:childTnLst>
-                          </p:cTn>
-                        </p:par>
-                      </p:childTnLst>
-                    </p:cTn>
-                  </p:par>
-                </p:childTnLst>
-              </p:cTn>
-              <p:prevCondLst>
-                <p:cond evt="onPrev" delay="0">
-                  <p:tgtEl>
-                    <p:sldTgt/>
-                  </p:tgtEl>
-                </p:cond>
-              </p:prevCondLst>
-              <p:nextCondLst>
-                <p:cond evt="onNext" delay="0">
-                  <p:tgtEl>
-                    <p:sldTgt/>
-                  </p:tgtEl>
-                </p:cond>
-              </p:nextCondLst>
-            </p:seq>
-          </p:childTnLst>
-        </p:cTn>
-      </p:par>
-    </p:tnLst>
-    <p:bldLst>
-      <p:bldP spid="7" grpId="0" animBg="1"/>
-    </p:bldLst>
-  </p:timing>
-</p:sld>
-</file>
-
-<file path=ppt/slides/slide19.xml><?xml version="1.0" encoding="utf-8"?>
-<p:sld xmlns:a="http://schemas.openxmlformats.org/drawingml/2006/main" xmlns:r="http://schemas.openxmlformats.org/officeDocument/2006/relationships" xmlns:p="http://schemas.openxmlformats.org/presentationml/2006/main" showMasterPhAnim="0">
-  <p:cSld>
-    <p:spTree>
-      <p:nvGrpSpPr>
-        <p:cNvPr id="1" name=""/>
-        <p:cNvGrpSpPr/>
-        <p:nvPr/>
-      </p:nvGrpSpPr>
-      <p:grpSpPr>
-        <a:xfrm>
-          <a:off x="0" y="0"/>
-          <a:ext cx="0" cy="0"/>
-          <a:chOff x="0" y="0"/>
-          <a:chExt cx="0" cy="0"/>
-        </a:xfrm>
-      </p:grpSpPr>
-      <p:sp>
-        <p:nvSpPr>
-          <p:cNvPr id="46082" name="Rectangle 2"/>
-          <p:cNvSpPr>
-            <a:spLocks noGrp="1" noChangeArrowheads="1"/>
-          </p:cNvSpPr>
-          <p:nvPr>
-            <p:ph type="title"/>
-          </p:nvPr>
-        </p:nvSpPr>
-        <p:spPr/>
-        <p:txBody>
-          <a:bodyPr/>
-          <a:lstStyle/>
-          <a:p>
-            <a:pPr eaLnBrk="1" hangingPunct="1"/>
-            <a:r>
-              <a:rPr lang="en-US" dirty="0">
-                <a:ea typeface="ＭＳ Ｐゴシック" pitchFamily="34" charset="-128"/>
-              </a:rPr>
-              <a:t>Block Designs</a:t>
-            </a:r>
-          </a:p>
-        </p:txBody>
-      </p:sp>
-      <p:sp>
-        <p:nvSpPr>
-          <p:cNvPr id="46081" name="Slide Number Placeholder 5"/>
-          <p:cNvSpPr>
-            <a:spLocks noGrp="1"/>
-          </p:cNvSpPr>
-          <p:nvPr>
-            <p:ph type="sldNum" sz="quarter" idx="12"/>
-          </p:nvPr>
-        </p:nvSpPr>
-        <p:spPr bwMode="auto">
-          <a:noFill/>
-          <a:extLst>
-            <a:ext uri="{909E8E84-426E-40DD-AFC4-6F175D3DCCD1}">
-              <a14:hiddenFill xmlns:a14="http://schemas.microsoft.com/office/drawing/2010/main">
-                <a:solidFill>
-                  <a:srgbClr val="FFFFFF"/>
-                </a:solidFill>
-              </a14:hiddenFill>
-            </a:ext>
-            <a:ext uri="{91240B29-F687-4F45-9708-019B960494DF}">
-              <a14:hiddenLine xmlns:a14="http://schemas.microsoft.com/office/drawing/2010/main" w="9525">
-                <a:solidFill>
-                  <a:srgbClr val="000000"/>
-                </a:solidFill>
-                <a:miter lim="800000"/>
-                <a:headEnd/>
-                <a:tailEnd/>
-              </a14:hiddenLine>
-            </a:ext>
-          </a:extLst>
-        </p:spPr>
-        <p:txBody>
-          <a:bodyPr/>
-          <a:lstStyle>
-            <a:lvl1pPr>
-              <a:defRPr sz="2400">
-                <a:solidFill>
-                  <a:schemeClr val="tx1"/>
-                </a:solidFill>
-                <a:latin typeface="Arial" pitchFamily="34" charset="0"/>
-                <a:ea typeface="ＭＳ Ｐゴシック" pitchFamily="34" charset="-128"/>
-              </a:defRPr>
-            </a:lvl1pPr>
-            <a:lvl2pPr marL="742950" indent="-285750">
-              <a:defRPr sz="2400">
-                <a:solidFill>
-                  <a:schemeClr val="tx1"/>
-                </a:solidFill>
-                <a:latin typeface="Arial" pitchFamily="34" charset="0"/>
-                <a:ea typeface="ＭＳ Ｐゴシック" pitchFamily="34" charset="-128"/>
-              </a:defRPr>
-            </a:lvl2pPr>
-            <a:lvl3pPr marL="1143000" indent="-228600">
-              <a:defRPr sz="2400">
-                <a:solidFill>
-                  <a:schemeClr val="tx1"/>
-                </a:solidFill>
-                <a:latin typeface="Arial" pitchFamily="34" charset="0"/>
-                <a:ea typeface="ＭＳ Ｐゴシック" pitchFamily="34" charset="-128"/>
-              </a:defRPr>
-            </a:lvl3pPr>
-            <a:lvl4pPr marL="1600200" indent="-228600">
-              <a:defRPr sz="2400">
-                <a:solidFill>
-                  <a:schemeClr val="tx1"/>
-                </a:solidFill>
-                <a:latin typeface="Arial" pitchFamily="34" charset="0"/>
-                <a:ea typeface="ＭＳ Ｐゴシック" pitchFamily="34" charset="-128"/>
-              </a:defRPr>
-            </a:lvl4pPr>
-            <a:lvl5pPr marL="2057400" indent="-228600">
-              <a:defRPr sz="2400">
-                <a:solidFill>
-                  <a:schemeClr val="tx1"/>
-                </a:solidFill>
-                <a:latin typeface="Arial" pitchFamily="34" charset="0"/>
-                <a:ea typeface="ＭＳ Ｐゴシック" pitchFamily="34" charset="-128"/>
-              </a:defRPr>
-            </a:lvl5pPr>
-            <a:lvl6pPr marL="2514600" indent="-228600" defTabSz="457200" eaLnBrk="0" fontAlgn="base" hangingPunct="0">
-              <a:spcBef>
-                <a:spcPct val="0"/>
-              </a:spcBef>
-              <a:spcAft>
-                <a:spcPct val="0"/>
-              </a:spcAft>
-              <a:defRPr sz="2400">
-                <a:solidFill>
-                  <a:schemeClr val="tx1"/>
-                </a:solidFill>
-                <a:latin typeface="Arial" pitchFamily="34" charset="0"/>
-                <a:ea typeface="ＭＳ Ｐゴシック" pitchFamily="34" charset="-128"/>
-              </a:defRPr>
-            </a:lvl6pPr>
-            <a:lvl7pPr marL="2971800" indent="-228600" defTabSz="457200" eaLnBrk="0" fontAlgn="base" hangingPunct="0">
-              <a:spcBef>
-                <a:spcPct val="0"/>
-              </a:spcBef>
-              <a:spcAft>
-                <a:spcPct val="0"/>
-              </a:spcAft>
-              <a:defRPr sz="2400">
-                <a:solidFill>
-                  <a:schemeClr val="tx1"/>
-                </a:solidFill>
-                <a:latin typeface="Arial" pitchFamily="34" charset="0"/>
-                <a:ea typeface="ＭＳ Ｐゴシック" pitchFamily="34" charset="-128"/>
-              </a:defRPr>
-            </a:lvl7pPr>
-            <a:lvl8pPr marL="3429000" indent="-228600" defTabSz="457200" eaLnBrk="0" fontAlgn="base" hangingPunct="0">
-              <a:spcBef>
-                <a:spcPct val="0"/>
-              </a:spcBef>
-              <a:spcAft>
-                <a:spcPct val="0"/>
-              </a:spcAft>
-              <a:defRPr sz="2400">
-                <a:solidFill>
-                  <a:schemeClr val="tx1"/>
-                </a:solidFill>
-                <a:latin typeface="Arial" pitchFamily="34" charset="0"/>
-                <a:ea typeface="ＭＳ Ｐゴシック" pitchFamily="34" charset="-128"/>
-              </a:defRPr>
-            </a:lvl8pPr>
-            <a:lvl9pPr marL="3886200" indent="-228600" defTabSz="457200" eaLnBrk="0" fontAlgn="base" hangingPunct="0">
-              <a:spcBef>
-                <a:spcPct val="0"/>
-              </a:spcBef>
-              <a:spcAft>
-                <a:spcPct val="0"/>
-              </a:spcAft>
-              <a:defRPr sz="2400">
-                <a:solidFill>
-                  <a:schemeClr val="tx1"/>
-                </a:solidFill>
-                <a:latin typeface="Arial" pitchFamily="34" charset="0"/>
-                <a:ea typeface="ＭＳ Ｐゴシック" pitchFamily="34" charset="-128"/>
-              </a:defRPr>
-            </a:lvl9pPr>
-          </a:lstStyle>
-          <a:p>
-            <a:pPr>
-              <a:lnSpc>
-                <a:spcPct val="80000"/>
-              </a:lnSpc>
-            </a:pPr>
-            <a:fld id="{3441456D-DFB5-49DB-A121-9AFDE4CCCA00}" type="slidenum">
-              <a:rPr lang="en-US" sz="1200">
-                <a:solidFill>
-                  <a:schemeClr val="accent1"/>
-                </a:solidFill>
-              </a:rPr>
-              <a:pPr>
-                <a:lnSpc>
-                  <a:spcPct val="80000"/>
-                </a:lnSpc>
-              </a:pPr>
-              <a:t>19</a:t>
-            </a:fld>
-            <a:endParaRPr lang="en-US" sz="1200" dirty="0">
-              <a:solidFill>
-                <a:schemeClr val="accent1"/>
-              </a:solidFill>
-            </a:endParaRPr>
-          </a:p>
-        </p:txBody>
-      </p:sp>
-      <p:sp>
-        <p:nvSpPr>
-          <p:cNvPr id="10" name="TextBox 9"/>
-          <p:cNvSpPr txBox="1">
-            <a:spLocks noChangeArrowheads="1"/>
-          </p:cNvSpPr>
-          <p:nvPr/>
-        </p:nvSpPr>
-        <p:spPr bwMode="auto">
-          <a:xfrm>
-            <a:off x="540298" y="1468157"/>
-            <a:ext cx="7947025" cy="1785104"/>
-          </a:xfrm>
-          <a:prstGeom prst="rect">
-            <a:avLst/>
-          </a:prstGeom>
-          <a:solidFill>
-            <a:srgbClr val="EAEDCB"/>
-          </a:solidFill>
-          <a:ln w="10000">
-            <a:solidFill>
-              <a:srgbClr val="D2DA7A"/>
-            </a:solidFill>
-            <a:miter lim="800000"/>
-            <a:headEnd/>
-            <a:tailEnd/>
-          </a:ln>
-          <a:effectLst>
-            <a:outerShdw blurRad="38100" dist="30000" dir="5400000" rotWithShape="0">
-              <a:srgbClr val="808080">
-                <a:alpha val="45000"/>
-              </a:srgbClr>
-            </a:outerShdw>
-          </a:effectLst>
-        </p:spPr>
-        <p:txBody>
-          <a:bodyPr>
-            <a:spAutoFit/>
-          </a:bodyPr>
-          <a:lstStyle>
-            <a:lvl1pPr eaLnBrk="0" hangingPunct="0">
-              <a:defRPr sz="2400">
-                <a:solidFill>
-                  <a:schemeClr val="tx1"/>
-                </a:solidFill>
-                <a:latin typeface="Arial" charset="0"/>
-                <a:ea typeface="ＭＳ Ｐゴシック" pitchFamily="-65" charset="-128"/>
-              </a:defRPr>
-            </a:lvl1pPr>
-            <a:lvl2pPr marL="37931725" indent="-37474525" eaLnBrk="0" hangingPunct="0">
-              <a:defRPr sz="2400">
-                <a:solidFill>
-                  <a:schemeClr val="tx1"/>
-                </a:solidFill>
-                <a:latin typeface="Arial" charset="0"/>
-                <a:ea typeface="ＭＳ Ｐゴシック" pitchFamily="-65" charset="-128"/>
-              </a:defRPr>
-            </a:lvl2pPr>
-            <a:lvl3pPr eaLnBrk="0" hangingPunct="0">
-              <a:defRPr sz="2400">
-                <a:solidFill>
-                  <a:schemeClr val="tx1"/>
-                </a:solidFill>
-                <a:latin typeface="Arial" charset="0"/>
-                <a:ea typeface="ＭＳ Ｐゴシック" pitchFamily="-65" charset="-128"/>
-              </a:defRPr>
-            </a:lvl3pPr>
-            <a:lvl4pPr eaLnBrk="0" hangingPunct="0">
-              <a:defRPr sz="2400">
-                <a:solidFill>
-                  <a:schemeClr val="tx1"/>
-                </a:solidFill>
-                <a:latin typeface="Arial" charset="0"/>
-                <a:ea typeface="ＭＳ Ｐゴシック" pitchFamily="-65" charset="-128"/>
-              </a:defRPr>
-            </a:lvl4pPr>
-            <a:lvl5pPr eaLnBrk="0" hangingPunct="0">
-              <a:defRPr sz="2400">
-                <a:solidFill>
-                  <a:schemeClr val="tx1"/>
-                </a:solidFill>
-                <a:latin typeface="Arial" charset="0"/>
-                <a:ea typeface="ＭＳ Ｐゴシック" pitchFamily="-65" charset="-128"/>
-              </a:defRPr>
-            </a:lvl5pPr>
-            <a:lvl6pPr marL="457200" eaLnBrk="0" fontAlgn="base" hangingPunct="0">
-              <a:spcBef>
-                <a:spcPct val="0"/>
-              </a:spcBef>
-              <a:spcAft>
-                <a:spcPct val="0"/>
-              </a:spcAft>
-              <a:defRPr sz="2400">
-                <a:solidFill>
-                  <a:schemeClr val="tx1"/>
-                </a:solidFill>
-                <a:latin typeface="Arial" charset="0"/>
-                <a:ea typeface="ＭＳ Ｐゴシック" pitchFamily="-65" charset="-128"/>
-              </a:defRPr>
-            </a:lvl6pPr>
-            <a:lvl7pPr marL="914400" eaLnBrk="0" fontAlgn="base" hangingPunct="0">
-              <a:spcBef>
-                <a:spcPct val="0"/>
-              </a:spcBef>
-              <a:spcAft>
-                <a:spcPct val="0"/>
-              </a:spcAft>
-              <a:defRPr sz="2400">
-                <a:solidFill>
-                  <a:schemeClr val="tx1"/>
-                </a:solidFill>
-                <a:latin typeface="Arial" charset="0"/>
-                <a:ea typeface="ＭＳ Ｐゴシック" pitchFamily="-65" charset="-128"/>
-              </a:defRPr>
-            </a:lvl7pPr>
-            <a:lvl8pPr marL="1371600" eaLnBrk="0" fontAlgn="base" hangingPunct="0">
-              <a:spcBef>
-                <a:spcPct val="0"/>
-              </a:spcBef>
-              <a:spcAft>
-                <a:spcPct val="0"/>
-              </a:spcAft>
-              <a:defRPr sz="2400">
-                <a:solidFill>
-                  <a:schemeClr val="tx1"/>
-                </a:solidFill>
-                <a:latin typeface="Arial" charset="0"/>
-                <a:ea typeface="ＭＳ Ｐゴシック" pitchFamily="-65" charset="-128"/>
-              </a:defRPr>
-            </a:lvl8pPr>
-            <a:lvl9pPr marL="1828800" eaLnBrk="0" fontAlgn="base" hangingPunct="0">
-              <a:spcBef>
-                <a:spcPct val="0"/>
-              </a:spcBef>
-              <a:spcAft>
-                <a:spcPct val="0"/>
-              </a:spcAft>
-              <a:defRPr sz="2400">
-                <a:solidFill>
-                  <a:schemeClr val="tx1"/>
-                </a:solidFill>
-                <a:latin typeface="Arial" charset="0"/>
-                <a:ea typeface="ＭＳ Ｐゴシック" pitchFamily="-65" charset="-128"/>
-              </a:defRPr>
-            </a:lvl9pPr>
-          </a:lstStyle>
-          <a:p>
-            <a:pPr eaLnBrk="1" hangingPunct="1">
-              <a:spcAft>
-                <a:spcPts val="1200"/>
-              </a:spcAft>
-              <a:defRPr/>
-            </a:pPr>
-            <a:r>
-              <a:rPr lang="en-US" altLang="en-US" sz="2000" dirty="0">
-                <a:solidFill>
-                  <a:srgbClr val="000000"/>
-                </a:solidFill>
-              </a:rPr>
-              <a:t>A </a:t>
-            </a:r>
-            <a:r>
-              <a:rPr lang="en-US" altLang="en-US" sz="2000" b="1" dirty="0">
-                <a:solidFill>
-                  <a:srgbClr val="800000"/>
-                </a:solidFill>
-              </a:rPr>
-              <a:t>block</a:t>
-            </a:r>
-            <a:r>
-              <a:rPr lang="en-US" altLang="en-US" sz="2000" b="1" dirty="0">
-                <a:solidFill>
-                  <a:srgbClr val="000000"/>
-                </a:solidFill>
-              </a:rPr>
-              <a:t> </a:t>
-            </a:r>
-            <a:r>
-              <a:rPr lang="en-US" altLang="en-US" sz="2000" dirty="0">
-                <a:solidFill>
-                  <a:srgbClr val="000000"/>
-                </a:solidFill>
-              </a:rPr>
-              <a:t>is a group of experimental units that are known before the experiment to be similar in some way that is expected to affect the response to the treatments. </a:t>
-            </a:r>
-          </a:p>
-          <a:p>
-            <a:pPr eaLnBrk="1" hangingPunct="1">
-              <a:spcAft>
-                <a:spcPts val="1200"/>
-              </a:spcAft>
-              <a:defRPr/>
-            </a:pPr>
-            <a:r>
-              <a:rPr lang="en-US" altLang="en-US" sz="2000" dirty="0">
-                <a:solidFill>
-                  <a:srgbClr val="000000"/>
-                </a:solidFill>
-              </a:rPr>
-              <a:t>In a </a:t>
-            </a:r>
-            <a:r>
-              <a:rPr lang="en-US" altLang="en-US" sz="2000" b="1" dirty="0">
-                <a:solidFill>
-                  <a:srgbClr val="800000"/>
-                </a:solidFill>
-              </a:rPr>
-              <a:t>block design</a:t>
-            </a:r>
-            <a:r>
-              <a:rPr lang="en-US" altLang="en-US" sz="2000" dirty="0">
-                <a:solidFill>
-                  <a:srgbClr val="000000"/>
-                </a:solidFill>
-              </a:rPr>
-              <a:t>, the random assignment of experimental units to treatments is carried out separately within each block.</a:t>
-            </a:r>
-          </a:p>
-        </p:txBody>
-      </p:sp>
-      <p:sp>
-        <p:nvSpPr>
-          <p:cNvPr id="3" name="TextBox 2">
-            <a:extLst>
-              <a:ext uri="{FF2B5EF4-FFF2-40B4-BE49-F238E27FC236}">
-                <a16:creationId xmlns:a16="http://schemas.microsoft.com/office/drawing/2014/main" id="{CD2B8BE2-B24B-8CCA-2A92-723074F17292}"/>
-              </a:ext>
-            </a:extLst>
-          </p:cNvPr>
-          <p:cNvSpPr txBox="1"/>
-          <p:nvPr/>
-        </p:nvSpPr>
-        <p:spPr>
-          <a:xfrm>
-            <a:off x="1418601" y="3606105"/>
-            <a:ext cx="5535538" cy="646331"/>
-          </a:xfrm>
-          <a:prstGeom prst="rect">
-            <a:avLst/>
-          </a:prstGeom>
-          <a:noFill/>
-        </p:spPr>
-        <p:txBody>
-          <a:bodyPr wrap="square">
-            <a:spAutoFit/>
-          </a:bodyPr>
-          <a:lstStyle/>
-          <a:p>
-            <a:r>
-              <a:rPr lang="en-US" dirty="0"/>
-              <a:t>“Block what you can; randomize what you cannot.”</a:t>
-            </a:r>
-          </a:p>
-          <a:p>
-            <a:pPr algn="r"/>
-            <a:r>
-              <a:rPr lang="en-US" dirty="0"/>
-              <a:t>— Box, Hunter, and Hunter (1978)</a:t>
-            </a:r>
-          </a:p>
-        </p:txBody>
-      </p:sp>
-      <p:sp>
-        <p:nvSpPr>
-          <p:cNvPr id="4" name="TextBox 3">
-            <a:extLst>
-              <a:ext uri="{FF2B5EF4-FFF2-40B4-BE49-F238E27FC236}">
-                <a16:creationId xmlns:a16="http://schemas.microsoft.com/office/drawing/2014/main" id="{0DF6336C-BAB6-FABE-06D2-E9BD5BC003B0}"/>
-              </a:ext>
-            </a:extLst>
-          </p:cNvPr>
-          <p:cNvSpPr txBox="1">
-            <a:spLocks noChangeArrowheads="1"/>
-          </p:cNvSpPr>
-          <p:nvPr/>
-        </p:nvSpPr>
-        <p:spPr bwMode="auto">
-          <a:xfrm>
-            <a:off x="540297" y="4497291"/>
-            <a:ext cx="7947025" cy="1015663"/>
-          </a:xfrm>
-          <a:prstGeom prst="rect">
-            <a:avLst/>
-          </a:prstGeom>
-          <a:solidFill>
-            <a:srgbClr val="EAEDCB"/>
-          </a:solidFill>
-          <a:ln w="10000">
-            <a:solidFill>
-              <a:srgbClr val="D2DA7A"/>
-            </a:solidFill>
-            <a:miter lim="800000"/>
-            <a:headEnd/>
-            <a:tailEnd/>
-          </a:ln>
-          <a:effectLst>
-            <a:outerShdw blurRad="38100" dist="30000" dir="5400000" rotWithShape="0">
-              <a:srgbClr val="808080">
-                <a:alpha val="45000"/>
-              </a:srgbClr>
-            </a:outerShdw>
-          </a:effectLst>
-        </p:spPr>
-        <p:txBody>
-          <a:bodyPr>
-            <a:spAutoFit/>
-          </a:bodyPr>
-          <a:lstStyle>
-            <a:lvl1pPr eaLnBrk="0" hangingPunct="0">
-              <a:defRPr sz="2400">
-                <a:solidFill>
-                  <a:schemeClr val="tx1"/>
-                </a:solidFill>
-                <a:latin typeface="Arial" charset="0"/>
-                <a:ea typeface="ＭＳ Ｐゴシック" pitchFamily="-65" charset="-128"/>
-              </a:defRPr>
-            </a:lvl1pPr>
-            <a:lvl2pPr marL="37931725" indent="-37474525" eaLnBrk="0" hangingPunct="0">
-              <a:defRPr sz="2400">
-                <a:solidFill>
-                  <a:schemeClr val="tx1"/>
-                </a:solidFill>
-                <a:latin typeface="Arial" charset="0"/>
-                <a:ea typeface="ＭＳ Ｐゴシック" pitchFamily="-65" charset="-128"/>
-              </a:defRPr>
-            </a:lvl2pPr>
-            <a:lvl3pPr eaLnBrk="0" hangingPunct="0">
-              <a:defRPr sz="2400">
-                <a:solidFill>
-                  <a:schemeClr val="tx1"/>
-                </a:solidFill>
-                <a:latin typeface="Arial" charset="0"/>
-                <a:ea typeface="ＭＳ Ｐゴシック" pitchFamily="-65" charset="-128"/>
-              </a:defRPr>
-            </a:lvl3pPr>
-            <a:lvl4pPr eaLnBrk="0" hangingPunct="0">
-              <a:defRPr sz="2400">
-                <a:solidFill>
-                  <a:schemeClr val="tx1"/>
-                </a:solidFill>
-                <a:latin typeface="Arial" charset="0"/>
-                <a:ea typeface="ＭＳ Ｐゴシック" pitchFamily="-65" charset="-128"/>
-              </a:defRPr>
-            </a:lvl4pPr>
-            <a:lvl5pPr eaLnBrk="0" hangingPunct="0">
-              <a:defRPr sz="2400">
-                <a:solidFill>
-                  <a:schemeClr val="tx1"/>
-                </a:solidFill>
-                <a:latin typeface="Arial" charset="0"/>
-                <a:ea typeface="ＭＳ Ｐゴシック" pitchFamily="-65" charset="-128"/>
-              </a:defRPr>
-            </a:lvl5pPr>
-            <a:lvl6pPr marL="457200" eaLnBrk="0" fontAlgn="base" hangingPunct="0">
-              <a:spcBef>
-                <a:spcPct val="0"/>
-              </a:spcBef>
-              <a:spcAft>
-                <a:spcPct val="0"/>
-              </a:spcAft>
-              <a:defRPr sz="2400">
-                <a:solidFill>
-                  <a:schemeClr val="tx1"/>
-                </a:solidFill>
-                <a:latin typeface="Arial" charset="0"/>
-                <a:ea typeface="ＭＳ Ｐゴシック" pitchFamily="-65" charset="-128"/>
-              </a:defRPr>
-            </a:lvl6pPr>
-            <a:lvl7pPr marL="914400" eaLnBrk="0" fontAlgn="base" hangingPunct="0">
-              <a:spcBef>
-                <a:spcPct val="0"/>
-              </a:spcBef>
-              <a:spcAft>
-                <a:spcPct val="0"/>
-              </a:spcAft>
-              <a:defRPr sz="2400">
-                <a:solidFill>
-                  <a:schemeClr val="tx1"/>
-                </a:solidFill>
-                <a:latin typeface="Arial" charset="0"/>
-                <a:ea typeface="ＭＳ Ｐゴシック" pitchFamily="-65" charset="-128"/>
-              </a:defRPr>
-            </a:lvl7pPr>
-            <a:lvl8pPr marL="1371600" eaLnBrk="0" fontAlgn="base" hangingPunct="0">
-              <a:spcBef>
-                <a:spcPct val="0"/>
-              </a:spcBef>
-              <a:spcAft>
-                <a:spcPct val="0"/>
-              </a:spcAft>
-              <a:defRPr sz="2400">
-                <a:solidFill>
-                  <a:schemeClr val="tx1"/>
-                </a:solidFill>
-                <a:latin typeface="Arial" charset="0"/>
-                <a:ea typeface="ＭＳ Ｐゴシック" pitchFamily="-65" charset="-128"/>
-              </a:defRPr>
-            </a:lvl8pPr>
-            <a:lvl9pPr marL="1828800" eaLnBrk="0" fontAlgn="base" hangingPunct="0">
-              <a:spcBef>
-                <a:spcPct val="0"/>
-              </a:spcBef>
-              <a:spcAft>
-                <a:spcPct val="0"/>
-              </a:spcAft>
-              <a:defRPr sz="2400">
-                <a:solidFill>
-                  <a:schemeClr val="tx1"/>
-                </a:solidFill>
-                <a:latin typeface="Arial" charset="0"/>
-                <a:ea typeface="ＭＳ Ｐゴシック" pitchFamily="-65" charset="-128"/>
-              </a:defRPr>
-            </a:lvl9pPr>
-          </a:lstStyle>
-          <a:p>
-            <a:pPr eaLnBrk="1" hangingPunct="1">
-              <a:spcAft>
-                <a:spcPts val="1200"/>
-              </a:spcAft>
-              <a:defRPr/>
-            </a:pPr>
-            <a:r>
-              <a:rPr lang="en-US" altLang="en-US" sz="2000" dirty="0">
-                <a:solidFill>
-                  <a:srgbClr val="000000"/>
-                </a:solidFill>
-              </a:rPr>
-              <a:t>Use blocking for important known sources of variation, then use randomization to protect against remaining uncontrolled/unknown sources.</a:t>
-            </a:r>
-          </a:p>
-        </p:txBody>
-      </p:sp>
-    </p:spTree>
-  </p:cSld>
-  <p:clrMapOvr>
-    <a:masterClrMapping/>
-  </p:clrMapOvr>
-  <p:transition spd="med">
-    <p:fade/>
-  </p:transition>
-  <p:timing>
-    <p:tnLst>
-      <p:par>
-        <p:cTn id="1" dur="indefinite" restart="never" nodeType="tmRoot">
-          <p:childTnLst>
-            <p:seq concurrent="1" nextAc="seek">
-              <p:cTn id="2" dur="indefinite" nodeType="mainSeq">
-                <p:childTnLst>
-                  <p:par>
-                    <p:cTn id="3" fill="hold" nodeType="clickPar">
-                      <p:stCondLst>
-                        <p:cond delay="indefinite"/>
-                      </p:stCondLst>
-                      <p:childTnLst>
-                        <p:par>
-                          <p:cTn id="4" fill="hold" nodeType="withGroup">
-                            <p:stCondLst>
-                              <p:cond delay="0"/>
-                            </p:stCondLst>
-                            <p:childTnLst>
-                              <p:par>
-                                <p:cTn id="5" presetID="10" presetClass="entr" presetSubtype="0" fill="hold" grpId="0" nodeType="clickEffect">
-                                  <p:stCondLst>
-                                    <p:cond delay="0"/>
-                                  </p:stCondLst>
-                                  <p:childTnLst>
-                                    <p:set>
-                                      <p:cBhvr>
-                                        <p:cTn id="6" dur="1" fill="hold">
-                                          <p:stCondLst>
-                                            <p:cond delay="0"/>
-                                          </p:stCondLst>
-                                        </p:cTn>
-                                        <p:tgtEl>
-                                          <p:spTgt spid="10"/>
-                                        </p:tgtEl>
-                                        <p:attrNameLst>
-                                          <p:attrName>style.visibility</p:attrName>
-                                        </p:attrNameLst>
-                                      </p:cBhvr>
-                                      <p:to>
-                                        <p:strVal val="visible"/>
-                                      </p:to>
-                                    </p:set>
-                                    <p:animEffect transition="in" filter="fade">
-                                      <p:cBhvr>
-                                        <p:cTn id="7" dur="1000"/>
-                                        <p:tgtEl>
-                                          <p:spTgt spid="10"/>
-                                        </p:tgtEl>
-                                      </p:cBhvr>
-                                    </p:animEffect>
-                                  </p:childTnLst>
-                                </p:cTn>
-                              </p:par>
-                            </p:childTnLst>
-                          </p:cTn>
-                        </p:par>
-                      </p:childTnLst>
-                    </p:cTn>
-                  </p:par>
-                  <p:par>
-                    <p:cTn id="8" fill="hold">
-                      <p:stCondLst>
-                        <p:cond delay="indefinite"/>
-                      </p:stCondLst>
-                      <p:childTnLst>
-                        <p:par>
-                          <p:cTn id="9" fill="hold">
-                            <p:stCondLst>
-                              <p:cond delay="0"/>
-                            </p:stCondLst>
-                            <p:childTnLst>
-                              <p:par>
-                                <p:cTn id="10" presetID="10" presetClass="entr" presetSubtype="0" fill="hold" grpId="0" nodeType="clickEffect">
-                                  <p:stCondLst>
-                                    <p:cond delay="0"/>
-                                  </p:stCondLst>
-                                  <p:childTnLst>
-                                    <p:set>
-                                      <p:cBhvr>
-                                        <p:cTn id="11" dur="1" fill="hold">
-                                          <p:stCondLst>
-                                            <p:cond delay="0"/>
-                                          </p:stCondLst>
-                                        </p:cTn>
-                                        <p:tgtEl>
-                                          <p:spTgt spid="4"/>
-                                        </p:tgtEl>
-                                        <p:attrNameLst>
-                                          <p:attrName>style.visibility</p:attrName>
-                                        </p:attrNameLst>
-                                      </p:cBhvr>
-                                      <p:to>
-                                        <p:strVal val="visible"/>
-                                      </p:to>
-                                    </p:set>
-                                    <p:animEffect transition="in" filter="fade">
-                                      <p:cBhvr>
-                                        <p:cTn id="12" dur="1000"/>
-                                        <p:tgtEl>
-                                          <p:spTgt spid="4"/>
-                                        </p:tgtEl>
-                                      </p:cBhvr>
-                                    </p:animEffect>
-                                  </p:childTnLst>
-                                </p:cTn>
-                              </p:par>
-                            </p:childTnLst>
-                          </p:cTn>
-                        </p:par>
-                      </p:childTnLst>
-                    </p:cTn>
-                  </p:par>
-                </p:childTnLst>
-              </p:cTn>
-              <p:prevCondLst>
-                <p:cond evt="onPrev" delay="0">
-                  <p:tgtEl>
-                    <p:sldTgt/>
-                  </p:tgtEl>
-                </p:cond>
-              </p:prevCondLst>
-              <p:nextCondLst>
-                <p:cond evt="onNext" delay="0">
-                  <p:tgtEl>
-                    <p:sldTgt/>
-                  </p:tgtEl>
-                </p:cond>
-              </p:nextCondLst>
-            </p:seq>
-          </p:childTnLst>
-        </p:cTn>
-      </p:par>
-    </p:tnLst>
-    <p:bldLst>
-      <p:bldP spid="10" grpId="0" animBg="1"/>
-      <p:bldP spid="4" grpId="0" animBg="1"/>
-    </p:bldLst>
-  </p:timing>
-</p:sld>
-</file>
-
 <file path=ppt/slides/slide2.xml><?xml version="1.0" encoding="utf-8"?>
 <p:sld xmlns:a="http://schemas.openxmlformats.org/drawingml/2006/main" xmlns:r="http://schemas.openxmlformats.org/officeDocument/2006/relationships" xmlns:p="http://schemas.openxmlformats.org/presentationml/2006/main">
   <p:cSld>
@@ -17954,25 +17474,6 @@
           <a:bodyPr/>
           <a:lstStyle/>
           <a:p>
-            <a:pPr marL="0" indent="0" eaLnBrk="1" hangingPunct="1">
-              <a:spcBef>
-                <a:spcPts val="0"/>
-              </a:spcBef>
-              <a:spcAft>
-                <a:spcPts val="1800"/>
-              </a:spcAft>
-              <a:buNone/>
-            </a:pPr>
-            <a:r>
-              <a:rPr lang="en-US" sz="2400" b="1" dirty="0">
-                <a:solidFill>
-                  <a:schemeClr val="accent1"/>
-                </a:solidFill>
-              </a:rPr>
-              <a:t>Introduction</a:t>
-            </a:r>
-          </a:p>
-          <a:p>
             <a:pPr marL="0" indent="0" defTabSz="914400" eaLnBrk="1" hangingPunct="1">
               <a:spcBef>
                 <a:spcPts val="0"/>
@@ -18027,25 +17528,6 @@
                 </a:solidFill>
               </a:rPr>
               <a:t>3.3 Sampling Design</a:t>
-            </a:r>
-          </a:p>
-          <a:p>
-            <a:pPr marL="0" indent="0" defTabSz="914400" eaLnBrk="1" hangingPunct="1">
-              <a:spcBef>
-                <a:spcPts val="0"/>
-              </a:spcBef>
-              <a:spcAft>
-                <a:spcPts val="1800"/>
-              </a:spcAft>
-              <a:buNone/>
-            </a:pPr>
-            <a:r>
-              <a:rPr lang="en-US" sz="2400" b="1" dirty="0">
-                <a:solidFill>
-                  <a:schemeClr val="accent1"/>
-                </a:solidFill>
-              </a:rPr>
-              <a:t>3.4 Ethics</a:t>
             </a:r>
           </a:p>
         </p:txBody>
@@ -18088,616 +17570,6 @@
 </file>
 
 <file path=ppt/slides/slide20.xml><?xml version="1.0" encoding="utf-8"?>
-<p:sld xmlns:a="http://schemas.openxmlformats.org/drawingml/2006/main" xmlns:r="http://schemas.openxmlformats.org/officeDocument/2006/relationships" xmlns:p="http://schemas.openxmlformats.org/presentationml/2006/main" showMasterPhAnim="0">
-  <p:cSld>
-    <p:spTree>
-      <p:nvGrpSpPr>
-        <p:cNvPr id="1" name="">
-          <a:extLst>
-            <a:ext uri="{FF2B5EF4-FFF2-40B4-BE49-F238E27FC236}">
-              <a16:creationId xmlns:a16="http://schemas.microsoft.com/office/drawing/2014/main" id="{A8BDB338-09B8-DAC9-A710-F02D2A03CAFA}"/>
-            </a:ext>
-          </a:extLst>
-        </p:cNvPr>
-        <p:cNvGrpSpPr/>
-        <p:nvPr/>
-      </p:nvGrpSpPr>
-      <p:grpSpPr>
-        <a:xfrm>
-          <a:off x="0" y="0"/>
-          <a:ext cx="0" cy="0"/>
-          <a:chOff x="0" y="0"/>
-          <a:chExt cx="0" cy="0"/>
-        </a:xfrm>
-      </p:grpSpPr>
-      <p:sp>
-        <p:nvSpPr>
-          <p:cNvPr id="46082" name="Rectangle 2">
-            <a:extLst>
-              <a:ext uri="{FF2B5EF4-FFF2-40B4-BE49-F238E27FC236}">
-                <a16:creationId xmlns:a16="http://schemas.microsoft.com/office/drawing/2014/main" id="{90C0279F-1C1B-27C5-E335-93360B972F47}"/>
-              </a:ext>
-            </a:extLst>
-          </p:cNvPr>
-          <p:cNvSpPr>
-            <a:spLocks noGrp="1" noChangeArrowheads="1"/>
-          </p:cNvSpPr>
-          <p:nvPr>
-            <p:ph type="title"/>
-          </p:nvPr>
-        </p:nvSpPr>
-        <p:spPr/>
-        <p:txBody>
-          <a:bodyPr/>
-          <a:lstStyle/>
-          <a:p>
-            <a:pPr eaLnBrk="1" hangingPunct="1"/>
-            <a:r>
-              <a:rPr lang="en-US" dirty="0">
-                <a:ea typeface="ＭＳ Ｐゴシック" pitchFamily="34" charset="-128"/>
-              </a:rPr>
-              <a:t>Block Designs</a:t>
-            </a:r>
-          </a:p>
-        </p:txBody>
-      </p:sp>
-      <p:sp>
-        <p:nvSpPr>
-          <p:cNvPr id="46081" name="Slide Number Placeholder 5">
-            <a:extLst>
-              <a:ext uri="{FF2B5EF4-FFF2-40B4-BE49-F238E27FC236}">
-                <a16:creationId xmlns:a16="http://schemas.microsoft.com/office/drawing/2014/main" id="{BAE899FD-241F-3201-82A1-08B8A48D96B4}"/>
-              </a:ext>
-            </a:extLst>
-          </p:cNvPr>
-          <p:cNvSpPr>
-            <a:spLocks noGrp="1"/>
-          </p:cNvSpPr>
-          <p:nvPr>
-            <p:ph type="sldNum" sz="quarter" idx="12"/>
-          </p:nvPr>
-        </p:nvSpPr>
-        <p:spPr bwMode="auto">
-          <a:noFill/>
-          <a:extLst>
-            <a:ext uri="{909E8E84-426E-40DD-AFC4-6F175D3DCCD1}">
-              <a14:hiddenFill xmlns:a14="http://schemas.microsoft.com/office/drawing/2010/main">
-                <a:solidFill>
-                  <a:srgbClr val="FFFFFF"/>
-                </a:solidFill>
-              </a14:hiddenFill>
-            </a:ext>
-            <a:ext uri="{91240B29-F687-4F45-9708-019B960494DF}">
-              <a14:hiddenLine xmlns:a14="http://schemas.microsoft.com/office/drawing/2010/main" w="9525">
-                <a:solidFill>
-                  <a:srgbClr val="000000"/>
-                </a:solidFill>
-                <a:miter lim="800000"/>
-                <a:headEnd/>
-                <a:tailEnd/>
-              </a14:hiddenLine>
-            </a:ext>
-          </a:extLst>
-        </p:spPr>
-        <p:txBody>
-          <a:bodyPr/>
-          <a:lstStyle>
-            <a:lvl1pPr>
-              <a:defRPr sz="2400">
-                <a:solidFill>
-                  <a:schemeClr val="tx1"/>
-                </a:solidFill>
-                <a:latin typeface="Arial" pitchFamily="34" charset="0"/>
-                <a:ea typeface="ＭＳ Ｐゴシック" pitchFamily="34" charset="-128"/>
-              </a:defRPr>
-            </a:lvl1pPr>
-            <a:lvl2pPr marL="742950" indent="-285750">
-              <a:defRPr sz="2400">
-                <a:solidFill>
-                  <a:schemeClr val="tx1"/>
-                </a:solidFill>
-                <a:latin typeface="Arial" pitchFamily="34" charset="0"/>
-                <a:ea typeface="ＭＳ Ｐゴシック" pitchFamily="34" charset="-128"/>
-              </a:defRPr>
-            </a:lvl2pPr>
-            <a:lvl3pPr marL="1143000" indent="-228600">
-              <a:defRPr sz="2400">
-                <a:solidFill>
-                  <a:schemeClr val="tx1"/>
-                </a:solidFill>
-                <a:latin typeface="Arial" pitchFamily="34" charset="0"/>
-                <a:ea typeface="ＭＳ Ｐゴシック" pitchFamily="34" charset="-128"/>
-              </a:defRPr>
-            </a:lvl3pPr>
-            <a:lvl4pPr marL="1600200" indent="-228600">
-              <a:defRPr sz="2400">
-                <a:solidFill>
-                  <a:schemeClr val="tx1"/>
-                </a:solidFill>
-                <a:latin typeface="Arial" pitchFamily="34" charset="0"/>
-                <a:ea typeface="ＭＳ Ｐゴシック" pitchFamily="34" charset="-128"/>
-              </a:defRPr>
-            </a:lvl4pPr>
-            <a:lvl5pPr marL="2057400" indent="-228600">
-              <a:defRPr sz="2400">
-                <a:solidFill>
-                  <a:schemeClr val="tx1"/>
-                </a:solidFill>
-                <a:latin typeface="Arial" pitchFamily="34" charset="0"/>
-                <a:ea typeface="ＭＳ Ｐゴシック" pitchFamily="34" charset="-128"/>
-              </a:defRPr>
-            </a:lvl5pPr>
-            <a:lvl6pPr marL="2514600" indent="-228600" defTabSz="457200" eaLnBrk="0" fontAlgn="base" hangingPunct="0">
-              <a:spcBef>
-                <a:spcPct val="0"/>
-              </a:spcBef>
-              <a:spcAft>
-                <a:spcPct val="0"/>
-              </a:spcAft>
-              <a:defRPr sz="2400">
-                <a:solidFill>
-                  <a:schemeClr val="tx1"/>
-                </a:solidFill>
-                <a:latin typeface="Arial" pitchFamily="34" charset="0"/>
-                <a:ea typeface="ＭＳ Ｐゴシック" pitchFamily="34" charset="-128"/>
-              </a:defRPr>
-            </a:lvl6pPr>
-            <a:lvl7pPr marL="2971800" indent="-228600" defTabSz="457200" eaLnBrk="0" fontAlgn="base" hangingPunct="0">
-              <a:spcBef>
-                <a:spcPct val="0"/>
-              </a:spcBef>
-              <a:spcAft>
-                <a:spcPct val="0"/>
-              </a:spcAft>
-              <a:defRPr sz="2400">
-                <a:solidFill>
-                  <a:schemeClr val="tx1"/>
-                </a:solidFill>
-                <a:latin typeface="Arial" pitchFamily="34" charset="0"/>
-                <a:ea typeface="ＭＳ Ｐゴシック" pitchFamily="34" charset="-128"/>
-              </a:defRPr>
-            </a:lvl7pPr>
-            <a:lvl8pPr marL="3429000" indent="-228600" defTabSz="457200" eaLnBrk="0" fontAlgn="base" hangingPunct="0">
-              <a:spcBef>
-                <a:spcPct val="0"/>
-              </a:spcBef>
-              <a:spcAft>
-                <a:spcPct val="0"/>
-              </a:spcAft>
-              <a:defRPr sz="2400">
-                <a:solidFill>
-                  <a:schemeClr val="tx1"/>
-                </a:solidFill>
-                <a:latin typeface="Arial" pitchFamily="34" charset="0"/>
-                <a:ea typeface="ＭＳ Ｐゴシック" pitchFamily="34" charset="-128"/>
-              </a:defRPr>
-            </a:lvl8pPr>
-            <a:lvl9pPr marL="3886200" indent="-228600" defTabSz="457200" eaLnBrk="0" fontAlgn="base" hangingPunct="0">
-              <a:spcBef>
-                <a:spcPct val="0"/>
-              </a:spcBef>
-              <a:spcAft>
-                <a:spcPct val="0"/>
-              </a:spcAft>
-              <a:defRPr sz="2400">
-                <a:solidFill>
-                  <a:schemeClr val="tx1"/>
-                </a:solidFill>
-                <a:latin typeface="Arial" pitchFamily="34" charset="0"/>
-                <a:ea typeface="ＭＳ Ｐゴシック" pitchFamily="34" charset="-128"/>
-              </a:defRPr>
-            </a:lvl9pPr>
-          </a:lstStyle>
-          <a:p>
-            <a:pPr>
-              <a:lnSpc>
-                <a:spcPct val="80000"/>
-              </a:lnSpc>
-            </a:pPr>
-            <a:fld id="{3441456D-DFB5-49DB-A121-9AFDE4CCCA00}" type="slidenum">
-              <a:rPr lang="en-US" sz="1200">
-                <a:solidFill>
-                  <a:schemeClr val="accent1"/>
-                </a:solidFill>
-              </a:rPr>
-              <a:pPr>
-                <a:lnSpc>
-                  <a:spcPct val="80000"/>
-                </a:lnSpc>
-              </a:pPr>
-              <a:t>20</a:t>
-            </a:fld>
-            <a:endParaRPr lang="en-US" sz="1200" dirty="0">
-              <a:solidFill>
-                <a:schemeClr val="accent1"/>
-              </a:solidFill>
-            </a:endParaRPr>
-          </a:p>
-        </p:txBody>
-      </p:sp>
-      <p:sp>
-        <p:nvSpPr>
-          <p:cNvPr id="10" name="TextBox 9">
-            <a:extLst>
-              <a:ext uri="{FF2B5EF4-FFF2-40B4-BE49-F238E27FC236}">
-                <a16:creationId xmlns:a16="http://schemas.microsoft.com/office/drawing/2014/main" id="{35A17D55-1552-B6AD-12BC-D3AF76962FB9}"/>
-              </a:ext>
-            </a:extLst>
-          </p:cNvPr>
-          <p:cNvSpPr txBox="1">
-            <a:spLocks noChangeArrowheads="1"/>
-          </p:cNvSpPr>
-          <p:nvPr/>
-        </p:nvSpPr>
-        <p:spPr bwMode="auto">
-          <a:xfrm>
-            <a:off x="540298" y="1333793"/>
-            <a:ext cx="7947025" cy="2246769"/>
-          </a:xfrm>
-          <a:prstGeom prst="rect">
-            <a:avLst/>
-          </a:prstGeom>
-          <a:solidFill>
-            <a:srgbClr val="EAEDCB"/>
-          </a:solidFill>
-          <a:ln w="10000">
-            <a:solidFill>
-              <a:srgbClr val="D2DA7A"/>
-            </a:solidFill>
-            <a:miter lim="800000"/>
-            <a:headEnd/>
-            <a:tailEnd/>
-          </a:ln>
-          <a:effectLst>
-            <a:outerShdw blurRad="38100" dist="30000" dir="5400000" rotWithShape="0">
-              <a:srgbClr val="808080">
-                <a:alpha val="45000"/>
-              </a:srgbClr>
-            </a:outerShdw>
-          </a:effectLst>
-        </p:spPr>
-        <p:txBody>
-          <a:bodyPr>
-            <a:spAutoFit/>
-          </a:bodyPr>
-          <a:lstStyle>
-            <a:lvl1pPr eaLnBrk="0" hangingPunct="0">
-              <a:defRPr sz="2400">
-                <a:solidFill>
-                  <a:schemeClr val="tx1"/>
-                </a:solidFill>
-                <a:latin typeface="Arial" charset="0"/>
-                <a:ea typeface="ＭＳ Ｐゴシック" pitchFamily="-65" charset="-128"/>
-              </a:defRPr>
-            </a:lvl1pPr>
-            <a:lvl2pPr marL="37931725" indent="-37474525" eaLnBrk="0" hangingPunct="0">
-              <a:defRPr sz="2400">
-                <a:solidFill>
-                  <a:schemeClr val="tx1"/>
-                </a:solidFill>
-                <a:latin typeface="Arial" charset="0"/>
-                <a:ea typeface="ＭＳ Ｐゴシック" pitchFamily="-65" charset="-128"/>
-              </a:defRPr>
-            </a:lvl2pPr>
-            <a:lvl3pPr eaLnBrk="0" hangingPunct="0">
-              <a:defRPr sz="2400">
-                <a:solidFill>
-                  <a:schemeClr val="tx1"/>
-                </a:solidFill>
-                <a:latin typeface="Arial" charset="0"/>
-                <a:ea typeface="ＭＳ Ｐゴシック" pitchFamily="-65" charset="-128"/>
-              </a:defRPr>
-            </a:lvl3pPr>
-            <a:lvl4pPr eaLnBrk="0" hangingPunct="0">
-              <a:defRPr sz="2400">
-                <a:solidFill>
-                  <a:schemeClr val="tx1"/>
-                </a:solidFill>
-                <a:latin typeface="Arial" charset="0"/>
-                <a:ea typeface="ＭＳ Ｐゴシック" pitchFamily="-65" charset="-128"/>
-              </a:defRPr>
-            </a:lvl4pPr>
-            <a:lvl5pPr eaLnBrk="0" hangingPunct="0">
-              <a:defRPr sz="2400">
-                <a:solidFill>
-                  <a:schemeClr val="tx1"/>
-                </a:solidFill>
-                <a:latin typeface="Arial" charset="0"/>
-                <a:ea typeface="ＭＳ Ｐゴシック" pitchFamily="-65" charset="-128"/>
-              </a:defRPr>
-            </a:lvl5pPr>
-            <a:lvl6pPr marL="457200" eaLnBrk="0" fontAlgn="base" hangingPunct="0">
-              <a:spcBef>
-                <a:spcPct val="0"/>
-              </a:spcBef>
-              <a:spcAft>
-                <a:spcPct val="0"/>
-              </a:spcAft>
-              <a:defRPr sz="2400">
-                <a:solidFill>
-                  <a:schemeClr val="tx1"/>
-                </a:solidFill>
-                <a:latin typeface="Arial" charset="0"/>
-                <a:ea typeface="ＭＳ Ｐゴシック" pitchFamily="-65" charset="-128"/>
-              </a:defRPr>
-            </a:lvl6pPr>
-            <a:lvl7pPr marL="914400" eaLnBrk="0" fontAlgn="base" hangingPunct="0">
-              <a:spcBef>
-                <a:spcPct val="0"/>
-              </a:spcBef>
-              <a:spcAft>
-                <a:spcPct val="0"/>
-              </a:spcAft>
-              <a:defRPr sz="2400">
-                <a:solidFill>
-                  <a:schemeClr val="tx1"/>
-                </a:solidFill>
-                <a:latin typeface="Arial" charset="0"/>
-                <a:ea typeface="ＭＳ Ｐゴシック" pitchFamily="-65" charset="-128"/>
-              </a:defRPr>
-            </a:lvl7pPr>
-            <a:lvl8pPr marL="1371600" eaLnBrk="0" fontAlgn="base" hangingPunct="0">
-              <a:spcBef>
-                <a:spcPct val="0"/>
-              </a:spcBef>
-              <a:spcAft>
-                <a:spcPct val="0"/>
-              </a:spcAft>
-              <a:defRPr sz="2400">
-                <a:solidFill>
-                  <a:schemeClr val="tx1"/>
-                </a:solidFill>
-                <a:latin typeface="Arial" charset="0"/>
-                <a:ea typeface="ＭＳ Ｐゴシック" pitchFamily="-65" charset="-128"/>
-              </a:defRPr>
-            </a:lvl8pPr>
-            <a:lvl9pPr marL="1828800" eaLnBrk="0" fontAlgn="base" hangingPunct="0">
-              <a:spcBef>
-                <a:spcPct val="0"/>
-              </a:spcBef>
-              <a:spcAft>
-                <a:spcPct val="0"/>
-              </a:spcAft>
-              <a:defRPr sz="2400">
-                <a:solidFill>
-                  <a:schemeClr val="tx1"/>
-                </a:solidFill>
-                <a:latin typeface="Arial" charset="0"/>
-                <a:ea typeface="ＭＳ Ｐゴシック" pitchFamily="-65" charset="-128"/>
-              </a:defRPr>
-            </a:lvl9pPr>
-          </a:lstStyle>
-          <a:p>
-            <a:r>
-              <a:rPr lang="en-US" altLang="en-US" sz="2000" dirty="0">
-                <a:solidFill>
-                  <a:srgbClr val="000000"/>
-                </a:solidFill>
-              </a:rPr>
-              <a:t>(</a:t>
-            </a:r>
-            <a:r>
-              <a:rPr lang="en-US" altLang="zh-CN" sz="2000" dirty="0">
-                <a:solidFill>
-                  <a:srgbClr val="000000"/>
-                </a:solidFill>
-              </a:rPr>
-              <a:t>E</a:t>
-            </a:r>
-            <a:r>
-              <a:rPr lang="en-US" altLang="en-US" sz="2000" dirty="0">
-                <a:solidFill>
-                  <a:srgbClr val="000000"/>
-                </a:solidFill>
-              </a:rPr>
-              <a:t>xample 3.18: </a:t>
-            </a:r>
-            <a:r>
-              <a:rPr lang="en-US" altLang="en-US" sz="2000" dirty="0"/>
-              <a:t>C</a:t>
-            </a:r>
-            <a:r>
-              <a:rPr lang="en-US" sz="2000" dirty="0"/>
-              <a:t>ancer Therapies</a:t>
-            </a:r>
-            <a:r>
-              <a:rPr lang="en-US" altLang="en-US" sz="2000" dirty="0">
-                <a:solidFill>
-                  <a:srgbClr val="000000"/>
-                </a:solidFill>
-              </a:rPr>
-              <a:t>) </a:t>
-            </a:r>
-            <a:r>
-              <a:rPr lang="en-US" sz="2000" dirty="0"/>
-              <a:t>Suppose cancer progression differs between women and men. To compare three therapies:</a:t>
-            </a:r>
-          </a:p>
-          <a:p>
-            <a:pPr marL="342900" lvl="0" indent="-342900">
-              <a:buFont typeface="Arial" panose="020B0604020202020204" pitchFamily="34" charset="0"/>
-              <a:buChar char="•"/>
-            </a:pPr>
-            <a:r>
-              <a:rPr lang="en-US" sz="2000" dirty="0"/>
-              <a:t>Form two blocks: </a:t>
-            </a:r>
-            <a:r>
-              <a:rPr lang="en-US" sz="2000" b="1" dirty="0"/>
-              <a:t>women</a:t>
-            </a:r>
-            <a:r>
-              <a:rPr lang="en-US" sz="2000" dirty="0"/>
-              <a:t> and </a:t>
-            </a:r>
-            <a:r>
-              <a:rPr lang="en-US" sz="2000" b="1" dirty="0"/>
-              <a:t>men</a:t>
-            </a:r>
-            <a:endParaRPr lang="en-US" sz="2000" dirty="0"/>
-          </a:p>
-          <a:p>
-            <a:pPr marL="342900" lvl="0" indent="-342900">
-              <a:buFont typeface="Arial" panose="020B0604020202020204" pitchFamily="34" charset="0"/>
-              <a:buChar char="•"/>
-            </a:pPr>
-            <a:r>
-              <a:rPr lang="en-US" sz="2000" dirty="0"/>
-              <a:t>Within each block, randomly assign subjects to therapies</a:t>
-            </a:r>
-            <a:r>
-              <a:rPr lang="en-US" sz="2000" b="1" dirty="0"/>
-              <a:t>.</a:t>
-            </a:r>
-          </a:p>
-          <a:p>
-            <a:pPr lvl="0"/>
-            <a:endParaRPr lang="en-US" sz="2000" dirty="0"/>
-          </a:p>
-          <a:p>
-            <a:r>
-              <a:rPr lang="en-US" sz="2000" b="1" dirty="0"/>
-              <a:t>Why block?</a:t>
-            </a:r>
-            <a:r>
-              <a:rPr lang="en-US" sz="2000" dirty="0"/>
-              <a:t> Sex may affect the response, so blocking helps separate sex-related variation from treatment effects.</a:t>
-            </a:r>
-          </a:p>
-        </p:txBody>
-      </p:sp>
-      <p:pic>
-        <p:nvPicPr>
-          <p:cNvPr id="5" name="Picture 4">
-            <a:extLst>
-              <a:ext uri="{FF2B5EF4-FFF2-40B4-BE49-F238E27FC236}">
-                <a16:creationId xmlns:a16="http://schemas.microsoft.com/office/drawing/2014/main" id="{1F14A10C-496B-340B-4CBA-EBC21A10CE7C}"/>
-              </a:ext>
-            </a:extLst>
-          </p:cNvPr>
-          <p:cNvPicPr>
-            <a:picLocks noChangeAspect="1"/>
-          </p:cNvPicPr>
-          <p:nvPr/>
-        </p:nvPicPr>
-        <p:blipFill>
-          <a:blip r:embed="rId3"/>
-          <a:srcRect l="4896" t="16297" r="8195" b="16852"/>
-          <a:stretch/>
-        </p:blipFill>
-        <p:spPr>
-          <a:xfrm>
-            <a:off x="1324598" y="4025069"/>
-            <a:ext cx="5994114" cy="2593538"/>
-          </a:xfrm>
-          <a:prstGeom prst="rect">
-            <a:avLst/>
-          </a:prstGeom>
-        </p:spPr>
-      </p:pic>
-    </p:spTree>
-    <p:extLst>
-      <p:ext uri="{BB962C8B-B14F-4D97-AF65-F5344CB8AC3E}">
-        <p14:creationId xmlns:p14="http://schemas.microsoft.com/office/powerpoint/2010/main" val="851934012"/>
-      </p:ext>
-    </p:extLst>
-  </p:cSld>
-  <p:clrMapOvr>
-    <a:masterClrMapping/>
-  </p:clrMapOvr>
-  <p:transition spd="med">
-    <p:fade/>
-  </p:transition>
-  <p:timing>
-    <p:tnLst>
-      <p:par>
-        <p:cTn id="1" dur="indefinite" restart="never" nodeType="tmRoot">
-          <p:childTnLst>
-            <p:seq concurrent="1" nextAc="seek">
-              <p:cTn id="2" dur="indefinite" nodeType="mainSeq">
-                <p:childTnLst>
-                  <p:par>
-                    <p:cTn id="3" fill="hold" nodeType="clickPar">
-                      <p:stCondLst>
-                        <p:cond delay="indefinite"/>
-                      </p:stCondLst>
-                      <p:childTnLst>
-                        <p:par>
-                          <p:cTn id="4" fill="hold" nodeType="withGroup">
-                            <p:stCondLst>
-                              <p:cond delay="0"/>
-                            </p:stCondLst>
-                            <p:childTnLst>
-                              <p:par>
-                                <p:cTn id="5" presetID="10" presetClass="entr" presetSubtype="0" fill="hold" grpId="0" nodeType="clickEffect">
-                                  <p:stCondLst>
-                                    <p:cond delay="0"/>
-                                  </p:stCondLst>
-                                  <p:childTnLst>
-                                    <p:set>
-                                      <p:cBhvr>
-                                        <p:cTn id="6" dur="1" fill="hold">
-                                          <p:stCondLst>
-                                            <p:cond delay="0"/>
-                                          </p:stCondLst>
-                                        </p:cTn>
-                                        <p:tgtEl>
-                                          <p:spTgt spid="10"/>
-                                        </p:tgtEl>
-                                        <p:attrNameLst>
-                                          <p:attrName>style.visibility</p:attrName>
-                                        </p:attrNameLst>
-                                      </p:cBhvr>
-                                      <p:to>
-                                        <p:strVal val="visible"/>
-                                      </p:to>
-                                    </p:set>
-                                    <p:animEffect transition="in" filter="fade">
-                                      <p:cBhvr>
-                                        <p:cTn id="7" dur="1000"/>
-                                        <p:tgtEl>
-                                          <p:spTgt spid="10"/>
-                                        </p:tgtEl>
-                                      </p:cBhvr>
-                                    </p:animEffect>
-                                  </p:childTnLst>
-                                </p:cTn>
-                              </p:par>
-                            </p:childTnLst>
-                          </p:cTn>
-                        </p:par>
-                      </p:childTnLst>
-                    </p:cTn>
-                  </p:par>
-                </p:childTnLst>
-              </p:cTn>
-              <p:prevCondLst>
-                <p:cond evt="onPrev" delay="0">
-                  <p:tgtEl>
-                    <p:sldTgt/>
-                  </p:tgtEl>
-                </p:cond>
-              </p:prevCondLst>
-              <p:nextCondLst>
-                <p:cond evt="onNext" delay="0">
-                  <p:tgtEl>
-                    <p:sldTgt/>
-                  </p:tgtEl>
-                </p:cond>
-              </p:nextCondLst>
-            </p:seq>
-          </p:childTnLst>
-        </p:cTn>
-      </p:par>
-    </p:tnLst>
-    <p:bldLst>
-      <p:bldP spid="10" grpId="0" animBg="1"/>
-    </p:bldLst>
-  </p:timing>
-</p:sld>
-</file>
-
-<file path=ppt/slides/slide21.xml><?xml version="1.0" encoding="utf-8"?>
 <p:sld xmlns:a="http://schemas.openxmlformats.org/drawingml/2006/main" xmlns:r="http://schemas.openxmlformats.org/officeDocument/2006/relationships" xmlns:p="http://schemas.openxmlformats.org/presentationml/2006/main">
   <p:cSld>
     <p:spTree>
@@ -18988,7 +17860,7 @@
                 </a:solidFill>
               </a:rPr>
               <a:pPr/>
-              <a:t>21</a:t>
+              <a:t>20</a:t>
             </a:fld>
             <a:endParaRPr lang="en-US" sz="1400">
               <a:solidFill>
@@ -19006,7 +17878,7 @@
 </p:sld>
 </file>
 
-<file path=ppt/slides/slide22.xml><?xml version="1.0" encoding="utf-8"?>
+<file path=ppt/slides/slide21.xml><?xml version="1.0" encoding="utf-8"?>
 <p:sld xmlns:a="http://schemas.openxmlformats.org/drawingml/2006/main" xmlns:r="http://schemas.openxmlformats.org/officeDocument/2006/relationships" xmlns:p="http://schemas.openxmlformats.org/presentationml/2006/main" showMasterPhAnim="0">
   <p:cSld>
     <p:spTree>
@@ -19206,7 +18078,7 @@
                   <a:spcPct val="80000"/>
                 </a:lnSpc>
               </a:pPr>
-              <a:t>22</a:t>
+              <a:t>21</a:t>
             </a:fld>
             <a:endParaRPr lang="en-US" sz="1200">
               <a:solidFill>
@@ -20596,7 +19468,7 @@
 </p:sld>
 </file>
 
-<file path=ppt/slides/slide23.xml><?xml version="1.0" encoding="utf-8"?>
+<file path=ppt/slides/slide22.xml><?xml version="1.0" encoding="utf-8"?>
 <p:sld xmlns:a="http://schemas.openxmlformats.org/drawingml/2006/main" xmlns:r="http://schemas.openxmlformats.org/officeDocument/2006/relationships" xmlns:p="http://schemas.openxmlformats.org/presentationml/2006/main" showMasterPhAnim="0">
   <p:cSld>
     <p:spTree>
@@ -20797,7 +19669,7 @@
                   <a:spcPct val="80000"/>
                 </a:lnSpc>
               </a:pPr>
-              <a:t>23</a:t>
+              <a:t>22</a:t>
             </a:fld>
             <a:endParaRPr lang="en-US" sz="1200">
               <a:solidFill>
@@ -21510,7 +20382,7 @@
 </p:sld>
 </file>
 
-<file path=ppt/slides/slide24.xml><?xml version="1.0" encoding="utf-8"?>
+<file path=ppt/slides/slide23.xml><?xml version="1.0" encoding="utf-8"?>
 <p:sld xmlns:a="http://schemas.openxmlformats.org/drawingml/2006/main" xmlns:r="http://schemas.openxmlformats.org/officeDocument/2006/relationships" xmlns:p="http://schemas.openxmlformats.org/presentationml/2006/main" showMasterPhAnim="0">
   <p:cSld>
     <p:spTree>
@@ -21711,7 +20583,7 @@
                   <a:spcPct val="80000"/>
                 </a:lnSpc>
               </a:pPr>
-              <a:t>24</a:t>
+              <a:t>23</a:t>
             </a:fld>
             <a:endParaRPr lang="en-US" sz="1200">
               <a:solidFill>
@@ -22033,7 +20905,7 @@
         <p:spPr bwMode="auto">
           <a:xfrm>
             <a:off x="714375" y="4324350"/>
-            <a:ext cx="7666038" cy="1016000"/>
+            <a:ext cx="7666038" cy="707886"/>
           </a:xfrm>
           <a:prstGeom prst="rect">
             <a:avLst/>
@@ -22071,25 +20943,8 @@
             <a:pPr eaLnBrk="1" hangingPunct="1"/>
             <a:r>
               <a:rPr lang="en-US" sz="2000" dirty="0"/>
-              <a:t>In practice, people use random numbers generated by a computer or calculator to choose samples. If you do not </a:t>
-            </a:r>
-            <a:r>
-              <a:rPr lang="en-US" altLang="ja-JP" sz="2000" dirty="0"/>
-              <a:t>have technology handy, you can use a </a:t>
-            </a:r>
-            <a:r>
-              <a:rPr lang="en-US" altLang="ja-JP" sz="2000" b="1" dirty="0">
-                <a:solidFill>
-                  <a:srgbClr val="800000"/>
-                </a:solidFill>
-              </a:rPr>
-              <a:t>table of random digits</a:t>
-            </a:r>
-            <a:r>
-              <a:rPr lang="en-US" altLang="ja-JP" sz="2000" dirty="0"/>
-              <a:t>.</a:t>
-            </a:r>
-            <a:endParaRPr lang="en-US" sz="2000" dirty="0"/>
+              <a:t>In practice, people use random numbers generated by a computer or calculator to choose samples.</a:t>
+            </a:r>
           </a:p>
         </p:txBody>
       </p:sp>
@@ -22235,7 +21090,7 @@
 </p:sld>
 </file>
 
-<file path=ppt/slides/slide25.xml><?xml version="1.0" encoding="utf-8"?>
+<file path=ppt/slides/slide24.xml><?xml version="1.0" encoding="utf-8"?>
 <p:sld xmlns:a="http://schemas.openxmlformats.org/drawingml/2006/main" xmlns:r="http://schemas.openxmlformats.org/officeDocument/2006/relationships" xmlns:p="http://schemas.openxmlformats.org/presentationml/2006/main" showMasterPhAnim="0">
   <p:cSld>
     <p:spTree>
@@ -22442,7 +21297,7 @@
                   <a:spcPct val="80000"/>
                 </a:lnSpc>
               </a:pPr>
-              <a:t>25</a:t>
+              <a:t>24</a:t>
             </a:fld>
             <a:endParaRPr lang="en-US" sz="1200">
               <a:solidFill>
@@ -23213,7 +22068,7 @@
             <a:pPr eaLnBrk="1" hangingPunct="1"/>
             <a:r>
               <a:rPr lang="en-US" sz="2000" dirty="0"/>
-              <a:t>SAS can select an SRA using </a:t>
+              <a:t>SAS can select an SRS using </a:t>
             </a:r>
             <a:r>
               <a:rPr lang="en-US" sz="2000" b="1" dirty="0"/>
@@ -23892,7 +22747,7 @@
 </p:sld>
 </file>
 
-<file path=ppt/slides/slide26.xml><?xml version="1.0" encoding="utf-8"?>
+<file path=ppt/slides/slide25.xml><?xml version="1.0" encoding="utf-8"?>
 <p:sld xmlns:a="http://schemas.openxmlformats.org/drawingml/2006/main" xmlns:r="http://schemas.openxmlformats.org/officeDocument/2006/relationships" xmlns:p="http://schemas.openxmlformats.org/presentationml/2006/main" showMasterPhAnim="0">
   <p:cSld>
     <p:spTree>
@@ -24117,7 +22972,7 @@
                   <a:spcPct val="80000"/>
                 </a:lnSpc>
               </a:pPr>
-              <a:t>26</a:t>
+              <a:t>25</a:t>
             </a:fld>
             <a:endParaRPr lang="en-US" sz="1200">
               <a:solidFill>
@@ -24629,7 +23484,7 @@
 </p:sld>
 </file>
 
-<file path=ppt/slides/slide27.xml><?xml version="1.0" encoding="utf-8"?>
+<file path=ppt/slides/slide26.xml><?xml version="1.0" encoding="utf-8"?>
 <p:sld xmlns:a="http://schemas.openxmlformats.org/drawingml/2006/main" xmlns:r="http://schemas.openxmlformats.org/officeDocument/2006/relationships" xmlns:p="http://schemas.openxmlformats.org/presentationml/2006/main" showMasterPhAnim="0">
   <p:cSld>
     <p:spTree>
@@ -24658,8 +23513,8 @@
         </p:nvSpPr>
         <p:spPr>
           <a:xfrm>
-            <a:off x="174623" y="153988"/>
-            <a:ext cx="7772400" cy="1143000"/>
+            <a:off x="174623" y="153987"/>
+            <a:ext cx="7772400" cy="811687"/>
           </a:xfrm>
         </p:spPr>
         <p:txBody>
@@ -24672,7 +23527,7 @@
                 <a:ea typeface="ＭＳ Ｐゴシック" pitchFamily="34" charset="-128"/>
                 <a:cs typeface="Arial" pitchFamily="34" charset="0"/>
               </a:rPr>
-              <a:t>Probability Samples: Stratified Random Samples</a:t>
+              <a:t>Stratified Random Samples</a:t>
             </a:r>
           </a:p>
         </p:txBody>
@@ -24835,197 +23690,11 @@
                   <a:spcPct val="80000"/>
                 </a:lnSpc>
               </a:pPr>
-              <a:t>27</a:t>
+              <a:t>26</a:t>
             </a:fld>
             <a:endParaRPr lang="en-US" sz="1200">
               <a:solidFill>
                 <a:schemeClr val="accent1"/>
-              </a:solidFill>
-            </a:endParaRPr>
-          </a:p>
-        </p:txBody>
-      </p:sp>
-      <p:sp>
-        <p:nvSpPr>
-          <p:cNvPr id="8" name="TextBox 7"/>
-          <p:cNvSpPr txBox="1">
-            <a:spLocks noChangeArrowheads="1"/>
-          </p:cNvSpPr>
-          <p:nvPr/>
-        </p:nvSpPr>
-        <p:spPr bwMode="auto">
-          <a:xfrm>
-            <a:off x="174623" y="1956758"/>
-            <a:ext cx="8183563" cy="1016000"/>
-          </a:xfrm>
-          <a:prstGeom prst="rect">
-            <a:avLst/>
-          </a:prstGeom>
-          <a:solidFill>
-            <a:srgbClr val="EAEDCB"/>
-          </a:solidFill>
-          <a:ln w="10000">
-            <a:solidFill>
-              <a:srgbClr val="D2DA7A"/>
-            </a:solidFill>
-            <a:miter lim="800000"/>
-            <a:headEnd/>
-            <a:tailEnd/>
-          </a:ln>
-          <a:effectLst>
-            <a:outerShdw blurRad="38100" dist="30000" dir="5400000" rotWithShape="0">
-              <a:srgbClr val="808080">
-                <a:alpha val="45000"/>
-              </a:srgbClr>
-            </a:outerShdw>
-          </a:effectLst>
-        </p:spPr>
-        <p:txBody>
-          <a:bodyPr wrap="square">
-            <a:spAutoFit/>
-          </a:bodyPr>
-          <a:lstStyle>
-            <a:lvl1pPr eaLnBrk="0" hangingPunct="0">
-              <a:defRPr sz="2400">
-                <a:solidFill>
-                  <a:schemeClr val="tx1"/>
-                </a:solidFill>
-                <a:latin typeface="Arial" charset="0"/>
-                <a:ea typeface="ＭＳ Ｐゴシック" pitchFamily="-65" charset="-128"/>
-              </a:defRPr>
-            </a:lvl1pPr>
-            <a:lvl2pPr marL="37931725" indent="-37474525" eaLnBrk="0" hangingPunct="0">
-              <a:defRPr sz="2400">
-                <a:solidFill>
-                  <a:schemeClr val="tx1"/>
-                </a:solidFill>
-                <a:latin typeface="Arial" charset="0"/>
-                <a:ea typeface="ＭＳ Ｐゴシック" pitchFamily="-65" charset="-128"/>
-              </a:defRPr>
-            </a:lvl2pPr>
-            <a:lvl3pPr eaLnBrk="0" hangingPunct="0">
-              <a:defRPr sz="2400">
-                <a:solidFill>
-                  <a:schemeClr val="tx1"/>
-                </a:solidFill>
-                <a:latin typeface="Arial" charset="0"/>
-                <a:ea typeface="ＭＳ Ｐゴシック" pitchFamily="-65" charset="-128"/>
-              </a:defRPr>
-            </a:lvl3pPr>
-            <a:lvl4pPr eaLnBrk="0" hangingPunct="0">
-              <a:defRPr sz="2400">
-                <a:solidFill>
-                  <a:schemeClr val="tx1"/>
-                </a:solidFill>
-                <a:latin typeface="Arial" charset="0"/>
-                <a:ea typeface="ＭＳ Ｐゴシック" pitchFamily="-65" charset="-128"/>
-              </a:defRPr>
-            </a:lvl4pPr>
-            <a:lvl5pPr eaLnBrk="0" hangingPunct="0">
-              <a:defRPr sz="2400">
-                <a:solidFill>
-                  <a:schemeClr val="tx1"/>
-                </a:solidFill>
-                <a:latin typeface="Arial" charset="0"/>
-                <a:ea typeface="ＭＳ Ｐゴシック" pitchFamily="-65" charset="-128"/>
-              </a:defRPr>
-            </a:lvl5pPr>
-            <a:lvl6pPr marL="457200" eaLnBrk="0" fontAlgn="base" hangingPunct="0">
-              <a:spcBef>
-                <a:spcPct val="0"/>
-              </a:spcBef>
-              <a:spcAft>
-                <a:spcPct val="0"/>
-              </a:spcAft>
-              <a:defRPr sz="2400">
-                <a:solidFill>
-                  <a:schemeClr val="tx1"/>
-                </a:solidFill>
-                <a:latin typeface="Arial" charset="0"/>
-                <a:ea typeface="ＭＳ Ｐゴシック" pitchFamily="-65" charset="-128"/>
-              </a:defRPr>
-            </a:lvl6pPr>
-            <a:lvl7pPr marL="914400" eaLnBrk="0" fontAlgn="base" hangingPunct="0">
-              <a:spcBef>
-                <a:spcPct val="0"/>
-              </a:spcBef>
-              <a:spcAft>
-                <a:spcPct val="0"/>
-              </a:spcAft>
-              <a:defRPr sz="2400">
-                <a:solidFill>
-                  <a:schemeClr val="tx1"/>
-                </a:solidFill>
-                <a:latin typeface="Arial" charset="0"/>
-                <a:ea typeface="ＭＳ Ｐゴシック" pitchFamily="-65" charset="-128"/>
-              </a:defRPr>
-            </a:lvl7pPr>
-            <a:lvl8pPr marL="1371600" eaLnBrk="0" fontAlgn="base" hangingPunct="0">
-              <a:spcBef>
-                <a:spcPct val="0"/>
-              </a:spcBef>
-              <a:spcAft>
-                <a:spcPct val="0"/>
-              </a:spcAft>
-              <a:defRPr sz="2400">
-                <a:solidFill>
-                  <a:schemeClr val="tx1"/>
-                </a:solidFill>
-                <a:latin typeface="Arial" charset="0"/>
-                <a:ea typeface="ＭＳ Ｐゴシック" pitchFamily="-65" charset="-128"/>
-              </a:defRPr>
-            </a:lvl8pPr>
-            <a:lvl9pPr marL="1828800" eaLnBrk="0" fontAlgn="base" hangingPunct="0">
-              <a:spcBef>
-                <a:spcPct val="0"/>
-              </a:spcBef>
-              <a:spcAft>
-                <a:spcPct val="0"/>
-              </a:spcAft>
-              <a:defRPr sz="2400">
-                <a:solidFill>
-                  <a:schemeClr val="tx1"/>
-                </a:solidFill>
-                <a:latin typeface="Arial" charset="0"/>
-                <a:ea typeface="ＭＳ Ｐゴシック" pitchFamily="-65" charset="-128"/>
-              </a:defRPr>
-            </a:lvl9pPr>
-          </a:lstStyle>
-          <a:p>
-            <a:pPr eaLnBrk="1" hangingPunct="1">
-              <a:defRPr/>
-            </a:pPr>
-            <a:r>
-              <a:rPr lang="en-US" altLang="en-US" sz="2000" dirty="0">
-                <a:solidFill>
-                  <a:srgbClr val="000000"/>
-                </a:solidFill>
-              </a:rPr>
-              <a:t>A </a:t>
-            </a:r>
-            <a:r>
-              <a:rPr lang="en-US" altLang="en-US" sz="2000" b="1" dirty="0">
-                <a:solidFill>
-                  <a:srgbClr val="800000"/>
-                </a:solidFill>
-              </a:rPr>
-              <a:t>probability sample </a:t>
-            </a:r>
-            <a:r>
-              <a:rPr lang="en-US" altLang="en-US" sz="2000" dirty="0"/>
-              <a:t>is a sample chosen by chance. We must know what samples are possible and what probability each possible sample has</a:t>
-            </a:r>
-            <a:r>
-              <a:rPr lang="en-US" altLang="en-US" sz="2000" dirty="0">
-                <a:solidFill>
-                  <a:srgbClr val="000000"/>
-                </a:solidFill>
-              </a:rPr>
-              <a:t>.</a:t>
-            </a:r>
-            <a:endParaRPr lang="en-US" altLang="en-US" sz="1000" b="1" dirty="0">
-              <a:solidFill>
-                <a:srgbClr val="000000"/>
               </a:solidFill>
             </a:endParaRPr>
           </a:p>
@@ -25041,8 +23710,8 @@
         </p:nvSpPr>
         <p:spPr bwMode="auto">
           <a:xfrm>
-            <a:off x="174623" y="3327878"/>
-            <a:ext cx="8588377" cy="1323439"/>
+            <a:off x="174623" y="1994733"/>
+            <a:ext cx="8588377" cy="707886"/>
           </a:xfrm>
           <a:prstGeom prst="rect">
             <a:avLst/>
@@ -25093,61 +23762,7 @@
                 </a:solidFill>
                 <a:cs typeface="Arial" pitchFamily="34" charset="0"/>
               </a:rPr>
-              <a:t>Sometimes, there are statistical advantages to using more complex sampling methods. One common alternative to an SRS involves </a:t>
-            </a:r>
-            <a:r>
-              <a:rPr lang="en-US" sz="2000" dirty="0">
-                <a:solidFill>
-                  <a:srgbClr val="FF0000"/>
-                </a:solidFill>
-                <a:cs typeface="Arial" pitchFamily="34" charset="0"/>
-              </a:rPr>
-              <a:t>sampling important groups (called “strata”) </a:t>
-            </a:r>
-            <a:r>
-              <a:rPr lang="en-US" sz="2000" dirty="0">
-                <a:solidFill>
-                  <a:srgbClr val="000000"/>
-                </a:solidFill>
-                <a:cs typeface="Arial" pitchFamily="34" charset="0"/>
-              </a:rPr>
-              <a:t>within the population separately.  These </a:t>
-            </a:r>
-            <a:r>
-              <a:rPr lang="en-US" altLang="en-US" sz="2000" dirty="0">
-                <a:solidFill>
-                  <a:srgbClr val="000000"/>
-                </a:solidFill>
-                <a:cs typeface="Arial" pitchFamily="34" charset="0"/>
-              </a:rPr>
-              <a:t>“</a:t>
-            </a:r>
-            <a:r>
-              <a:rPr lang="en-US" sz="2000" dirty="0">
-                <a:solidFill>
-                  <a:srgbClr val="000000"/>
-                </a:solidFill>
-                <a:cs typeface="Arial" pitchFamily="34" charset="0"/>
-              </a:rPr>
-              <a:t>subsamples</a:t>
-            </a:r>
-            <a:r>
-              <a:rPr lang="en-US" altLang="en-US" sz="2000" dirty="0">
-                <a:solidFill>
-                  <a:srgbClr val="000000"/>
-                </a:solidFill>
-                <a:cs typeface="Arial" pitchFamily="34" charset="0"/>
-              </a:rPr>
-              <a:t>”</a:t>
-            </a:r>
-            <a:r>
-              <a:rPr lang="en-US" sz="2000" dirty="0">
-                <a:solidFill>
-                  <a:srgbClr val="000000"/>
-                </a:solidFill>
-                <a:cs typeface="Arial" pitchFamily="34" charset="0"/>
-              </a:rPr>
-              <a:t> are combined to form one stratified random sample.</a:t>
+              <a:t>Sometimes, there are statistical advantages to using more complex sampling methods. </a:t>
             </a:r>
           </a:p>
         </p:txBody>
@@ -25162,7 +23777,7 @@
         </p:nvSpPr>
         <p:spPr bwMode="auto">
           <a:xfrm>
-            <a:off x="377029" y="5067148"/>
+            <a:off x="377029" y="3289617"/>
             <a:ext cx="8183563" cy="1323439"/>
           </a:xfrm>
           <a:prstGeom prst="rect">
@@ -25340,7 +23955,7 @@
                   <a:srgbClr val="000000"/>
                 </a:solidFill>
               </a:rPr>
-              <a:t>first classify the population into </a:t>
+              <a:t>first partition the population into disjoint subpopulations (</a:t>
             </a:r>
             <a:r>
               <a:rPr lang="en-US" altLang="en-US" sz="2000" b="1" dirty="0">
@@ -25348,11 +23963,11 @@
                   <a:srgbClr val="800000"/>
                 </a:solidFill>
               </a:rPr>
-              <a:t>strata</a:t>
+              <a:t>“strata”</a:t>
             </a:r>
             <a:r>
               <a:rPr lang="en-US" altLang="en-US" sz="2000" dirty="0"/>
-              <a:t>.</a:t>
+              <a:t>).</a:t>
             </a:r>
             <a:r>
               <a:rPr lang="en-US" altLang="en-US" sz="2000" dirty="0">
@@ -25360,7 +23975,7 @@
                   <a:srgbClr val="000000"/>
                 </a:solidFill>
               </a:rPr>
-              <a:t> Then choose a separate SRS in each stratum and combine these SRSs to form the full sample. (“Stratify first, then randomly sample within every stratum”.)</a:t>
+              <a:t> Then take an SRS from each stratum and combine these SRSs to form the full sample. (“Stratify first, then randomly sample within every stratum”.)</a:t>
             </a:r>
             <a:endParaRPr lang="en-US" altLang="en-US" sz="1000" b="1" dirty="0">
               <a:solidFill>
@@ -25399,7 +24014,7 @@
                             </p:stCondLst>
                             <p:childTnLst>
                               <p:par>
-                                <p:cTn id="5" presetID="5" presetClass="entr" presetSubtype="10" fill="hold" grpId="0" nodeType="clickEffect">
+                                <p:cTn id="5" presetID="12" presetClass="entr" presetSubtype="4" fill="hold" nodeType="clickEffect">
                                   <p:stCondLst>
                                     <p:cond delay="0"/>
                                   </p:stCondLst>
@@ -25407,102 +24022,6 @@
                                     <p:set>
                                       <p:cBhvr>
                                         <p:cTn id="6" dur="1" fill="hold">
-                                          <p:stCondLst>
-                                            <p:cond delay="0"/>
-                                          </p:stCondLst>
-                                        </p:cTn>
-                                        <p:tgtEl>
-                                          <p:spTgt spid="8"/>
-                                        </p:tgtEl>
-                                        <p:attrNameLst>
-                                          <p:attrName>style.visibility</p:attrName>
-                                        </p:attrNameLst>
-                                      </p:cBhvr>
-                                      <p:to>
-                                        <p:strVal val="visible"/>
-                                      </p:to>
-                                    </p:set>
-                                    <p:animEffect transition="in" filter="checkerboard(across)">
-                                      <p:cBhvr>
-                                        <p:cTn id="7" dur="500"/>
-                                        <p:tgtEl>
-                                          <p:spTgt spid="8"/>
-                                        </p:tgtEl>
-                                      </p:cBhvr>
-                                    </p:animEffect>
-                                  </p:childTnLst>
-                                </p:cTn>
-                              </p:par>
-                              <p:par>
-                                <p:cTn id="8" presetID="5" presetClass="entr" presetSubtype="10" fill="hold" nodeType="withEffect">
-                                  <p:stCondLst>
-                                    <p:cond delay="0"/>
-                                  </p:stCondLst>
-                                  <p:childTnLst>
-                                    <p:set>
-                                      <p:cBhvr>
-                                        <p:cTn id="9" dur="1" fill="hold">
-                                          <p:stCondLst>
-                                            <p:cond delay="0"/>
-                                          </p:stCondLst>
-                                        </p:cTn>
-                                        <p:tgtEl>
-                                          <p:spTgt spid="8">
-                                            <p:txEl>
-                                              <p:pRg st="0" end="0"/>
-                                            </p:txEl>
-                                          </p:spTgt>
-                                        </p:tgtEl>
-                                        <p:attrNameLst>
-                                          <p:attrName>style.visibility</p:attrName>
-                                        </p:attrNameLst>
-                                      </p:cBhvr>
-                                      <p:to>
-                                        <p:strVal val="visible"/>
-                                      </p:to>
-                                    </p:set>
-                                    <p:animEffect transition="in" filter="checkerboard(across)">
-                                      <p:cBhvr>
-                                        <p:cTn id="10" dur="500"/>
-                                        <p:tgtEl>
-                                          <p:spTgt spid="8">
-                                            <p:txEl>
-                                              <p:pRg st="0" end="0"/>
-                                            </p:txEl>
-                                          </p:spTgt>
-                                        </p:tgtEl>
-                                      </p:cBhvr>
-                                    </p:animEffect>
-                                  </p:childTnLst>
-                                </p:cTn>
-                              </p:par>
-                            </p:childTnLst>
-                          </p:cTn>
-                        </p:par>
-                      </p:childTnLst>
-                    </p:cTn>
-                  </p:par>
-                  <p:par>
-                    <p:cTn id="11" fill="hold" nodeType="clickPar">
-                      <p:stCondLst>
-                        <p:cond delay="indefinite"/>
-                      </p:stCondLst>
-                      <p:childTnLst>
-                        <p:par>
-                          <p:cTn id="12" fill="hold" nodeType="withGroup">
-                            <p:stCondLst>
-                              <p:cond delay="0"/>
-                            </p:stCondLst>
-                            <p:childTnLst>
-                              <p:par>
-                                <p:cTn id="13" presetID="12" presetClass="entr" presetSubtype="4" fill="hold" nodeType="clickEffect">
-                                  <p:stCondLst>
-                                    <p:cond delay="0"/>
-                                  </p:stCondLst>
-                                  <p:childTnLst>
-                                    <p:set>
-                                      <p:cBhvr>
-                                        <p:cTn id="14" dur="1" fill="hold">
                                           <p:stCondLst>
                                             <p:cond delay="0"/>
                                           </p:stCondLst>
@@ -25524,7 +24043,7 @@
                                     </p:set>
                                     <p:anim calcmode="lin" valueType="num">
                                       <p:cBhvr additive="base">
-                                        <p:cTn id="15" dur="500"/>
+                                        <p:cTn id="7" dur="500"/>
                                         <p:tgtEl>
                                           <p:spTgt spid="48134">
                                             <p:txEl>
@@ -25551,7 +24070,7 @@
                                     </p:anim>
                                     <p:animEffect transition="in" filter="wipe(up)">
                                       <p:cBhvr>
-                                        <p:cTn id="16" dur="500"/>
+                                        <p:cTn id="8" dur="500"/>
                                         <p:tgtEl>
                                           <p:spTgt spid="48134">
                                             <p:txEl>
@@ -25571,26 +24090,26 @@
                     </p:cTn>
                   </p:par>
                   <p:par>
-                    <p:cTn id="17" fill="hold" nodeType="clickPar">
+                    <p:cTn id="9" fill="hold" nodeType="clickPar">
                       <p:stCondLst>
                         <p:cond delay="indefinite"/>
                       </p:stCondLst>
                       <p:childTnLst>
                         <p:par>
-                          <p:cTn id="18" fill="hold" nodeType="withGroup">
+                          <p:cTn id="10" fill="hold" nodeType="withGroup">
                             <p:stCondLst>
                               <p:cond delay="0"/>
                             </p:stCondLst>
                             <p:childTnLst>
                               <p:par>
-                                <p:cTn id="19" presetID="1" presetClass="entr" presetSubtype="0" fill="hold" grpId="0" nodeType="clickEffect">
+                                <p:cTn id="11" presetID="1" presetClass="entr" presetSubtype="0" fill="hold" grpId="0" nodeType="clickEffect">
                                   <p:stCondLst>
                                     <p:cond delay="0"/>
                                   </p:stCondLst>
                                   <p:childTnLst>
                                     <p:set>
                                       <p:cBhvr>
-                                        <p:cTn id="20" dur="1" fill="hold">
+                                        <p:cTn id="12" dur="1" fill="hold">
                                           <p:stCondLst>
                                             <p:cond delay="0"/>
                                           </p:stCondLst>
@@ -25612,14 +24131,14 @@
                                 </p:cTn>
                               </p:par>
                               <p:par>
-                                <p:cTn id="21" presetID="1" presetClass="entr" presetSubtype="0" fill="hold" grpId="0" nodeType="withEffect">
+                                <p:cTn id="13" presetID="1" presetClass="entr" presetSubtype="0" fill="hold" grpId="0" nodeType="withEffect">
                                   <p:stCondLst>
                                     <p:cond delay="0"/>
                                   </p:stCondLst>
                                   <p:childTnLst>
                                     <p:set>
                                       <p:cBhvr>
-                                        <p:cTn id="22" dur="1" fill="hold">
+                                        <p:cTn id="14" dur="1" fill="hold">
                                           <p:stCondLst>
                                             <p:cond delay="0"/>
                                           </p:stCondLst>
@@ -25670,14 +24189,13 @@
       </p:par>
     </p:tnLst>
     <p:bldLst>
-      <p:bldP spid="8" grpId="0" animBg="1"/>
       <p:bldP spid="7" grpId="0" build="allAtOnce" animBg="1"/>
     </p:bldLst>
   </p:timing>
 </p:sld>
 </file>
 
-<file path=ppt/slides/slide28.xml><?xml version="1.0" encoding="utf-8"?>
+<file path=ppt/slides/slide27.xml><?xml version="1.0" encoding="utf-8"?>
 <p:sld xmlns:a="http://schemas.openxmlformats.org/drawingml/2006/main" xmlns:r="http://schemas.openxmlformats.org/officeDocument/2006/relationships" xmlns:p="http://schemas.openxmlformats.org/presentationml/2006/main" showMasterPhAnim="0">
   <p:cSld>
     <p:spTree>
@@ -25707,7 +24225,7 @@
         <p:spPr>
           <a:xfrm>
             <a:off x="174623" y="153988"/>
-            <a:ext cx="7772400" cy="1143000"/>
+            <a:ext cx="7772400" cy="640771"/>
           </a:xfrm>
         </p:spPr>
         <p:txBody>
@@ -25715,19 +24233,6 @@
           <a:lstStyle/>
           <a:p>
             <a:pPr eaLnBrk="1" hangingPunct="1"/>
-            <a:r>
-              <a:rPr lang="en-US" dirty="0">
-                <a:ea typeface="ＭＳ Ｐゴシック" pitchFamily="34" charset="-128"/>
-                <a:cs typeface="Arial" pitchFamily="34" charset="0"/>
-              </a:rPr>
-              <a:t>Probability Samples: </a:t>
-            </a:r>
-            <a:br>
-              <a:rPr lang="en-US" dirty="0">
-                <a:ea typeface="ＭＳ Ｐゴシック" pitchFamily="34" charset="-128"/>
-                <a:cs typeface="Arial" pitchFamily="34" charset="0"/>
-              </a:rPr>
-            </a:br>
             <a:r>
               <a:rPr lang="en-US" dirty="0">
                 <a:ea typeface="ＭＳ Ｐゴシック" pitchFamily="34" charset="-128"/>
@@ -25896,7 +24401,7 @@
                   <a:spcPct val="80000"/>
                 </a:lnSpc>
               </a:pPr>
-              <a:t>28</a:t>
+              <a:t>27</a:t>
             </a:fld>
             <a:endParaRPr lang="en-US" sz="1200">
               <a:solidFill>
@@ -25916,7 +24421,7 @@
         </p:nvSpPr>
         <p:spPr bwMode="auto">
           <a:xfrm>
-            <a:off x="381000" y="1475689"/>
+            <a:off x="381000" y="877482"/>
             <a:ext cx="8534400" cy="482600"/>
           </a:xfrm>
           <a:prstGeom prst="rect">
@@ -26087,7 +24592,7 @@
         </p:nvSpPr>
         <p:spPr bwMode="auto">
           <a:xfrm>
-            <a:off x="381000" y="2144342"/>
+            <a:off x="381000" y="1452130"/>
             <a:ext cx="8215313" cy="707886"/>
           </a:xfrm>
           <a:prstGeom prst="rect">
@@ -26245,7 +24750,7 @@
             </a:r>
             <a:r>
               <a:rPr lang="en-US" altLang="en-US" sz="2000" dirty="0"/>
-              <a:t>selects the sample in a series of stages, using probability sampling at each stage. </a:t>
+              <a:t>selects the sample in a series of stages, using certain random sampling at each stage. </a:t>
             </a:r>
             <a:endParaRPr lang="en-US" altLang="en-US" sz="1000" b="1" dirty="0">
               <a:solidFill>
@@ -26263,8 +24768,8 @@
         </p:nvSpPr>
         <p:spPr>
           <a:xfrm>
-            <a:off x="2011363" y="4031760"/>
-            <a:ext cx="4953000" cy="922337"/>
+            <a:off x="2011363" y="3124051"/>
+            <a:ext cx="4953000" cy="1477328"/>
           </a:xfrm>
           <a:prstGeom prst="rect">
             <a:avLst/>
@@ -26295,7 +24800,7 @@
             </a:pPr>
             <a:r>
               <a:rPr lang="en-US" dirty="0"/>
-              <a:t>Stage 1: Divide the US into 2007 geographical areas called Primary Sampling Units (PSUs). Select a stratified sample of PSUs.</a:t>
+              <a:t>Stage 1: Divide the U.S. into 2,007 geographic areas called Primary Sampling Units (PSUs). The 428 largest PSUs are included, and a stratified sample of 326 additional PSUs is selected.</a:t>
             </a:r>
           </a:p>
         </p:txBody>
@@ -26308,8 +24813,8 @@
         </p:nvSpPr>
         <p:spPr>
           <a:xfrm>
-            <a:off x="741363" y="5072580"/>
-            <a:ext cx="3411537" cy="1477963"/>
+            <a:off x="741363" y="4672687"/>
+            <a:ext cx="3411537" cy="2031325"/>
           </a:xfrm>
           <a:prstGeom prst="rect">
             <a:avLst/>
@@ -26340,7 +24845,15 @@
             </a:pPr>
             <a:r>
               <a:rPr lang="en-US" dirty="0"/>
-              <a:t>Stage 2: Divide each PSU into smaller areas called blocks. Select a stratified sample of the blocks within each PSU selected in Stage 1.</a:t>
+              <a:t>Stage 2: Divide each selected PSU into smaller areas called blocks. Stratify the blocks using demographic and other information and select a </a:t>
+            </a:r>
+            <a:r>
+              <a:rPr lang="en-US" b="1" dirty="0"/>
+              <a:t>stratified sample of blocks</a:t>
+            </a:r>
+            <a:r>
+              <a:rPr lang="en-US" dirty="0"/>
+              <a:t> within each selected PSU.</a:t>
             </a:r>
           </a:p>
         </p:txBody>
@@ -26353,8 +24866,8 @@
         </p:nvSpPr>
         <p:spPr>
           <a:xfrm>
-            <a:off x="4640263" y="5072580"/>
-            <a:ext cx="3411537" cy="1477963"/>
+            <a:off x="4572000" y="4686156"/>
+            <a:ext cx="3546505" cy="1754326"/>
           </a:xfrm>
           <a:prstGeom prst="rect">
             <a:avLst/>
@@ -26375,7 +24888,7 @@
           </a:fontRef>
         </p:style>
         <p:txBody>
-          <a:bodyPr>
+          <a:bodyPr wrap="square">
             <a:spAutoFit/>
           </a:bodyPr>
           <a:lstStyle/>
@@ -26385,7 +24898,23 @@
             </a:pPr>
             <a:r>
               <a:rPr lang="en-US" dirty="0"/>
-              <a:t>Stage 3: Sort the housing units in each block into clusters of four nearby units. Select an SRS of these clusters and conduct interviews.</a:t>
+              <a:t>Stage 3: Group housing units within each selected block into </a:t>
+            </a:r>
+            <a:r>
+              <a:rPr lang="en-US" b="1" dirty="0"/>
+              <a:t>clusters of four nearby units</a:t>
+            </a:r>
+            <a:r>
+              <a:rPr lang="en-US" dirty="0"/>
+              <a:t>. Select a </a:t>
+            </a:r>
+            <a:r>
+              <a:rPr lang="en-US" b="1" dirty="0"/>
+              <a:t>random sample of these clusters</a:t>
+            </a:r>
+            <a:r>
+              <a:rPr lang="en-US" dirty="0"/>
+              <a:t> and interview the households.</a:t>
             </a:r>
           </a:p>
         </p:txBody>
@@ -26406,7 +24935,7 @@
         </p:nvSpPr>
         <p:spPr bwMode="auto">
           <a:xfrm>
-            <a:off x="381000" y="3217139"/>
+            <a:off x="381000" y="2354008"/>
             <a:ext cx="8534400" cy="707886"/>
           </a:xfrm>
           <a:prstGeom prst="rect">
@@ -26854,6 +25383,620 @@
 </p:sld>
 </file>
 
+<file path=ppt/slides/slide28.xml><?xml version="1.0" encoding="utf-8"?>
+<p:sld xmlns:a="http://schemas.openxmlformats.org/drawingml/2006/main" xmlns:r="http://schemas.openxmlformats.org/officeDocument/2006/relationships" xmlns:p="http://schemas.openxmlformats.org/presentationml/2006/main" showMasterPhAnim="0">
+  <p:cSld>
+    <p:spTree>
+      <p:nvGrpSpPr>
+        <p:cNvPr id="1" name="">
+          <a:extLst>
+            <a:ext uri="{FF2B5EF4-FFF2-40B4-BE49-F238E27FC236}">
+              <a16:creationId xmlns:a16="http://schemas.microsoft.com/office/drawing/2014/main" id="{0F981AA0-0F0B-DE69-4F1F-50E4D6585F52}"/>
+            </a:ext>
+          </a:extLst>
+        </p:cNvPr>
+        <p:cNvGrpSpPr/>
+        <p:nvPr/>
+      </p:nvGrpSpPr>
+      <p:grpSpPr>
+        <a:xfrm>
+          <a:off x="0" y="0"/>
+          <a:ext cx="0" cy="0"/>
+          <a:chOff x="0" y="0"/>
+          <a:chExt cx="0" cy="0"/>
+        </a:xfrm>
+      </p:grpSpPr>
+      <p:sp>
+        <p:nvSpPr>
+          <p:cNvPr id="55297" name="Slide Number Placeholder 5">
+            <a:extLst>
+              <a:ext uri="{FF2B5EF4-FFF2-40B4-BE49-F238E27FC236}">
+                <a16:creationId xmlns:a16="http://schemas.microsoft.com/office/drawing/2014/main" id="{FE038F38-F79E-C59F-03D2-897266AAB8F4}"/>
+              </a:ext>
+            </a:extLst>
+          </p:cNvPr>
+          <p:cNvSpPr>
+            <a:spLocks noGrp="1"/>
+          </p:cNvSpPr>
+          <p:nvPr>
+            <p:ph type="sldNum" sz="quarter" idx="12"/>
+          </p:nvPr>
+        </p:nvSpPr>
+        <p:spPr bwMode="auto">
+          <a:noFill/>
+          <a:extLst>
+            <a:ext uri="{909E8E84-426E-40DD-AFC4-6F175D3DCCD1}">
+              <a14:hiddenFill xmlns:a14="http://schemas.microsoft.com/office/drawing/2010/main">
+                <a:solidFill>
+                  <a:srgbClr val="FFFFFF"/>
+                </a:solidFill>
+              </a14:hiddenFill>
+            </a:ext>
+            <a:ext uri="{91240B29-F687-4F45-9708-019B960494DF}">
+              <a14:hiddenLine xmlns:a14="http://schemas.microsoft.com/office/drawing/2010/main" w="9525">
+                <a:solidFill>
+                  <a:srgbClr val="000000"/>
+                </a:solidFill>
+                <a:miter lim="800000"/>
+                <a:headEnd/>
+                <a:tailEnd/>
+              </a14:hiddenLine>
+            </a:ext>
+          </a:extLst>
+        </p:spPr>
+        <p:txBody>
+          <a:bodyPr/>
+          <a:lstStyle>
+            <a:lvl1pPr>
+              <a:defRPr sz="2400">
+                <a:solidFill>
+                  <a:schemeClr val="tx1"/>
+                </a:solidFill>
+                <a:latin typeface="Arial" pitchFamily="34" charset="0"/>
+                <a:ea typeface="ＭＳ Ｐゴシック" pitchFamily="34" charset="-128"/>
+              </a:defRPr>
+            </a:lvl1pPr>
+            <a:lvl2pPr marL="742950" indent="-285750">
+              <a:defRPr sz="2400">
+                <a:solidFill>
+                  <a:schemeClr val="tx1"/>
+                </a:solidFill>
+                <a:latin typeface="Arial" pitchFamily="34" charset="0"/>
+                <a:ea typeface="ＭＳ Ｐゴシック" pitchFamily="34" charset="-128"/>
+              </a:defRPr>
+            </a:lvl2pPr>
+            <a:lvl3pPr marL="1143000" indent="-228600">
+              <a:defRPr sz="2400">
+                <a:solidFill>
+                  <a:schemeClr val="tx1"/>
+                </a:solidFill>
+                <a:latin typeface="Arial" pitchFamily="34" charset="0"/>
+                <a:ea typeface="ＭＳ Ｐゴシック" pitchFamily="34" charset="-128"/>
+              </a:defRPr>
+            </a:lvl3pPr>
+            <a:lvl4pPr marL="1600200" indent="-228600">
+              <a:defRPr sz="2400">
+                <a:solidFill>
+                  <a:schemeClr val="tx1"/>
+                </a:solidFill>
+                <a:latin typeface="Arial" pitchFamily="34" charset="0"/>
+                <a:ea typeface="ＭＳ Ｐゴシック" pitchFamily="34" charset="-128"/>
+              </a:defRPr>
+            </a:lvl4pPr>
+            <a:lvl5pPr marL="2057400" indent="-228600">
+              <a:defRPr sz="2400">
+                <a:solidFill>
+                  <a:schemeClr val="tx1"/>
+                </a:solidFill>
+                <a:latin typeface="Arial" pitchFamily="34" charset="0"/>
+                <a:ea typeface="ＭＳ Ｐゴシック" pitchFamily="34" charset="-128"/>
+              </a:defRPr>
+            </a:lvl5pPr>
+            <a:lvl6pPr marL="2514600" indent="-228600" defTabSz="457200" eaLnBrk="0" fontAlgn="base" hangingPunct="0">
+              <a:spcBef>
+                <a:spcPct val="0"/>
+              </a:spcBef>
+              <a:spcAft>
+                <a:spcPct val="0"/>
+              </a:spcAft>
+              <a:defRPr sz="2400">
+                <a:solidFill>
+                  <a:schemeClr val="tx1"/>
+                </a:solidFill>
+                <a:latin typeface="Arial" pitchFamily="34" charset="0"/>
+                <a:ea typeface="ＭＳ Ｐゴシック" pitchFamily="34" charset="-128"/>
+              </a:defRPr>
+            </a:lvl6pPr>
+            <a:lvl7pPr marL="2971800" indent="-228600" defTabSz="457200" eaLnBrk="0" fontAlgn="base" hangingPunct="0">
+              <a:spcBef>
+                <a:spcPct val="0"/>
+              </a:spcBef>
+              <a:spcAft>
+                <a:spcPct val="0"/>
+              </a:spcAft>
+              <a:defRPr sz="2400">
+                <a:solidFill>
+                  <a:schemeClr val="tx1"/>
+                </a:solidFill>
+                <a:latin typeface="Arial" pitchFamily="34" charset="0"/>
+                <a:ea typeface="ＭＳ Ｐゴシック" pitchFamily="34" charset="-128"/>
+              </a:defRPr>
+            </a:lvl7pPr>
+            <a:lvl8pPr marL="3429000" indent="-228600" defTabSz="457200" eaLnBrk="0" fontAlgn="base" hangingPunct="0">
+              <a:spcBef>
+                <a:spcPct val="0"/>
+              </a:spcBef>
+              <a:spcAft>
+                <a:spcPct val="0"/>
+              </a:spcAft>
+              <a:defRPr sz="2400">
+                <a:solidFill>
+                  <a:schemeClr val="tx1"/>
+                </a:solidFill>
+                <a:latin typeface="Arial" pitchFamily="34" charset="0"/>
+                <a:ea typeface="ＭＳ Ｐゴシック" pitchFamily="34" charset="-128"/>
+              </a:defRPr>
+            </a:lvl8pPr>
+            <a:lvl9pPr marL="3886200" indent="-228600" defTabSz="457200" eaLnBrk="0" fontAlgn="base" hangingPunct="0">
+              <a:spcBef>
+                <a:spcPct val="0"/>
+              </a:spcBef>
+              <a:spcAft>
+                <a:spcPct val="0"/>
+              </a:spcAft>
+              <a:defRPr sz="2400">
+                <a:solidFill>
+                  <a:schemeClr val="tx1"/>
+                </a:solidFill>
+                <a:latin typeface="Arial" pitchFamily="34" charset="0"/>
+                <a:ea typeface="ＭＳ Ｐゴシック" pitchFamily="34" charset="-128"/>
+              </a:defRPr>
+            </a:lvl9pPr>
+          </a:lstStyle>
+          <a:p>
+            <a:pPr>
+              <a:lnSpc>
+                <a:spcPct val="80000"/>
+              </a:lnSpc>
+            </a:pPr>
+            <a:fld id="{7ACFB0A3-B47E-46F0-80A4-ED7E0109ECCF}" type="slidenum">
+              <a:rPr lang="en-US" sz="1200">
+                <a:solidFill>
+                  <a:schemeClr val="accent1"/>
+                </a:solidFill>
+              </a:rPr>
+              <a:pPr>
+                <a:lnSpc>
+                  <a:spcPct val="80000"/>
+                </a:lnSpc>
+              </a:pPr>
+              <a:t>28</a:t>
+            </a:fld>
+            <a:endParaRPr lang="en-US" sz="1200">
+              <a:solidFill>
+                <a:schemeClr val="accent1"/>
+              </a:solidFill>
+            </a:endParaRPr>
+          </a:p>
+        </p:txBody>
+      </p:sp>
+      <p:sp>
+        <p:nvSpPr>
+          <p:cNvPr id="6" name="Rectangle 3">
+            <a:extLst>
+              <a:ext uri="{FF2B5EF4-FFF2-40B4-BE49-F238E27FC236}">
+                <a16:creationId xmlns:a16="http://schemas.microsoft.com/office/drawing/2014/main" id="{960637E8-8E5C-915A-4274-C1823FFC7D31}"/>
+              </a:ext>
+            </a:extLst>
+          </p:cNvPr>
+          <p:cNvSpPr txBox="1">
+            <a:spLocks noChangeArrowheads="1"/>
+          </p:cNvSpPr>
+          <p:nvPr/>
+        </p:nvSpPr>
+        <p:spPr bwMode="auto">
+          <a:xfrm>
+            <a:off x="174623" y="2085173"/>
+            <a:ext cx="8740777" cy="2922663"/>
+          </a:xfrm>
+          <a:prstGeom prst="rect">
+            <a:avLst/>
+          </a:prstGeom>
+          <a:noFill/>
+          <a:ln>
+            <a:noFill/>
+          </a:ln>
+          <a:extLst>
+            <a:ext uri="{909E8E84-426E-40DD-AFC4-6F175D3DCCD1}">
+              <a14:hiddenFill xmlns:a14="http://schemas.microsoft.com/office/drawing/2010/main">
+                <a:solidFill>
+                  <a:srgbClr val="FFFFFF"/>
+                </a:solidFill>
+              </a14:hiddenFill>
+            </a:ext>
+            <a:ext uri="{91240B29-F687-4F45-9708-019B960494DF}">
+              <a14:hiddenLine xmlns:a14="http://schemas.microsoft.com/office/drawing/2010/main" w="9525">
+                <a:solidFill>
+                  <a:srgbClr val="000000"/>
+                </a:solidFill>
+                <a:miter lim="800000"/>
+                <a:headEnd/>
+                <a:tailEnd/>
+              </a14:hiddenLine>
+            </a:ext>
+          </a:extLst>
+        </p:spPr>
+        <p:txBody>
+          <a:bodyPr/>
+          <a:lstStyle>
+            <a:lvl1pPr>
+              <a:defRPr sz="2400">
+                <a:solidFill>
+                  <a:schemeClr val="tx1"/>
+                </a:solidFill>
+                <a:latin typeface="Arial" pitchFamily="34" charset="0"/>
+                <a:ea typeface="ＭＳ Ｐゴシック" pitchFamily="34" charset="-128"/>
+              </a:defRPr>
+            </a:lvl1pPr>
+            <a:lvl2pPr marL="742950" indent="-285750">
+              <a:defRPr sz="2400">
+                <a:solidFill>
+                  <a:schemeClr val="tx1"/>
+                </a:solidFill>
+                <a:latin typeface="Arial" pitchFamily="34" charset="0"/>
+                <a:ea typeface="ＭＳ Ｐゴシック" pitchFamily="34" charset="-128"/>
+              </a:defRPr>
+            </a:lvl2pPr>
+            <a:lvl3pPr marL="1143000" indent="-228600">
+              <a:defRPr sz="2400">
+                <a:solidFill>
+                  <a:schemeClr val="tx1"/>
+                </a:solidFill>
+                <a:latin typeface="Arial" pitchFamily="34" charset="0"/>
+                <a:ea typeface="ＭＳ Ｐゴシック" pitchFamily="34" charset="-128"/>
+              </a:defRPr>
+            </a:lvl3pPr>
+            <a:lvl4pPr marL="1600200" indent="-228600">
+              <a:defRPr sz="2400">
+                <a:solidFill>
+                  <a:schemeClr val="tx1"/>
+                </a:solidFill>
+                <a:latin typeface="Arial" pitchFamily="34" charset="0"/>
+                <a:ea typeface="ＭＳ Ｐゴシック" pitchFamily="34" charset="-128"/>
+              </a:defRPr>
+            </a:lvl4pPr>
+            <a:lvl5pPr marL="2057400" indent="-228600">
+              <a:defRPr sz="2400">
+                <a:solidFill>
+                  <a:schemeClr val="tx1"/>
+                </a:solidFill>
+                <a:latin typeface="Arial" pitchFamily="34" charset="0"/>
+                <a:ea typeface="ＭＳ Ｐゴシック" pitchFamily="34" charset="-128"/>
+              </a:defRPr>
+            </a:lvl5pPr>
+            <a:lvl6pPr marL="2514600" indent="-228600" defTabSz="457200" eaLnBrk="0" fontAlgn="base" hangingPunct="0">
+              <a:spcBef>
+                <a:spcPct val="0"/>
+              </a:spcBef>
+              <a:spcAft>
+                <a:spcPct val="0"/>
+              </a:spcAft>
+              <a:defRPr sz="2400">
+                <a:solidFill>
+                  <a:schemeClr val="tx1"/>
+                </a:solidFill>
+                <a:latin typeface="Arial" pitchFamily="34" charset="0"/>
+                <a:ea typeface="ＭＳ Ｐゴシック" pitchFamily="34" charset="-128"/>
+              </a:defRPr>
+            </a:lvl6pPr>
+            <a:lvl7pPr marL="2971800" indent="-228600" defTabSz="457200" eaLnBrk="0" fontAlgn="base" hangingPunct="0">
+              <a:spcBef>
+                <a:spcPct val="0"/>
+              </a:spcBef>
+              <a:spcAft>
+                <a:spcPct val="0"/>
+              </a:spcAft>
+              <a:defRPr sz="2400">
+                <a:solidFill>
+                  <a:schemeClr val="tx1"/>
+                </a:solidFill>
+                <a:latin typeface="Arial" pitchFamily="34" charset="0"/>
+                <a:ea typeface="ＭＳ Ｐゴシック" pitchFamily="34" charset="-128"/>
+              </a:defRPr>
+            </a:lvl7pPr>
+            <a:lvl8pPr marL="3429000" indent="-228600" defTabSz="457200" eaLnBrk="0" fontAlgn="base" hangingPunct="0">
+              <a:spcBef>
+                <a:spcPct val="0"/>
+              </a:spcBef>
+              <a:spcAft>
+                <a:spcPct val="0"/>
+              </a:spcAft>
+              <a:defRPr sz="2400">
+                <a:solidFill>
+                  <a:schemeClr val="tx1"/>
+                </a:solidFill>
+                <a:latin typeface="Arial" pitchFamily="34" charset="0"/>
+                <a:ea typeface="ＭＳ Ｐゴシック" pitchFamily="34" charset="-128"/>
+              </a:defRPr>
+            </a:lvl8pPr>
+            <a:lvl9pPr marL="3886200" indent="-228600" defTabSz="457200" eaLnBrk="0" fontAlgn="base" hangingPunct="0">
+              <a:spcBef>
+                <a:spcPct val="0"/>
+              </a:spcBef>
+              <a:spcAft>
+                <a:spcPct val="0"/>
+              </a:spcAft>
+              <a:defRPr sz="2400">
+                <a:solidFill>
+                  <a:schemeClr val="tx1"/>
+                </a:solidFill>
+                <a:latin typeface="Arial" pitchFamily="34" charset="0"/>
+                <a:ea typeface="ＭＳ Ｐゴシック" pitchFamily="34" charset="-128"/>
+              </a:defRPr>
+            </a:lvl9pPr>
+          </a:lstStyle>
+          <a:p>
+            <a:pPr lvl="0"/>
+            <a:r>
+              <a:rPr lang="en-US" sz="2000" b="1" dirty="0"/>
+              <a:t>Stratified sampling:</a:t>
+            </a:r>
+            <a:r>
+              <a:rPr lang="en-US" sz="2000" dirty="0"/>
+              <a:t> divide the population into important subgroups and randomly sample within each subgroup.</a:t>
+            </a:r>
+          </a:p>
+          <a:p>
+            <a:pPr lvl="0"/>
+            <a:br>
+              <a:rPr lang="en-US" sz="2000" dirty="0"/>
+            </a:br>
+            <a:r>
+              <a:rPr lang="en-US" sz="2000" b="1" dirty="0"/>
+              <a:t>Multistage sampling:</a:t>
+            </a:r>
+            <a:r>
+              <a:rPr lang="en-US" sz="2000" dirty="0"/>
+              <a:t> randomly select groups in stages, then sample smaller units within the selected groups.</a:t>
+            </a:r>
+          </a:p>
+          <a:p>
+            <a:pPr lvl="0"/>
+            <a:endParaRPr lang="en-US" sz="2000" dirty="0"/>
+          </a:p>
+          <a:p>
+            <a:pPr lvl="0"/>
+            <a:r>
+              <a:rPr lang="en-US" sz="2000" dirty="0"/>
+              <a:t>Also, the two can be combined. A multistage design can use stratified sampling at one or more stages. In fact</a:t>
+            </a:r>
+            <a:r>
+              <a:rPr lang="en-US" sz="2000"/>
+              <a:t>, the Current </a:t>
+            </a:r>
+            <a:r>
+              <a:rPr lang="en-US" sz="2000" dirty="0"/>
+              <a:t>Population Survey example does exactly that.</a:t>
+            </a:r>
+          </a:p>
+        </p:txBody>
+      </p:sp>
+      <p:sp>
+        <p:nvSpPr>
+          <p:cNvPr id="2" name="Rectangle 2">
+            <a:extLst>
+              <a:ext uri="{FF2B5EF4-FFF2-40B4-BE49-F238E27FC236}">
+                <a16:creationId xmlns:a16="http://schemas.microsoft.com/office/drawing/2014/main" id="{4E8AA50B-542C-8966-F872-6E2BBC2E0880}"/>
+              </a:ext>
+            </a:extLst>
+          </p:cNvPr>
+          <p:cNvSpPr txBox="1">
+            <a:spLocks noChangeArrowheads="1"/>
+          </p:cNvSpPr>
+          <p:nvPr/>
+        </p:nvSpPr>
+        <p:spPr bwMode="auto">
+          <a:xfrm>
+            <a:off x="174623" y="139432"/>
+            <a:ext cx="7772400" cy="1150204"/>
+          </a:xfrm>
+          <a:prstGeom prst="rect">
+            <a:avLst/>
+          </a:prstGeom>
+          <a:solidFill>
+            <a:schemeClr val="accent2"/>
+          </a:solidFill>
+          <a:ln>
+            <a:noFill/>
+          </a:ln>
+        </p:spPr>
+        <p:txBody>
+          <a:bodyPr vert="horz" wrap="square" lIns="91440" tIns="45720" rIns="91440" bIns="45720" numCol="1" anchor="b" anchorCtr="0" compatLnSpc="1">
+            <a:prstTxWarp prst="textNoShape">
+              <a:avLst/>
+            </a:prstTxWarp>
+          </a:bodyPr>
+          <a:lstStyle>
+            <a:lvl1pPr algn="l" rtl="0" eaLnBrk="0" fontAlgn="base" hangingPunct="0">
+              <a:spcBef>
+                <a:spcPct val="0"/>
+              </a:spcBef>
+              <a:spcAft>
+                <a:spcPct val="0"/>
+              </a:spcAft>
+              <a:defRPr sz="3600" kern="1200">
+                <a:solidFill>
+                  <a:schemeClr val="accent1"/>
+                </a:solidFill>
+                <a:latin typeface="+mj-lt"/>
+                <a:ea typeface="ＭＳ Ｐゴシック" pitchFamily="-1" charset="-128"/>
+                <a:cs typeface="ＭＳ Ｐゴシック" pitchFamily="-1" charset="-128"/>
+              </a:defRPr>
+            </a:lvl1pPr>
+            <a:lvl2pPr algn="l" rtl="0" eaLnBrk="0" fontAlgn="base" hangingPunct="0">
+              <a:spcBef>
+                <a:spcPct val="0"/>
+              </a:spcBef>
+              <a:spcAft>
+                <a:spcPct val="0"/>
+              </a:spcAft>
+              <a:defRPr sz="3600">
+                <a:solidFill>
+                  <a:schemeClr val="accent1"/>
+                </a:solidFill>
+                <a:latin typeface="Arial" pitchFamily="-1" charset="0"/>
+                <a:ea typeface="ＭＳ Ｐゴシック" pitchFamily="-1" charset="-128"/>
+                <a:cs typeface="ＭＳ Ｐゴシック" pitchFamily="-1" charset="-128"/>
+              </a:defRPr>
+            </a:lvl2pPr>
+            <a:lvl3pPr algn="l" rtl="0" eaLnBrk="0" fontAlgn="base" hangingPunct="0">
+              <a:spcBef>
+                <a:spcPct val="0"/>
+              </a:spcBef>
+              <a:spcAft>
+                <a:spcPct val="0"/>
+              </a:spcAft>
+              <a:defRPr sz="3600">
+                <a:solidFill>
+                  <a:schemeClr val="accent1"/>
+                </a:solidFill>
+                <a:latin typeface="Arial" pitchFamily="-1" charset="0"/>
+                <a:ea typeface="ＭＳ Ｐゴシック" pitchFamily="-1" charset="-128"/>
+                <a:cs typeface="ＭＳ Ｐゴシック" pitchFamily="-1" charset="-128"/>
+              </a:defRPr>
+            </a:lvl3pPr>
+            <a:lvl4pPr algn="l" rtl="0" eaLnBrk="0" fontAlgn="base" hangingPunct="0">
+              <a:spcBef>
+                <a:spcPct val="0"/>
+              </a:spcBef>
+              <a:spcAft>
+                <a:spcPct val="0"/>
+              </a:spcAft>
+              <a:defRPr sz="3600">
+                <a:solidFill>
+                  <a:schemeClr val="accent1"/>
+                </a:solidFill>
+                <a:latin typeface="Arial" pitchFamily="-1" charset="0"/>
+                <a:ea typeface="ＭＳ Ｐゴシック" pitchFamily="-1" charset="-128"/>
+                <a:cs typeface="ＭＳ Ｐゴシック" pitchFamily="-1" charset="-128"/>
+              </a:defRPr>
+            </a:lvl4pPr>
+            <a:lvl5pPr algn="l" rtl="0" eaLnBrk="0" fontAlgn="base" hangingPunct="0">
+              <a:spcBef>
+                <a:spcPct val="0"/>
+              </a:spcBef>
+              <a:spcAft>
+                <a:spcPct val="0"/>
+              </a:spcAft>
+              <a:defRPr sz="3600">
+                <a:solidFill>
+                  <a:schemeClr val="accent1"/>
+                </a:solidFill>
+                <a:latin typeface="Arial" pitchFamily="-1" charset="0"/>
+                <a:ea typeface="ＭＳ Ｐゴシック" pitchFamily="-1" charset="-128"/>
+                <a:cs typeface="ＭＳ Ｐゴシック" pitchFamily="-1" charset="-128"/>
+              </a:defRPr>
+            </a:lvl5pPr>
+            <a:lvl6pPr marL="457200" algn="l" rtl="0" fontAlgn="base">
+              <a:spcBef>
+                <a:spcPct val="0"/>
+              </a:spcBef>
+              <a:spcAft>
+                <a:spcPct val="0"/>
+              </a:spcAft>
+              <a:defRPr sz="3600">
+                <a:solidFill>
+                  <a:schemeClr val="accent1"/>
+                </a:solidFill>
+                <a:latin typeface="Arial" pitchFamily="-1" charset="0"/>
+                <a:ea typeface="ＭＳ Ｐゴシック" pitchFamily="-1" charset="-128"/>
+                <a:cs typeface="ＭＳ Ｐゴシック" pitchFamily="-1" charset="-128"/>
+              </a:defRPr>
+            </a:lvl6pPr>
+            <a:lvl7pPr marL="914400" algn="l" rtl="0" fontAlgn="base">
+              <a:spcBef>
+                <a:spcPct val="0"/>
+              </a:spcBef>
+              <a:spcAft>
+                <a:spcPct val="0"/>
+              </a:spcAft>
+              <a:defRPr sz="3600">
+                <a:solidFill>
+                  <a:schemeClr val="accent1"/>
+                </a:solidFill>
+                <a:latin typeface="Arial" pitchFamily="-1" charset="0"/>
+                <a:ea typeface="ＭＳ Ｐゴシック" pitchFamily="-1" charset="-128"/>
+                <a:cs typeface="ＭＳ Ｐゴシック" pitchFamily="-1" charset="-128"/>
+              </a:defRPr>
+            </a:lvl7pPr>
+            <a:lvl8pPr marL="1371600" algn="l" rtl="0" fontAlgn="base">
+              <a:spcBef>
+                <a:spcPct val="0"/>
+              </a:spcBef>
+              <a:spcAft>
+                <a:spcPct val="0"/>
+              </a:spcAft>
+              <a:defRPr sz="3600">
+                <a:solidFill>
+                  <a:schemeClr val="accent1"/>
+                </a:solidFill>
+                <a:latin typeface="Arial" pitchFamily="-1" charset="0"/>
+                <a:ea typeface="ＭＳ Ｐゴシック" pitchFamily="-1" charset="-128"/>
+                <a:cs typeface="ＭＳ Ｐゴシック" pitchFamily="-1" charset="-128"/>
+              </a:defRPr>
+            </a:lvl8pPr>
+            <a:lvl9pPr marL="1828800" algn="l" rtl="0" fontAlgn="base">
+              <a:spcBef>
+                <a:spcPct val="0"/>
+              </a:spcBef>
+              <a:spcAft>
+                <a:spcPct val="0"/>
+              </a:spcAft>
+              <a:defRPr sz="3600">
+                <a:solidFill>
+                  <a:schemeClr val="accent1"/>
+                </a:solidFill>
+                <a:latin typeface="Arial" pitchFamily="-1" charset="0"/>
+                <a:ea typeface="ＭＳ Ｐゴシック" pitchFamily="-1" charset="-128"/>
+                <a:cs typeface="ＭＳ Ｐゴシック" pitchFamily="-1" charset="-128"/>
+              </a:defRPr>
+            </a:lvl9pPr>
+          </a:lstStyle>
+          <a:p>
+            <a:pPr defTabSz="914400" eaLnBrk="1" hangingPunct="1"/>
+            <a:endParaRPr lang="en-US" dirty="0">
+              <a:ea typeface="ＭＳ Ｐゴシック" pitchFamily="34" charset="-128"/>
+              <a:cs typeface="Arial" pitchFamily="34" charset="0"/>
+            </a:endParaRPr>
+          </a:p>
+          <a:p>
+            <a:pPr defTabSz="914400" eaLnBrk="1" hangingPunct="1"/>
+            <a:r>
+              <a:rPr lang="en-US" dirty="0">
+                <a:ea typeface="ＭＳ Ｐゴシック" pitchFamily="34" charset="-128"/>
+                <a:cs typeface="Arial" pitchFamily="34" charset="0"/>
+              </a:rPr>
+              <a:t>Stratified Random Samples vs. Multistage Random Samples</a:t>
+            </a:r>
+          </a:p>
+        </p:txBody>
+      </p:sp>
+    </p:spTree>
+    <p:extLst>
+      <p:ext uri="{BB962C8B-B14F-4D97-AF65-F5344CB8AC3E}">
+        <p14:creationId xmlns:p14="http://schemas.microsoft.com/office/powerpoint/2010/main" val="1091396764"/>
+      </p:ext>
+    </p:extLst>
+  </p:cSld>
+  <p:clrMapOvr>
+    <a:masterClrMapping/>
+  </p:clrMapOvr>
+  <p:transition spd="med">
+    <p:fade/>
+  </p:transition>
+</p:sld>
+</file>
+
 <file path=ppt/slides/slide29.xml><?xml version="1.0" encoding="utf-8"?>
 <p:sld xmlns:a="http://schemas.openxmlformats.org/drawingml/2006/main" xmlns:r="http://schemas.openxmlformats.org/officeDocument/2006/relationships" xmlns:p="http://schemas.openxmlformats.org/presentationml/2006/main" showMasterPhAnim="0">
   <p:cSld>
@@ -27665,7 +26808,7 @@
           <a:p>
             <a:pPr eaLnBrk="1" hangingPunct="1"/>
             <a:r>
-              <a:rPr lang="en-US" b="1">
+              <a:rPr lang="en-US" b="1" dirty="0">
                 <a:solidFill>
                   <a:schemeClr val="accent1">
                     <a:lumMod val="75000"/>
@@ -27692,38 +26835,6 @@
         <p:txBody>
           <a:bodyPr/>
           <a:lstStyle/>
-          <a:p>
-            <a:pPr eaLnBrk="1" hangingPunct="1">
-              <a:buSzPct val="110000"/>
-              <a:buFont typeface="Wingdings" pitchFamily="2" charset="2"/>
-              <a:buChar char="§"/>
-            </a:pPr>
-            <a:r>
-              <a:rPr lang="en-US" sz="2400" dirty="0">
-                <a:solidFill>
-                  <a:schemeClr val="accent1"/>
-                </a:solidFill>
-                <a:ea typeface="ＭＳ Ｐゴシック" pitchFamily="34" charset="-128"/>
-              </a:rPr>
-              <a:t>Anecdotal data</a:t>
-            </a:r>
-          </a:p>
-          <a:p>
-            <a:pPr eaLnBrk="1" hangingPunct="1">
-              <a:buSzPct val="110000"/>
-              <a:buFont typeface="Wingdings" pitchFamily="2" charset="2"/>
-              <a:buChar char="§"/>
-            </a:pPr>
-            <a:r>
-              <a:rPr lang="en-US" sz="2400" dirty="0">
-                <a:solidFill>
-                  <a:schemeClr val="accent1"/>
-                </a:solidFill>
-                <a:ea typeface="ＭＳ Ｐゴシック" pitchFamily="34" charset="-128"/>
-              </a:rPr>
-              <a:t>Available data</a:t>
-            </a:r>
-          </a:p>
           <a:p>
             <a:pPr eaLnBrk="1" hangingPunct="1">
               <a:buSzPct val="110000"/>
@@ -28717,7 +27828,7 @@
                 <a:ea typeface="ＭＳ Ｐゴシック" pitchFamily="34" charset="-128"/>
                 <a:cs typeface="Arial" pitchFamily="34" charset="0"/>
               </a:rPr>
-              <a:t>Obtaining Data</a:t>
+              <a:t>Representative Data</a:t>
             </a:r>
           </a:p>
         </p:txBody>
@@ -28897,8 +28008,8 @@
         </p:nvSpPr>
         <p:spPr>
           <a:xfrm>
-            <a:off x="174623" y="1408611"/>
-            <a:ext cx="7813675" cy="5294313"/>
+            <a:off x="174623" y="947192"/>
+            <a:ext cx="8678820" cy="5294313"/>
           </a:xfrm>
         </p:spPr>
         <p:txBody>
@@ -28910,79 +28021,13 @@
               <a:buNone/>
             </a:pPr>
             <a:r>
-              <a:rPr lang="en-US" dirty="0">
-                <a:solidFill>
-                  <a:schemeClr val="tx1"/>
-                </a:solidFill>
-                <a:ea typeface="ＭＳ Ｐゴシック" pitchFamily="34" charset="-128"/>
-              </a:rPr>
-              <a:t>Beware of drawing conclusions from our own experience or hearsay</a:t>
-            </a:r>
-            <a:r>
-              <a:rPr lang="en-US" dirty="0">
-                <a:solidFill>
-                  <a:srgbClr val="800000"/>
-                </a:solidFill>
-                <a:ea typeface="ＭＳ Ｐゴシック" pitchFamily="34" charset="-128"/>
-              </a:rPr>
-              <a:t>. </a:t>
-            </a:r>
-            <a:r>
               <a:rPr lang="en-US" b="1" dirty="0">
                 <a:solidFill>
-                  <a:srgbClr val="800000"/>
-                </a:solidFill>
-                <a:ea typeface="ＭＳ Ｐゴシック" pitchFamily="34" charset="-128"/>
-              </a:rPr>
-              <a:t>Anecdotal data </a:t>
-            </a:r>
-            <a:r>
-              <a:rPr lang="en-US" dirty="0">
-                <a:solidFill>
-                  <a:schemeClr val="tx1"/>
-                </a:solidFill>
-                <a:ea typeface="ＭＳ Ｐゴシック" pitchFamily="34" charset="-128"/>
-              </a:rPr>
-              <a:t>represent individual cases that often come to our attention because they are striking in some way. We tend to remember these cases because they are unusual. </a:t>
-            </a:r>
-            <a:r>
-              <a:rPr lang="en-US" b="1" dirty="0">
-                <a:solidFill>
-                  <a:schemeClr val="tx1"/>
-                </a:solidFill>
-                <a:ea typeface="ＭＳ Ｐゴシック" pitchFamily="34" charset="-128"/>
-              </a:rPr>
-              <a:t>The fact that they are unusual means that they may not be representative of any larger group of cases.</a:t>
-            </a:r>
-            <a:endParaRPr lang="en-US" b="1" i="1" dirty="0">
-              <a:solidFill>
-                <a:schemeClr val="tx1"/>
-              </a:solidFill>
-              <a:ea typeface="ＭＳ Ｐゴシック" pitchFamily="34" charset="-128"/>
-            </a:endParaRPr>
-          </a:p>
-          <a:p>
-            <a:pPr marL="0" indent="0" eaLnBrk="1" hangingPunct="1">
-              <a:buFont typeface="Wingdings 2" pitchFamily="18" charset="2"/>
-              <a:buNone/>
-            </a:pPr>
-            <a:r>
-              <a:rPr lang="en-US" b="1" dirty="0">
-                <a:solidFill>
-                  <a:srgbClr val="800000"/>
-                </a:solidFill>
-                <a:ea typeface="ＭＳ Ｐゴシック" pitchFamily="34" charset="-128"/>
-              </a:rPr>
-              <a:t>Available data </a:t>
-            </a:r>
-            <a:r>
-              <a:rPr lang="en-US" dirty="0">
-                <a:solidFill>
-                  <a:schemeClr val="tx1"/>
-                </a:solidFill>
-                <a:ea typeface="ＭＳ Ｐゴシック" pitchFamily="34" charset="-128"/>
-              </a:rPr>
-              <a:t>are data that were produced in the past for some other purpose but that may help answer a present question inexpensively. The library and the Internet are sources of available data.</a:t>
+                  <a:schemeClr val="tx1"/>
+                </a:solidFill>
+                <a:ea typeface="ＭＳ Ｐゴシック" pitchFamily="34" charset="-128"/>
+              </a:rPr>
+              <a:t>Research question: </a:t>
             </a:r>
           </a:p>
           <a:p>
@@ -28997,26 +28042,59 @@
                 </a:solidFill>
                 <a:ea typeface="ＭＳ Ｐゴシック" pitchFamily="34" charset="-128"/>
               </a:rPr>
-              <a:t>Some questions require data produced specifically to answer them. This leads to </a:t>
-            </a:r>
+              <a:t>What proportion of adults in Wisconsin meet recommended levels of physical activity?</a:t>
+            </a:r>
+          </a:p>
+          <a:p>
+            <a:pPr marL="0" indent="0" eaLnBrk="1" hangingPunct="1">
+              <a:buFont typeface="Wingdings" pitchFamily="2" charset="2"/>
+              <a:buNone/>
+            </a:pPr>
             <a:r>
               <a:rPr lang="en-US" b="1" dirty="0">
                 <a:solidFill>
-                  <a:srgbClr val="800000"/>
-                </a:solidFill>
-                <a:ea typeface="ＭＳ Ｐゴシック" pitchFamily="34" charset="-128"/>
-              </a:rPr>
-              <a:t>designing</a:t>
-            </a:r>
+                  <a:schemeClr val="tx1"/>
+                </a:solidFill>
+                <a:ea typeface="ＭＳ Ｐゴシック" pitchFamily="34" charset="-128"/>
+              </a:rPr>
+              <a:t>Target population: </a:t>
+            </a:r>
+          </a:p>
+          <a:p>
+            <a:pPr marL="0" indent="0" eaLnBrk="1" hangingPunct="1">
+              <a:buFont typeface="Wingdings" pitchFamily="2" charset="2"/>
+              <a:buNone/>
+            </a:pPr>
             <a:r>
               <a:rPr lang="en-US" dirty="0">
                 <a:solidFill>
-                  <a:srgbClr val="800000"/>
-                </a:solidFill>
-                <a:ea typeface="ＭＳ Ｐゴシック" pitchFamily="34" charset="-128"/>
-              </a:rPr>
-              <a:t> </a:t>
-            </a:r>
+                  <a:schemeClr val="tx1"/>
+                </a:solidFill>
+                <a:ea typeface="ＭＳ Ｐゴシック" pitchFamily="34" charset="-128"/>
+              </a:rPr>
+              <a:t>All adults living in Wisconsin.</a:t>
+            </a:r>
+          </a:p>
+          <a:p>
+            <a:pPr marL="0" indent="0" eaLnBrk="1" hangingPunct="1">
+              <a:buFont typeface="Wingdings" pitchFamily="2" charset="2"/>
+              <a:buNone/>
+            </a:pPr>
+            <a:r>
+              <a:rPr lang="en-US" b="1" dirty="0">
+                <a:solidFill>
+                  <a:schemeClr val="tx1"/>
+                </a:solidFill>
+                <a:ea typeface="ＭＳ Ｐゴシック" pitchFamily="34" charset="-128"/>
+              </a:rPr>
+              <a:t>Representative data:</a:t>
+            </a:r>
+          </a:p>
+          <a:p>
+            <a:pPr marL="0" indent="0" eaLnBrk="1" hangingPunct="1">
+              <a:buFont typeface="Wingdings" pitchFamily="2" charset="2"/>
+              <a:buNone/>
+            </a:pPr>
             <a:r>
               <a:rPr lang="en-US" dirty="0">
                 <a:solidFill>
@@ -29024,7 +28102,36 @@
                 </a:solidFill>
                 <a:ea typeface="ＭＳ Ｐゴシック" pitchFamily="34" charset="-128"/>
               </a:rPr>
-              <a:t>observational or experimental studies.</a:t>
+              <a:t>Data in which the observations adequately reflect the target population with respect to characteristics relevant to the research question.</a:t>
+            </a:r>
+          </a:p>
+          <a:p>
+            <a:pPr marL="0" indent="0" eaLnBrk="1" hangingPunct="1">
+              <a:buNone/>
+            </a:pPr>
+            <a:r>
+              <a:rPr lang="en-US" b="1" dirty="0">
+                <a:solidFill>
+                  <a:schemeClr val="tx1"/>
+                </a:solidFill>
+                <a:ea typeface="ＭＳ Ｐゴシック" pitchFamily="34" charset="-128"/>
+              </a:rPr>
+              <a:t>Need for representative data:</a:t>
+            </a:r>
+          </a:p>
+          <a:p>
+            <a:pPr marL="0" indent="0" eaLnBrk="1" hangingPunct="1">
+              <a:buFont typeface="Wingdings" pitchFamily="2" charset="2"/>
+              <a:buNone/>
+            </a:pPr>
+            <a:r>
+              <a:rPr lang="en-US" dirty="0">
+                <a:solidFill>
+                  <a:schemeClr val="tx1"/>
+                </a:solidFill>
+                <a:ea typeface="ＭＳ Ｐゴシック" pitchFamily="34" charset="-128"/>
+              </a:rPr>
+              <a:t>Statistical conclusions are most credible when the observed data adequately represent the population we want to learn about. If existing data do not adequately represent the target population, we may need to design an appropriate strategy to collect better data.</a:t>
             </a:r>
           </a:p>
         </p:txBody>
@@ -29043,13 +28150,13 @@
               <p:cTn id="2" dur="indefinite" nodeType="mainSeq">
                 <p:childTnLst>
                   <p:par>
-                    <p:cTn id="3" fill="hold" nodeType="clickPar">
+                    <p:cTn id="3" fill="hold">
                       <p:stCondLst>
                         <p:cond delay="indefinite"/>
                       </p:stCondLst>
                       <p:childTnLst>
                         <p:par>
-                          <p:cTn id="4" fill="hold" nodeType="withGroup">
+                          <p:cTn id="4" fill="hold">
                             <p:stCondLst>
                               <p:cond delay="0"/>
                             </p:stCondLst>
@@ -29063,6 +28170,55 @@
                                     <p:set>
                                       <p:cBhvr>
                                         <p:cTn id="6" dur="1" fill="hold">
+                                          <p:stCondLst>
+                                            <p:cond delay="0"/>
+                                          </p:stCondLst>
+                                        </p:cTn>
+                                        <p:tgtEl>
+                                          <p:spTgt spid="1265667">
+                                            <p:txEl>
+                                              <p:pRg st="0" end="0"/>
+                                            </p:txEl>
+                                          </p:spTgt>
+                                        </p:tgtEl>
+                                        <p:attrNameLst>
+                                          <p:attrName>style.visibility</p:attrName>
+                                        </p:attrNameLst>
+                                      </p:cBhvr>
+                                      <p:to>
+                                        <p:strVal val="visible"/>
+                                      </p:to>
+                                    </p:set>
+                                  </p:childTnLst>
+                                </p:cTn>
+                              </p:par>
+                            </p:childTnLst>
+                          </p:cTn>
+                        </p:par>
+                      </p:childTnLst>
+                    </p:cTn>
+                  </p:par>
+                  <p:par>
+                    <p:cTn id="7" fill="hold">
+                      <p:stCondLst>
+                        <p:cond delay="indefinite"/>
+                      </p:stCondLst>
+                      <p:childTnLst>
+                        <p:par>
+                          <p:cTn id="8" fill="hold">
+                            <p:stCondLst>
+                              <p:cond delay="0"/>
+                            </p:stCondLst>
+                            <p:childTnLst>
+                              <p:par>
+                                <p:cTn id="9" presetID="1" presetClass="entr" presetSubtype="0" fill="hold" nodeType="clickEffect">
+                                  <p:stCondLst>
+                                    <p:cond delay="0"/>
+                                  </p:stCondLst>
+                                  <p:childTnLst>
+                                    <p:set>
+                                      <p:cBhvr>
+                                        <p:cTn id="10" dur="1" fill="hold">
                                           <p:stCondLst>
                                             <p:cond delay="0"/>
                                           </p:stCondLst>
@@ -29092,26 +28248,26 @@
                     </p:cTn>
                   </p:par>
                   <p:par>
-                    <p:cTn id="7" fill="hold" nodeType="clickPar">
+                    <p:cTn id="11" fill="hold">
                       <p:stCondLst>
                         <p:cond delay="indefinite"/>
                       </p:stCondLst>
                       <p:childTnLst>
                         <p:par>
-                          <p:cTn id="8" fill="hold" nodeType="withGroup">
+                          <p:cTn id="12" fill="hold">
                             <p:stCondLst>
                               <p:cond delay="0"/>
                             </p:stCondLst>
                             <p:childTnLst>
                               <p:par>
-                                <p:cTn id="9" presetID="1" presetClass="entr" presetSubtype="0" fill="hold" nodeType="clickEffect">
+                                <p:cTn id="13" presetID="1" presetClass="entr" presetSubtype="0" fill="hold" nodeType="clickEffect">
                                   <p:stCondLst>
                                     <p:cond delay="0"/>
                                   </p:stCondLst>
                                   <p:childTnLst>
                                     <p:set>
                                       <p:cBhvr>
-                                        <p:cTn id="10" dur="1" fill="hold">
+                                        <p:cTn id="14" dur="1" fill="hold">
                                           <p:stCondLst>
                                             <p:cond delay="0"/>
                                           </p:stCondLst>
@@ -29120,6 +28276,251 @@
                                           <p:spTgt spid="1265667">
                                             <p:txEl>
                                               <p:pRg st="2" end="2"/>
+                                            </p:txEl>
+                                          </p:spTgt>
+                                        </p:tgtEl>
+                                        <p:attrNameLst>
+                                          <p:attrName>style.visibility</p:attrName>
+                                        </p:attrNameLst>
+                                      </p:cBhvr>
+                                      <p:to>
+                                        <p:strVal val="visible"/>
+                                      </p:to>
+                                    </p:set>
+                                  </p:childTnLst>
+                                </p:cTn>
+                              </p:par>
+                            </p:childTnLst>
+                          </p:cTn>
+                        </p:par>
+                      </p:childTnLst>
+                    </p:cTn>
+                  </p:par>
+                  <p:par>
+                    <p:cTn id="15" fill="hold">
+                      <p:stCondLst>
+                        <p:cond delay="indefinite"/>
+                      </p:stCondLst>
+                      <p:childTnLst>
+                        <p:par>
+                          <p:cTn id="16" fill="hold">
+                            <p:stCondLst>
+                              <p:cond delay="0"/>
+                            </p:stCondLst>
+                            <p:childTnLst>
+                              <p:par>
+                                <p:cTn id="17" presetID="1" presetClass="entr" presetSubtype="0" fill="hold" nodeType="clickEffect">
+                                  <p:stCondLst>
+                                    <p:cond delay="0"/>
+                                  </p:stCondLst>
+                                  <p:childTnLst>
+                                    <p:set>
+                                      <p:cBhvr>
+                                        <p:cTn id="18" dur="1" fill="hold">
+                                          <p:stCondLst>
+                                            <p:cond delay="0"/>
+                                          </p:stCondLst>
+                                        </p:cTn>
+                                        <p:tgtEl>
+                                          <p:spTgt spid="1265667">
+                                            <p:txEl>
+                                              <p:pRg st="3" end="3"/>
+                                            </p:txEl>
+                                          </p:spTgt>
+                                        </p:tgtEl>
+                                        <p:attrNameLst>
+                                          <p:attrName>style.visibility</p:attrName>
+                                        </p:attrNameLst>
+                                      </p:cBhvr>
+                                      <p:to>
+                                        <p:strVal val="visible"/>
+                                      </p:to>
+                                    </p:set>
+                                  </p:childTnLst>
+                                </p:cTn>
+                              </p:par>
+                            </p:childTnLst>
+                          </p:cTn>
+                        </p:par>
+                      </p:childTnLst>
+                    </p:cTn>
+                  </p:par>
+                  <p:par>
+                    <p:cTn id="19" fill="hold">
+                      <p:stCondLst>
+                        <p:cond delay="indefinite"/>
+                      </p:stCondLst>
+                      <p:childTnLst>
+                        <p:par>
+                          <p:cTn id="20" fill="hold">
+                            <p:stCondLst>
+                              <p:cond delay="0"/>
+                            </p:stCondLst>
+                            <p:childTnLst>
+                              <p:par>
+                                <p:cTn id="21" presetID="1" presetClass="entr" presetSubtype="0" fill="hold" nodeType="clickEffect">
+                                  <p:stCondLst>
+                                    <p:cond delay="0"/>
+                                  </p:stCondLst>
+                                  <p:childTnLst>
+                                    <p:set>
+                                      <p:cBhvr>
+                                        <p:cTn id="22" dur="1" fill="hold">
+                                          <p:stCondLst>
+                                            <p:cond delay="0"/>
+                                          </p:stCondLst>
+                                        </p:cTn>
+                                        <p:tgtEl>
+                                          <p:spTgt spid="1265667">
+                                            <p:txEl>
+                                              <p:pRg st="4" end="4"/>
+                                            </p:txEl>
+                                          </p:spTgt>
+                                        </p:tgtEl>
+                                        <p:attrNameLst>
+                                          <p:attrName>style.visibility</p:attrName>
+                                        </p:attrNameLst>
+                                      </p:cBhvr>
+                                      <p:to>
+                                        <p:strVal val="visible"/>
+                                      </p:to>
+                                    </p:set>
+                                  </p:childTnLst>
+                                </p:cTn>
+                              </p:par>
+                            </p:childTnLst>
+                          </p:cTn>
+                        </p:par>
+                      </p:childTnLst>
+                    </p:cTn>
+                  </p:par>
+                  <p:par>
+                    <p:cTn id="23" fill="hold">
+                      <p:stCondLst>
+                        <p:cond delay="indefinite"/>
+                      </p:stCondLst>
+                      <p:childTnLst>
+                        <p:par>
+                          <p:cTn id="24" fill="hold">
+                            <p:stCondLst>
+                              <p:cond delay="0"/>
+                            </p:stCondLst>
+                            <p:childTnLst>
+                              <p:par>
+                                <p:cTn id="25" presetID="1" presetClass="entr" presetSubtype="0" fill="hold" nodeType="clickEffect">
+                                  <p:stCondLst>
+                                    <p:cond delay="0"/>
+                                  </p:stCondLst>
+                                  <p:childTnLst>
+                                    <p:set>
+                                      <p:cBhvr>
+                                        <p:cTn id="26" dur="1" fill="hold">
+                                          <p:stCondLst>
+                                            <p:cond delay="0"/>
+                                          </p:stCondLst>
+                                        </p:cTn>
+                                        <p:tgtEl>
+                                          <p:spTgt spid="1265667">
+                                            <p:txEl>
+                                              <p:pRg st="6" end="6"/>
+                                            </p:txEl>
+                                          </p:spTgt>
+                                        </p:tgtEl>
+                                        <p:attrNameLst>
+                                          <p:attrName>style.visibility</p:attrName>
+                                        </p:attrNameLst>
+                                      </p:cBhvr>
+                                      <p:to>
+                                        <p:strVal val="visible"/>
+                                      </p:to>
+                                    </p:set>
+                                  </p:childTnLst>
+                                </p:cTn>
+                              </p:par>
+                            </p:childTnLst>
+                          </p:cTn>
+                        </p:par>
+                      </p:childTnLst>
+                    </p:cTn>
+                  </p:par>
+                  <p:par>
+                    <p:cTn id="27" fill="hold">
+                      <p:stCondLst>
+                        <p:cond delay="indefinite"/>
+                      </p:stCondLst>
+                      <p:childTnLst>
+                        <p:par>
+                          <p:cTn id="28" fill="hold">
+                            <p:stCondLst>
+                              <p:cond delay="0"/>
+                            </p:stCondLst>
+                            <p:childTnLst>
+                              <p:par>
+                                <p:cTn id="29" presetID="1" presetClass="entr" presetSubtype="0" fill="hold" nodeType="clickEffect">
+                                  <p:stCondLst>
+                                    <p:cond delay="0"/>
+                                  </p:stCondLst>
+                                  <p:childTnLst>
+                                    <p:set>
+                                      <p:cBhvr>
+                                        <p:cTn id="30" dur="1" fill="hold">
+                                          <p:stCondLst>
+                                            <p:cond delay="0"/>
+                                          </p:stCondLst>
+                                        </p:cTn>
+                                        <p:tgtEl>
+                                          <p:spTgt spid="1265667">
+                                            <p:txEl>
+                                              <p:pRg st="7" end="7"/>
+                                            </p:txEl>
+                                          </p:spTgt>
+                                        </p:tgtEl>
+                                        <p:attrNameLst>
+                                          <p:attrName>style.visibility</p:attrName>
+                                        </p:attrNameLst>
+                                      </p:cBhvr>
+                                      <p:to>
+                                        <p:strVal val="visible"/>
+                                      </p:to>
+                                    </p:set>
+                                  </p:childTnLst>
+                                </p:cTn>
+                              </p:par>
+                            </p:childTnLst>
+                          </p:cTn>
+                        </p:par>
+                      </p:childTnLst>
+                    </p:cTn>
+                  </p:par>
+                  <p:par>
+                    <p:cTn id="31" fill="hold">
+                      <p:stCondLst>
+                        <p:cond delay="indefinite"/>
+                      </p:stCondLst>
+                      <p:childTnLst>
+                        <p:par>
+                          <p:cTn id="32" fill="hold">
+                            <p:stCondLst>
+                              <p:cond delay="0"/>
+                            </p:stCondLst>
+                            <p:childTnLst>
+                              <p:par>
+                                <p:cTn id="33" presetID="1" presetClass="entr" presetSubtype="0" fill="hold" nodeType="clickEffect">
+                                  <p:stCondLst>
+                                    <p:cond delay="0"/>
+                                  </p:stCondLst>
+                                  <p:childTnLst>
+                                    <p:set>
+                                      <p:cBhvr>
+                                        <p:cTn id="34" dur="1" fill="hold">
+                                          <p:stCondLst>
+                                            <p:cond delay="0"/>
+                                          </p:stCondLst>
+                                        </p:cTn>
+                                        <p:tgtEl>
+                                          <p:spTgt spid="1265667">
+                                            <p:txEl>
+                                              <p:pRg st="7" end="7"/>
                                             </p:txEl>
                                           </p:spTgt>
                                         </p:tgtEl>
@@ -29198,10 +28599,9 @@
           <a:lstStyle/>
           <a:p>
             <a:r>
-              <a:rPr lang="en-US"/>
+              <a:rPr lang="en-US" dirty="0"/>
               <a:t>Sample Surveys</a:t>
             </a:r>
-            <a:endParaRPr lang="en-US" dirty="0"/>
           </a:p>
         </p:txBody>
       </p:sp>
@@ -29775,7 +29175,7 @@
         <p:spPr bwMode="auto">
           <a:xfrm>
             <a:off x="571498" y="1462078"/>
-            <a:ext cx="7375525" cy="2646878"/>
+            <a:ext cx="7375525" cy="2339102"/>
           </a:xfrm>
           <a:prstGeom prst="rect">
             <a:avLst/>
@@ -30009,23 +29409,7 @@
                   <a:srgbClr val="000000"/>
                 </a:solidFill>
               </a:rPr>
-              <a:t>deliberately imposes some treatment (i.e., </a:t>
-            </a:r>
-            <a:r>
-              <a:rPr lang="en-US" altLang="en-US" sz="2000" i="1" dirty="0">
-                <a:solidFill>
-                  <a:srgbClr val="FF0000"/>
-                </a:solidFill>
-              </a:rPr>
-              <a:t>intervention</a:t>
-            </a:r>
-            <a:r>
-              <a:rPr lang="en-US" altLang="en-US" sz="2000" dirty="0">
-                <a:solidFill>
-                  <a:srgbClr val="000000"/>
-                </a:solidFill>
-              </a:rPr>
-              <a:t>) on individuals to measure their responses. The purpose is to study whether the treatment causes a change in the response.</a:t>
+              <a:t>deliberately imposes some treatments on individuals to measure their responses. The purpose is to study whether the treatment causes a change in the response.</a:t>
             </a:r>
             <a:endParaRPr lang="en-US" altLang="en-US" sz="1000" dirty="0">
               <a:solidFill>
@@ -31547,18 +30931,6 @@
                 <a:ea typeface="ＭＳ Ｐゴシック" pitchFamily="34" charset="-128"/>
               </a:rPr>
               <a:t>Cautions about experimentation</a:t>
-            </a:r>
-          </a:p>
-          <a:p>
-            <a:pPr eaLnBrk="1" hangingPunct="1"/>
-            <a:r>
-              <a:rPr lang="en-US" sz="2400" dirty="0">
-                <a:solidFill>
-                  <a:srgbClr val="073779"/>
-                </a:solidFill>
-                <a:ea typeface="ＭＳ Ｐゴシック" pitchFamily="34" charset="-128"/>
-              </a:rPr>
-              <a:t>Matched pairs design</a:t>
             </a:r>
           </a:p>
           <a:p>
